--- a/decks/alcohol-and-your-brain-lesson-v2.pptx
+++ b/decks/alcohol-and-your-brain-lesson-v2.pptx
@@ -19,6 +19,8 @@
     <p:sldId id="267" r:id="rId19"/>
     <p:sldId id="268" r:id="rId20"/>
     <p:sldId id="269" r:id="rId21"/>
+    <p:sldId id="270" r:id="rId22"/>
+    <p:sldId id="271" r:id="rId23"/>
   </p:sldIdLst>
   <p:sldSz cx="12192000" cy="6858000" type="screen4x3"/>
   <p:notesSz cx="6858000" cy="9144000"/>
@@ -585,7 +587,7 @@
           <a:lstStyle/>
           <a:p>
             <a:r>
-              <a:t>5 MINUTES. Collect anonymously. Share the take-home link on the slide. It has the four stops, the signs, the exit plan, and who to talk to, including SAMHSA's free helpline at 1-800-662-4357. Remind students counselors handle questions about their own drinking, a friend's or someone's at home.</a:t>
+              <a:t>3 MINUTES IN PAIRS, THEN SHARE. Jae: call your exit-plan person and offer Jae a ride too. In Massachusetts a driver under 21 at 0.02 or above loses their license on the spot, and every 0.02 rise more than doubled young drivers' crash death risk. Amara: bring it up later, privately, when she's sober; three blackouts is a pattern worth a counselor's help. Family dinner: this is the family's call and the student's. Some families do this; one six-year study found parents supplying alcohol wasn't protective, and students can pass without making a scene. Respect every family's answer.</a:t>
             </a:r>
           </a:p>
         </p:txBody>
@@ -655,6 +657,146 @@
           <a:lstStyle/>
           <a:p>
             <a:r>
+              <a:t>5 MINUTES. Private reflection: ask students to write the name of their exit-plan person on the back of their exit card (they keep that part). Families handle this differently: some will pick up with no questions that night, and some won't. A parent, older sibling, cousin, aunt or family friend all work. Never mixing with weed or pills matters because both slow breathing too.</a:t>
+            </a:r>
+          </a:p>
+        </p:txBody>
+      </p:sp>
+      <p:sp>
+        <p:nvSpPr>
+          <p:cNvPr id="4" name="Slide Number Placeholder 3"/>
+          <p:cNvSpPr>
+            <a:spLocks noGrp="1"/>
+          </p:cNvSpPr>
+          <p:nvPr>
+            <p:ph type="sldNum" idx="5" sz="quarter"/>
+          </p:nvPr>
+        </p:nvSpPr>
+        <p:spPr/>
+      </p:sp>
+    </p:spTree>
+  </p:cSld>
+  <p:clrMapOvr>
+    <a:masterClrMapping/>
+  </p:clrMapOvr>
+</p:notes>
+</file>
+
+<file path=ppt/notesSlides/notesSlide12.xml><?xml version="1.0" encoding="utf-8"?>
+<p:notes xmlns:a="http://schemas.openxmlformats.org/drawingml/2006/main" xmlns:p="http://schemas.openxmlformats.org/presentationml/2006/main" xmlns:r="http://schemas.openxmlformats.org/officeDocument/2006/relationships">
+  <p:cSld>
+    <p:spTree>
+      <p:nvGrpSpPr>
+        <p:cNvPr id="1" name=""/>
+        <p:cNvGrpSpPr/>
+        <p:nvPr/>
+      </p:nvGrpSpPr>
+      <p:grpSpPr>
+        <a:xfrm>
+          <a:off x="0" y="0"/>
+          <a:ext cx="0" cy="0"/>
+          <a:chOff x="0" y="0"/>
+          <a:chExt cx="0" cy="0"/>
+        </a:xfrm>
+      </p:grpSpPr>
+      <p:sp>
+        <p:nvSpPr>
+          <p:cNvPr id="2" name="Slide Image Placeholder 1"/>
+          <p:cNvSpPr>
+            <a:spLocks noGrp="1"/>
+          </p:cNvSpPr>
+          <p:nvPr>
+            <p:ph type="sldImg" idx="2"/>
+          </p:nvPr>
+        </p:nvSpPr>
+        <p:spPr/>
+      </p:sp>
+      <p:sp>
+        <p:nvSpPr>
+          <p:cNvPr id="3" name="Notes Placeholder 2"/>
+          <p:cNvSpPr>
+            <a:spLocks noGrp="1"/>
+          </p:cNvSpPr>
+          <p:nvPr>
+            <p:ph type="body" idx="3" sz="quarter"/>
+          </p:nvPr>
+        </p:nvSpPr>
+        <p:spPr/>
+        <p:txBody>
+          <a:bodyPr/>
+          <a:lstStyle/>
+          <a:p>
+            <a:r>
+              <a:t>5 MINUTES. Collect anonymously. Share the take-home link on the slide. It has the four stops, the signs, the exit plan, and who to talk to, including SAMHSA's free helpline at 1-800-662-4357. Remind students counselors handle questions about their own drinking, a friend's or someone's at home.</a:t>
+            </a:r>
+          </a:p>
+        </p:txBody>
+      </p:sp>
+      <p:sp>
+        <p:nvSpPr>
+          <p:cNvPr id="4" name="Slide Number Placeholder 3"/>
+          <p:cNvSpPr>
+            <a:spLocks noGrp="1"/>
+          </p:cNvSpPr>
+          <p:nvPr>
+            <p:ph type="sldNum" idx="5" sz="quarter"/>
+          </p:nvPr>
+        </p:nvSpPr>
+        <p:spPr/>
+      </p:sp>
+    </p:spTree>
+  </p:cSld>
+  <p:clrMapOvr>
+    <a:masterClrMapping/>
+  </p:clrMapOvr>
+</p:notes>
+</file>
+
+<file path=ppt/notesSlides/notesSlide13.xml><?xml version="1.0" encoding="utf-8"?>
+<p:notes xmlns:a="http://schemas.openxmlformats.org/drawingml/2006/main" xmlns:p="http://schemas.openxmlformats.org/presentationml/2006/main" xmlns:r="http://schemas.openxmlformats.org/officeDocument/2006/relationships">
+  <p:cSld>
+    <p:spTree>
+      <p:nvGrpSpPr>
+        <p:cNvPr id="1" name=""/>
+        <p:cNvGrpSpPr/>
+        <p:nvPr/>
+      </p:nvGrpSpPr>
+      <p:grpSpPr>
+        <a:xfrm>
+          <a:off x="0" y="0"/>
+          <a:ext cx="0" cy="0"/>
+          <a:chOff x="0" y="0"/>
+          <a:chExt cx="0" cy="0"/>
+        </a:xfrm>
+      </p:grpSpPr>
+      <p:sp>
+        <p:nvSpPr>
+          <p:cNvPr id="2" name="Slide Image Placeholder 1"/>
+          <p:cNvSpPr>
+            <a:spLocks noGrp="1"/>
+          </p:cNvSpPr>
+          <p:nvPr>
+            <p:ph type="sldImg" idx="2"/>
+          </p:nvPr>
+        </p:nvSpPr>
+        <p:spPr/>
+      </p:sp>
+      <p:sp>
+        <p:nvSpPr>
+          <p:cNvPr id="3" name="Notes Placeholder 2"/>
+          <p:cNvSpPr>
+            <a:spLocks noGrp="1"/>
+          </p:cNvSpPr>
+          <p:nvPr>
+            <p:ph type="body" idx="3" sz="quarter"/>
+          </p:nvPr>
+        </p:nvSpPr>
+        <p:spPr/>
+        <p:txBody>
+          <a:bodyPr/>
+          <a:lstStyle/>
+          <a:p>
+            <a:r>
               <a:t>If you want more: this page and the next three are hidden and skipped when you present.</a:t>
             </a:r>
           </a:p>
@@ -725,7 +867,7 @@
           <a:lstStyle/>
           <a:p>
             <a:r>
-              <a:t>Open plainly. Something like: "Everybody has an opinion about drinking. Today is about the mechanism, because knowing it can keep someone alive." Say up front that nobody will be asked about their own drinking.</a:t>
+              <a:t>Open plainly. Something like: "Everybody has an opinion about drinking. Today is about how the game actually plays out, and the mechanism, because knowing it can keep someone alive." Say up front that nobody will be asked about their own drinking.</a:t>
             </a:r>
           </a:p>
         </p:txBody>
@@ -865,7 +1007,7 @@
           <a:lstStyle/>
           <a:p>
             <a:r>
-              <a:t>8 MINUTES. Draw the four stops left to right. Talking points. 1, Judgment: alcohol boosts GABA, the brain's brake signal. The prefrontal cortex, which weighs consequences, feels it first, so the dare or the drive home sounds fine before anyone feels drunk. 2, Memory: the hippocampus stops saving new memories while the person is still awake, talking and choosing. That's a blackout, which is different from passing out. 3, Balance: the cerebellum slows, so slurring and stumbling show up. 4, Breathing: the brainstem runs breathing, heart rate and the gag reflex. When it slows, that's alcohol poisoning. Ask: "Which stop do people feel last?" (Judgment, because the part that would notice is the part already affected.)</a:t>
+              <a:t>3 MINUTES. Be honest, because they'll know if you aren't: sometimes it is fun, and that's why people go. A lot of the time it's overrated. Ask: "What's in the trailer that isn't in the movie?" Let them laugh, then: "Today is about the parts the trailer leaves out."</a:t>
             </a:r>
           </a:p>
         </p:txBody>
@@ -935,7 +1077,7 @@
           <a:lstStyle/>
           <a:p>
             <a:r>
-              <a:t>4 MINUTES. Sketch a curve that keeps climbing after the drinking stops. Say: "Someone who seems fine at 10:30 can be in danger at 11:15." Coffee, a cold shower and throwing up don't speed up the liver. A mixed drink in a party cup is often two or more standard drinks. Add the teen piece: teens feel fewer of the sleepy, wobbly warning signs adults get (Spear, 2018), so the body's own stop signal is quieter.</a:t>
+              <a:t>8 MINUTES. Walk the turtle across the four signs. Talking points. 1, Judgment: alcohol boosts GABA, the brain's brake signal. The prefrontal cortex, which weighs consequences, feels it first, so the dare or the drive home sounds fine before anyone feels drunk. It's also why someone who's drunk can't give consent: the part of the brain that weighs a yes is the first one offline. 2, Memory: the hippocampus stops saving new memories while the person is still awake, talking and choosing. That's a blackout, which is different from passing out. 3, Balance: the cerebellum slows, so slurring and stumbling show up. 4, Breathing: the brainstem runs breathing, heart rate and the gag reflex. When it slows, that's alcohol poisoning. Ask: "Which stop do people feel last?" (Judgment, because the part that would notice is the part already affected.)</a:t>
             </a:r>
           </a:p>
         </p:txBody>
@@ -1005,7 +1147,7 @@
           <a:lstStyle/>
           <a:p>
             <a:r>
-              <a:t>10 MINUTES. Read each stop, then give three options and have everyone vote with fingers before anyone talks. Stop 1: (1) take one, an adult said it's fine; (2) "I'm good" and grab a soda; (3) take one and nurse it. Talk: an adult pouring doesn't change what alcohol does. In Massachusetts an adult who gives alcohol to someone else's kid under 21 can be fined up to $2,000 or jailed up to a year. Stop 2: (1) believe him; (2) get him water and stay close for the next hour; (3) tell him to slow down and walk away. Answer 2: those shots haven't fully hit yet. Stop 3: (1) let him sleep it off; (2) go with him, keep him on his side, stay; (3) check on him in an hour. Answer 2: never leave someone alone to sleep it off. Stop 4: (1) wait and see; (2) call 911; (3) drive him home. Make this completely clear: call 911, every time. Ask: "At which stop was the right move hardest? What made it hard?" Keep it about Dani and Theo.</a:t>
+              <a:t>4 MINUTES. Point to the elevator: it keeps rising after the last drink. Say: "Someone who seems fine at 10:30 can be in danger at 11:15." Coffee, a cold shower and throwing up don't speed up the liver. A mixed drink in a party cup is often two or more standard drinks. Add the teen piece: teens feel fewer of the sleepy, wobbly warning signs adults get (Spear, 2018), so the body's own stop signal is quieter.</a:t>
             </a:r>
           </a:p>
         </p:txBody>
@@ -1075,7 +1217,7 @@
           <a:lstStyle/>
           <a:p>
             <a:r>
-              <a:t>5 MINUTES. Have students stand and practice the recovery position on a partner's description, or demonstrate it yourself on the floor if that fits your room. "Let them sleep it off" is how people choke. Be honest about the law: Massachusetts' Good Samaritan law covers drug overdose calls and doesn't specifically cover underage drinking. Tell students to call anyway. Some students worry about police because of immigration status or how their community is treated. Acknowledge it, then repeat that a medical emergency is a 911 call.</a:t>
+              <a:t>2 MINUTES. Read the list quickly; this is a map of how it happens, not a debate about any one path. Most students drinking for the first time get alcohol from home or from friends, not from a store. Be clear on the last one, because some students have heard it framed as the safe option: in Massachusetts, an adult who supplies alcohol to, or knowingly lets someone else's child under 21 drink on property they own or control can be fined up to $2,000, jailed up to a year, or both (c.138 §34), and hosts can also be sued if a guest is hurt afterward. Parents supplying alcohol also hasn't been shown to make teens safer; one six-year study found those teens were more likely to get it from other sources too (Mattick, 2018). A parent serving their own child at a family dinner is a different situation, and that comes up later. Ask: "Does where it came from change what it does in your body?" (No.)</a:t>
             </a:r>
           </a:p>
         </p:txBody>
@@ -1145,7 +1287,7 @@
           <a:lstStyle/>
           <a:p>
             <a:r>
-              <a:t>3 MINUTES IN PAIRS, THEN SHARE. Jae: call your exit-plan person and offer Jae a ride too. In Massachusetts a driver under 21 at 0.02 or above loses their license on the spot, and every 0.02 rise more than doubled young drivers' crash death risk. Amara: bring it up later, privately, when she's sober; three blackouts is a pattern worth a counselor's help. Family dinner: this is the family's call and the student's. Some families do this; one six-year study found parents supplying alcohol wasn't protective, and students can pass without making a scene. Respect every family's answer.</a:t>
+              <a:t>8 MINUTES. Read each stop, then give three options and have everyone vote with fingers before anyone talks. Stop 1: (1) take one, nobody will know; (2) "I'm good" and grab a soda; (3) take one and nurse it. Stop 2: (1) believe him; (2) get him water, get him out of the game, and stay close for the next hour; (3) tell him to slow down and walk away. Answer 2: drinking games are built for fast drinking, and those rounds haven't fully hit yet. Stop 3: (1) let him sleep it off; (2) go with him, keep him on his side, stay; (3) check on him in an hour. Answer 2: never leave someone alone to sleep it off. Stop 4: (1) wait and see; (2) call 911, and get an adult if one is home; (3) drive him home. Make this completely clear: call 911, every time. Getting in trouble is temporary. Ask: "At which stop was the right move hardest? What made it hard?" Keep it about Theo.</a:t>
             </a:r>
           </a:p>
         </p:txBody>
@@ -1215,7 +1357,7 @@
           <a:lstStyle/>
           <a:p>
             <a:r>
-              <a:t>5 MINUTES. Private reflection: ask students to write the name of their exit-plan person on the back of their exit card (they keep that part). Families handle this differently: some will pick up with no questions that night, and some won't. A parent, older sibling, cousin, aunt or family friend all work. Never mixing with weed or pills matters because both slow breathing too.</a:t>
+              <a:t>5 MINUTES. Have students stand and practice the recovery position on a partner's description, or demonstrate it yourself on the floor if that fits your room. "Let them sleep it off" is how people choke. Be honest about the law: Massachusetts' Good Samaritan law covers drug overdose calls and doesn't specifically cover underage drinking. Tell students to call anyway. Some students worry about police because of immigration status or how their community is treated. Acknowledge it, then repeat that a medical emergency is a 911 call.</a:t>
             </a:r>
           </a:p>
         </p:txBody>
@@ -4346,7 +4488,7 @@
                 </a:solidFill>
                 <a:latin typeface="Source Serif 4"/>
               </a:rPr>
-              <a:t>Alcohol and Your Brain</a:t>
+              <a:t>The Drinking Game</a:t>
             </a:r>
           </a:p>
         </p:txBody>
@@ -4440,7 +4582,7 @@
                 </a:solidFill>
                 <a:latin typeface="Source Serif 4"/>
               </a:rPr>
-              <a:t>Students learn the order alcohol affects the brain, why the last drink isn't the peak, and the signs that mean call 911. Bring paper for the exit card, keep it about Dani and Theo rather than anyone in the room, and if a student shares worry about their own or a family member's drinking, walk them to a counselor that day.</a:t>
+              <a:t>Students learn the order alcohol affects the brain, why the last drink isn't the peak, and the signs that mean call 911. Bring paper for the exit card, keep it about Theo rather than anyone in the room, and if a student shares worry about their own or a family member's drinking, walk them to a counselor that day.</a:t>
             </a:r>
           </a:p>
           <a:p>
@@ -4536,7 +4678,7 @@
                 </a:solidFill>
                 <a:latin typeface="Source Serif 4"/>
               </a:rPr>
-              <a:t>The guess (3), four stops (6), graduation party stops 3 and 4 only (7), signs and the call (4). Share the take-home link so students get the rest.</a:t>
+              <a:t>The guess (3), four stops (6), Theo's Friday, stops 3 and 4 only (7), signs and the call (4). Share the take-home link so students get the rest.</a:t>
             </a:r>
           </a:p>
         </p:txBody>
@@ -4645,7 +4787,7 @@
                 </a:solidFill>
                 <a:latin typeface="Inter Tight"/>
               </a:rPr>
-              <a:t>BEFORE YOU GO</a:t>
+              <a:t>THREE MOMENTS</a:t>
             </a:r>
           </a:p>
         </p:txBody>
@@ -4697,7 +4839,7 @@
         </p:nvSpPr>
         <p:spPr>
           <a:xfrm>
-            <a:off x="822960" y="1188720"/>
+            <a:off x="822960" y="1005840"/>
             <a:ext cx="10515600" cy="914400"/>
           </a:xfrm>
           <a:prstGeom prst="rect">
@@ -4713,70 +4855,31 @@
           <a:p>
             <a:pPr algn="l">
               <a:spcAft>
-                <a:spcPts val="1620"/>
-              </a:spcAft>
-            </a:pPr>
-            <a:r>
-              <a:rPr sz="3600" b="1" i="0">
+                <a:spcPts val="1530"/>
+              </a:spcAft>
+            </a:pPr>
+            <a:r>
+              <a:rPr sz="3400" b="1" i="0">
                 <a:solidFill>
                   <a:srgbClr val="1C1B19"/>
                 </a:solidFill>
                 <a:latin typeface="Source Serif 4"/>
               </a:rPr>
-              <a:t>Exit card</a:t>
-            </a:r>
-          </a:p>
-        </p:txBody>
-      </p:sp>
-      <p:sp>
-        <p:nvSpPr>
-          <p:cNvPr id="6" name="TextBox 5"/>
-          <p:cNvSpPr txBox="1"/>
-          <p:nvPr/>
-        </p:nvSpPr>
-        <p:spPr>
-          <a:xfrm>
-            <a:off x="822960" y="2286000"/>
-            <a:ext cx="10515600" cy="1463040"/>
-          </a:xfrm>
-          <a:prstGeom prst="rect">
-            <a:avLst/>
-          </a:prstGeom>
-          <a:noFill/>
-        </p:spPr>
-        <p:txBody>
-          <a:bodyPr wrap="square" anchor="t" lIns="0" rIns="0" tIns="0" bIns="0">
-            <a:spAutoFit/>
-          </a:bodyPr>
-          <a:lstStyle/>
-          <a:p>
-            <a:pPr algn="l">
-              <a:spcAft>
-                <a:spcPts val="1080"/>
-              </a:spcAft>
-            </a:pPr>
-            <a:r>
-              <a:rPr sz="2400" b="0" i="0">
-                <a:solidFill>
-                  <a:srgbClr val="1C1B19"/>
-                </a:solidFill>
-                <a:latin typeface="Source Serif 4"/>
-              </a:rPr>
-              <a:t>Theo's friend says "let him sleep it off." What do you say back?</a:t>
-            </a:r>
-          </a:p>
-        </p:txBody>
-      </p:sp>
-      <p:sp>
-        <p:nvSpPr>
-          <p:cNvPr id="7" name="Rectangle 6"/>
+              <a:t>What would you do?</a:t>
+            </a:r>
+          </a:p>
+        </p:txBody>
+      </p:sp>
+      <p:sp>
+        <p:nvSpPr>
+          <p:cNvPr id="6" name="Rectangle 5"/>
           <p:cNvSpPr/>
           <p:nvPr/>
         </p:nvSpPr>
         <p:spPr>
           <a:xfrm>
-            <a:off x="822960" y="4023360"/>
-            <a:ext cx="10515600" cy="1371600"/>
+            <a:off x="822960" y="2103120"/>
+            <a:ext cx="3322320" cy="3840480"/>
           </a:xfrm>
           <a:prstGeom prst="rect">
             <a:avLst/>
@@ -4786,7 +4889,7 @@
           </a:solidFill>
           <a:ln w="15875">
             <a:solidFill>
-              <a:srgbClr val="1C1B19"/>
+              <a:srgbClr val="D8D2C6"/>
             </a:solidFill>
           </a:ln>
           <a:effectLst/>
@@ -4815,14 +4918,14 @@
       </p:sp>
       <p:sp>
         <p:nvSpPr>
-          <p:cNvPr id="8" name="TextBox 7"/>
+          <p:cNvPr id="7" name="TextBox 6"/>
           <p:cNvSpPr txBox="1"/>
           <p:nvPr/>
         </p:nvSpPr>
         <p:spPr>
           <a:xfrm>
-            <a:off x="1097280" y="4206240"/>
-            <a:ext cx="10058400" cy="365760"/>
+            <a:off x="1051560" y="2286000"/>
+            <a:ext cx="2865120" cy="365760"/>
           </a:xfrm>
           <a:prstGeom prst="rect">
             <a:avLst/>
@@ -4837,31 +4940,31 @@
           <a:p>
             <a:pPr algn="l">
               <a:spcAft>
-                <a:spcPts val="540"/>
-              </a:spcAft>
-            </a:pPr>
-            <a:r>
-              <a:rPr sz="1200" b="1" i="0">
+                <a:spcPts val="585"/>
+              </a:spcAft>
+            </a:pPr>
+            <a:r>
+              <a:rPr sz="1300" b="1" i="0">
                 <a:solidFill>
                   <a:srgbClr val="0B2D5B"/>
                 </a:solidFill>
                 <a:latin typeface="Inter Tight"/>
               </a:rPr>
-              <a:t>STUDENT PAGE</a:t>
-            </a:r>
-          </a:p>
-        </p:txBody>
-      </p:sp>
-      <p:sp>
-        <p:nvSpPr>
-          <p:cNvPr id="9" name="TextBox 8"/>
+              <a:t>JAE</a:t>
+            </a:r>
+          </a:p>
+        </p:txBody>
+      </p:sp>
+      <p:sp>
+        <p:nvSpPr>
+          <p:cNvPr id="8" name="TextBox 7"/>
           <p:cNvSpPr txBox="1"/>
           <p:nvPr/>
         </p:nvSpPr>
         <p:spPr>
           <a:xfrm>
-            <a:off x="1097280" y="4617720"/>
-            <a:ext cx="10058400" cy="640080"/>
+            <a:off x="1051560" y="2743200"/>
+            <a:ext cx="2865120" cy="3017520"/>
           </a:xfrm>
           <a:prstGeom prst="rect">
             <a:avLst/>
@@ -4876,66 +4979,42 @@
           <a:p>
             <a:pPr algn="l">
               <a:spcAft>
-                <a:spcPts val="900"/>
-              </a:spcAft>
-            </a:pPr>
-            <a:r>
-              <a:rPr sz="2000" b="0" i="0">
+                <a:spcPts val="810"/>
+              </a:spcAft>
+            </a:pPr>
+            <a:r>
+              <a:rPr sz="1800" b="0" i="0">
                 <a:solidFill>
                   <a:srgbClr val="1C1B19"/>
                 </a:solidFill>
-                <a:latin typeface="Inter Tight"/>
-              </a:rPr>
-              <a:t>https://rmwtoolkit.github.io/bcds-toolkit/alcohol-and-your-brain-high-school.html</a:t>
-            </a:r>
-          </a:p>
-        </p:txBody>
-      </p:sp>
-    </p:spTree>
-  </p:cSld>
-  <p:clrMapOvr>
-    <a:masterClrMapping/>
-  </p:clrMapOvr>
-</p:sld>
-</file>
-
-<file path=ppt/slides/slide11.xml><?xml version="1.0" encoding="utf-8"?>
-<p:sld xmlns:a="http://schemas.openxmlformats.org/drawingml/2006/main" xmlns:p="http://schemas.openxmlformats.org/presentationml/2006/main" xmlns:r="http://schemas.openxmlformats.org/officeDocument/2006/relationships" show="0">
-  <p:cSld>
-    <p:bg>
-      <p:bgPr>
-        <a:solidFill>
-          <a:srgbClr val="EEEBE4"/>
-        </a:solidFill>
-        <a:effectLst/>
-      </p:bgPr>
-    </p:bg>
-    <p:spTree>
-      <p:nvGrpSpPr>
-        <p:cNvPr id="1" name=""/>
-        <p:cNvGrpSpPr/>
-        <p:nvPr/>
-      </p:nvGrpSpPr>
-      <p:grpSpPr/>
-      <p:sp>
-        <p:nvSpPr>
-          <p:cNvPr id="2" name="Rectangle 1"/>
+                <a:latin typeface="Source Serif 4"/>
+              </a:rPr>
+              <a:t>Your ride home had two beers three hours ago. He's 18, says he feels fine, and everyone else has left.</a:t>
+            </a:r>
+          </a:p>
+        </p:txBody>
+      </p:sp>
+      <p:sp>
+        <p:nvSpPr>
+          <p:cNvPr id="9" name="Rectangle 8"/>
           <p:cNvSpPr/>
           <p:nvPr/>
         </p:nvSpPr>
         <p:spPr>
           <a:xfrm>
-            <a:off x="0" y="0"/>
-            <a:ext cx="12191695" cy="384048"/>
+            <a:off x="4419600" y="2103120"/>
+            <a:ext cx="3322320" cy="3840480"/>
           </a:xfrm>
           <a:prstGeom prst="rect">
             <a:avLst/>
           </a:prstGeom>
           <a:solidFill>
-            <a:srgbClr val="0B2D5B"/>
+            <a:srgbClr val="FFFFFF"/>
           </a:solidFill>
-          <a:ln>
-            <a:noFill/>
+          <a:ln w="15875">
+            <a:solidFill>
+              <a:srgbClr val="D8D2C6"/>
+            </a:solidFill>
           </a:ln>
           <a:effectLst/>
         </p:spPr>
@@ -4963,14 +5042,14 @@
       </p:sp>
       <p:sp>
         <p:nvSpPr>
-          <p:cNvPr id="3" name="TextBox 2"/>
+          <p:cNvPr id="10" name="TextBox 9"/>
           <p:cNvSpPr txBox="1"/>
           <p:nvPr/>
         </p:nvSpPr>
         <p:spPr>
           <a:xfrm>
-            <a:off x="548640" y="100584"/>
-            <a:ext cx="10972800" cy="274320"/>
+            <a:off x="4648200" y="2286000"/>
+            <a:ext cx="2865120" cy="365760"/>
           </a:xfrm>
           <a:prstGeom prst="rect">
             <a:avLst/>
@@ -4985,31 +5064,31 @@
           <a:p>
             <a:pPr algn="l">
               <a:spcAft>
-                <a:spcPts val="495"/>
-              </a:spcAft>
-            </a:pPr>
-            <a:r>
-              <a:rPr sz="1100" b="1" i="0">
-                <a:solidFill>
-                  <a:srgbClr val="FFFFFF"/>
+                <a:spcPts val="585"/>
+              </a:spcAft>
+            </a:pPr>
+            <a:r>
+              <a:rPr sz="1300" b="1" i="0">
+                <a:solidFill>
+                  <a:srgbClr val="0B2D5B"/>
                 </a:solidFill>
                 <a:latin typeface="Inter Tight"/>
               </a:rPr>
-              <a:t>TEACHER PAGE  ·  skipped when you present  ·  Lesson plan</a:t>
-            </a:r>
-          </a:p>
-        </p:txBody>
-      </p:sp>
-      <p:sp>
-        <p:nvSpPr>
-          <p:cNvPr id="4" name="TextBox 3"/>
+              <a:t>AMARA</a:t>
+            </a:r>
+          </a:p>
+        </p:txBody>
+      </p:sp>
+      <p:sp>
+        <p:nvSpPr>
+          <p:cNvPr id="11" name="TextBox 10"/>
           <p:cNvSpPr txBox="1"/>
           <p:nvPr/>
         </p:nvSpPr>
         <p:spPr>
           <a:xfrm>
-            <a:off x="548640" y="685800"/>
-            <a:ext cx="10972800" cy="731520"/>
+            <a:off x="4648200" y="2743200"/>
+            <a:ext cx="2865120" cy="3017520"/>
           </a:xfrm>
           <a:prstGeom prst="rect">
             <a:avLst/>
@@ -5024,502 +5103,42 @@
           <a:p>
             <a:pPr algn="l">
               <a:spcAft>
-                <a:spcPts val="1530"/>
-              </a:spcAft>
-            </a:pPr>
-            <a:r>
-              <a:rPr sz="3400" b="1" i="0">
+                <a:spcPts val="810"/>
+              </a:spcAft>
+            </a:pPr>
+            <a:r>
+              <a:rPr sz="1800" b="0" i="0">
                 <a:solidFill>
                   <a:srgbClr val="1C1B19"/>
                 </a:solidFill>
                 <a:latin typeface="Source Serif 4"/>
               </a:rPr>
-              <a:t>Alcohol and Your Brain</a:t>
-            </a:r>
-          </a:p>
-        </p:txBody>
-      </p:sp>
-      <p:sp>
-        <p:nvSpPr>
-          <p:cNvPr id="5" name="TextBox 4"/>
-          <p:cNvSpPr txBox="1"/>
-          <p:nvPr/>
-        </p:nvSpPr>
-        <p:spPr>
-          <a:xfrm>
-            <a:off x="548640" y="1325880"/>
-            <a:ext cx="10972800" cy="365760"/>
-          </a:xfrm>
-          <a:prstGeom prst="rect">
-            <a:avLst/>
-          </a:prstGeom>
-          <a:noFill/>
-        </p:spPr>
-        <p:txBody>
-          <a:bodyPr wrap="square" anchor="t" lIns="0" rIns="0" tIns="0" bIns="0">
-            <a:spAutoFit/>
-          </a:bodyPr>
-          <a:lstStyle/>
-          <a:p>
-            <a:pPr algn="l">
-              <a:spcAft>
-                <a:spcPts val="630"/>
-              </a:spcAft>
-            </a:pPr>
-            <a:r>
-              <a:rPr sz="1400" b="0" i="0">
-                <a:solidFill>
-                  <a:srgbClr val="5D5A54"/>
-                </a:solidFill>
-                <a:latin typeface="Inter Tight"/>
-              </a:rPr>
-              <a:t>Upper School  ·  45 minutes (20-minute advisory version below)  ·  Health class, advisory, or a counselor-led group</a:t>
-            </a:r>
-          </a:p>
-        </p:txBody>
-      </p:sp>
-      <p:sp>
-        <p:nvSpPr>
-          <p:cNvPr id="6" name="TextBox 5"/>
-          <p:cNvSpPr txBox="1"/>
-          <p:nvPr/>
-        </p:nvSpPr>
-        <p:spPr>
-          <a:xfrm>
-            <a:off x="548640" y="1828800"/>
-            <a:ext cx="5120640" cy="4389120"/>
-          </a:xfrm>
-          <a:prstGeom prst="rect">
-            <a:avLst/>
-          </a:prstGeom>
-          <a:noFill/>
-        </p:spPr>
-        <p:txBody>
-          <a:bodyPr wrap="square" anchor="t" lIns="0" rIns="0" tIns="0" bIns="0">
-            <a:spAutoFit/>
-          </a:bodyPr>
-          <a:lstStyle/>
-          <a:p>
-            <a:pPr algn="l">
-              <a:spcAft>
-                <a:spcPts val="675"/>
-              </a:spcAft>
-            </a:pPr>
-            <a:r>
-              <a:rPr sz="1100" b="1" i="0">
-                <a:solidFill>
-                  <a:srgbClr val="0B2D5B"/>
-                </a:solidFill>
-                <a:latin typeface="Inter Tight"/>
-              </a:rPr>
-              <a:t>GOAL</a:t>
-            </a:r>
-          </a:p>
-          <a:p>
-            <a:pPr algn="l">
-              <a:spcAft>
-                <a:spcPts val="675"/>
-              </a:spcAft>
-            </a:pPr>
-            <a:r>
-              <a:rPr sz="1500" b="0" i="0">
-                <a:solidFill>
-                  <a:srgbClr val="1C1B19"/>
-                </a:solidFill>
-                <a:latin typeface="Source Serif 4"/>
-              </a:rPr>
-              <a:t>Students can explain the order alcohol affects the brain (judgment, memory, balance, breathing), why the last drink isn't the peak, and exactly what to do when someone shows signs of alcohol poisoning. Not drinking gets named as the normal choice it is. Nobody in the room should feel judged for their family's habits.</a:t>
-            </a:r>
-          </a:p>
-          <a:p>
-            <a:pPr algn="l">
-              <a:spcAft>
-                <a:spcPts val="675"/>
-              </a:spcAft>
-            </a:pPr>
-            <a:r>
-              <a:rPr sz="1500" b="0" i="0">
-                <a:solidFill>
-                  <a:srgbClr val="1C1B19"/>
-                </a:solidFill>
-                <a:latin typeface="Source Serif 4"/>
-              </a:rPr>
-              <a:t/>
-            </a:r>
-          </a:p>
-          <a:p>
-            <a:pPr algn="l">
-              <a:spcAft>
-                <a:spcPts val="675"/>
-              </a:spcAft>
-            </a:pPr>
-            <a:r>
-              <a:rPr sz="1100" b="1" i="0">
-                <a:solidFill>
-                  <a:srgbClr val="0B2D5B"/>
-                </a:solidFill>
-                <a:latin typeface="Inter Tight"/>
-              </a:rPr>
-              <a:t>MATERIALS</a:t>
-            </a:r>
-          </a:p>
-          <a:p>
-            <a:pPr algn="l">
-              <a:spcAft>
-                <a:spcPts val="675"/>
-              </a:spcAft>
-            </a:pPr>
-            <a:r>
-              <a:rPr sz="1500" b="0" i="0">
-                <a:solidFill>
-                  <a:srgbClr val="1C1B19"/>
-                </a:solidFill>
-                <a:latin typeface="Source Serif 4"/>
-              </a:rPr>
-              <a:t>Paper and pens for the exit card</a:t>
-            </a:r>
-          </a:p>
-          <a:p>
-            <a:pPr algn="l">
-              <a:spcAft>
-                <a:spcPts val="675"/>
-              </a:spcAft>
-            </a:pPr>
-            <a:r>
-              <a:rPr sz="1500" b="0" i="0">
-                <a:solidFill>
-                  <a:srgbClr val="1C1B19"/>
-                </a:solidFill>
-                <a:latin typeface="Source Serif 4"/>
-              </a:rPr>
-              <a:t>Board space to draw the four-stop brain</a:t>
-            </a:r>
-          </a:p>
-          <a:p>
-            <a:pPr algn="l">
-              <a:spcAft>
-                <a:spcPts val="675"/>
-              </a:spcAft>
-            </a:pPr>
-            <a:r>
-              <a:rPr sz="1500" b="0" i="0">
-                <a:solidFill>
-                  <a:srgbClr val="1C1B19"/>
-                </a:solidFill>
-                <a:latin typeface="Source Serif 4"/>
-              </a:rPr>
-              <a:t>The take-home link (last slide) to share after class</a:t>
-            </a:r>
-          </a:p>
-        </p:txBody>
-      </p:sp>
-      <p:sp>
-        <p:nvSpPr>
-          <p:cNvPr id="7" name="TextBox 6"/>
-          <p:cNvSpPr txBox="1"/>
-          <p:nvPr/>
-        </p:nvSpPr>
-        <p:spPr>
-          <a:xfrm>
-            <a:off x="6126480" y="1828800"/>
-            <a:ext cx="5486400" cy="4389120"/>
-          </a:xfrm>
-          <a:prstGeom prst="rect">
-            <a:avLst/>
-          </a:prstGeom>
-          <a:noFill/>
-        </p:spPr>
-        <p:txBody>
-          <a:bodyPr wrap="square" anchor="t" lIns="0" rIns="0" tIns="0" bIns="0">
-            <a:spAutoFit/>
-          </a:bodyPr>
-          <a:lstStyle/>
-          <a:p>
-            <a:pPr algn="l">
-              <a:spcAft>
-                <a:spcPts val="630"/>
-              </a:spcAft>
-            </a:pPr>
-            <a:r>
-              <a:rPr sz="1100" b="1" i="0">
-                <a:solidFill>
-                  <a:srgbClr val="0B2D5B"/>
-                </a:solidFill>
-                <a:latin typeface="Inter Tight"/>
-              </a:rPr>
-              <a:t>FLOW</a:t>
-            </a:r>
-          </a:p>
-          <a:p>
-            <a:pPr algn="l">
-              <a:spcAft>
-                <a:spcPts val="630"/>
-              </a:spcAft>
-            </a:pPr>
-            <a:r>
-              <a:rPr sz="1300" b="1" i="0">
-                <a:solidFill>
-                  <a:srgbClr val="F47B20"/>
-                </a:solidFill>
-                <a:latin typeface="Inter Tight"/>
-              </a:rPr>
-              <a:t>5 min   </a:t>
-            </a:r>
-            <a:r>
-              <a:rPr sz="1400" b="0" i="0">
-                <a:solidFill>
-                  <a:srgbClr val="1C1B19"/>
-                </a:solidFill>
-                <a:latin typeface="Source Serif 4"/>
-              </a:rPr>
-              <a:t>Quick guess: how many of your grade drink?</a:t>
-            </a:r>
-          </a:p>
-          <a:p>
-            <a:pPr algn="l">
-              <a:spcAft>
-                <a:spcPts val="630"/>
-              </a:spcAft>
-            </a:pPr>
-            <a:r>
-              <a:rPr sz="1300" b="1" i="0">
-                <a:solidFill>
-                  <a:srgbClr val="F47B20"/>
-                </a:solidFill>
-                <a:latin typeface="Inter Tight"/>
-              </a:rPr>
-              <a:t>8 min   </a:t>
-            </a:r>
-            <a:r>
-              <a:rPr sz="1400" b="0" i="0">
-                <a:solidFill>
-                  <a:srgbClr val="1C1B19"/>
-                </a:solidFill>
-                <a:latin typeface="Source Serif 4"/>
-              </a:rPr>
-              <a:t>Four stops: what alcohol does, in order</a:t>
-            </a:r>
-          </a:p>
-          <a:p>
-            <a:pPr algn="l">
-              <a:spcAft>
-                <a:spcPts val="630"/>
-              </a:spcAft>
-            </a:pPr>
-            <a:r>
-              <a:rPr sz="1300" b="1" i="0">
-                <a:solidFill>
-                  <a:srgbClr val="F47B20"/>
-                </a:solidFill>
-                <a:latin typeface="Inter Tight"/>
-              </a:rPr>
-              <a:t>4 min   </a:t>
-            </a:r>
-            <a:r>
-              <a:rPr sz="1400" b="0" i="0">
-                <a:solidFill>
-                  <a:srgbClr val="1C1B19"/>
-                </a:solidFill>
-                <a:latin typeface="Source Serif 4"/>
-              </a:rPr>
-              <a:t>The curve: why the last drink isn't the peak</a:t>
-            </a:r>
-          </a:p>
-          <a:p>
-            <a:pPr algn="l">
-              <a:spcAft>
-                <a:spcPts val="630"/>
-              </a:spcAft>
-            </a:pPr>
-            <a:r>
-              <a:rPr sz="1300" b="1" i="0">
-                <a:solidFill>
-                  <a:srgbClr val="F47B20"/>
-                </a:solidFill>
-                <a:latin typeface="Inter Tight"/>
-              </a:rPr>
-              <a:t>10 min   </a:t>
-            </a:r>
-            <a:r>
-              <a:rPr sz="1400" b="0" i="0">
-                <a:solidFill>
-                  <a:srgbClr val="1C1B19"/>
-                </a:solidFill>
-                <a:latin typeface="Source Serif 4"/>
-              </a:rPr>
-              <a:t>Graduation party (four votes)</a:t>
-            </a:r>
-          </a:p>
-          <a:p>
-            <a:pPr algn="l">
-              <a:spcAft>
-                <a:spcPts val="630"/>
-              </a:spcAft>
-            </a:pPr>
-            <a:r>
-              <a:rPr sz="1300" b="1" i="0">
-                <a:solidFill>
-                  <a:srgbClr val="F47B20"/>
-                </a:solidFill>
-                <a:latin typeface="Inter Tight"/>
-              </a:rPr>
-              <a:t>8 min   </a:t>
-            </a:r>
-            <a:r>
-              <a:rPr sz="1400" b="0" i="0">
-                <a:solidFill>
-                  <a:srgbClr val="1C1B19"/>
-                </a:solidFill>
-                <a:latin typeface="Source Serif 4"/>
-              </a:rPr>
-              <a:t>When to call, and three moments (pairs)</a:t>
-            </a:r>
-          </a:p>
-          <a:p>
-            <a:pPr algn="l">
-              <a:spcAft>
-                <a:spcPts val="630"/>
-              </a:spcAft>
-            </a:pPr>
-            <a:r>
-              <a:rPr sz="1300" b="1" i="0">
-                <a:solidFill>
-                  <a:srgbClr val="F47B20"/>
-                </a:solidFill>
-                <a:latin typeface="Inter Tight"/>
-              </a:rPr>
-              <a:t>5 min   </a:t>
-            </a:r>
-            <a:r>
-              <a:rPr sz="1400" b="0" i="0">
-                <a:solidFill>
-                  <a:srgbClr val="1C1B19"/>
-                </a:solidFill>
-                <a:latin typeface="Source Serif 4"/>
-              </a:rPr>
-              <a:t>Your plan (private)</a:t>
-            </a:r>
-          </a:p>
-          <a:p>
-            <a:pPr algn="l">
-              <a:spcAft>
-                <a:spcPts val="630"/>
-              </a:spcAft>
-            </a:pPr>
-            <a:r>
-              <a:rPr sz="1300" b="1" i="0">
-                <a:solidFill>
-                  <a:srgbClr val="F47B20"/>
-                </a:solidFill>
-                <a:latin typeface="Inter Tight"/>
-              </a:rPr>
-              <a:t>5 min   </a:t>
-            </a:r>
-            <a:r>
-              <a:rPr sz="1400" b="0" i="0">
-                <a:solidFill>
-                  <a:srgbClr val="1C1B19"/>
-                </a:solidFill>
-                <a:latin typeface="Source Serif 4"/>
-              </a:rPr>
-              <a:t>Exit card and take-home link</a:t>
-            </a:r>
-          </a:p>
-          <a:p>
-            <a:pPr algn="l">
-              <a:spcAft>
-                <a:spcPts val="630"/>
-              </a:spcAft>
-            </a:pPr>
-            <a:r>
-              <a:rPr sz="1400" b="0" i="0">
-                <a:solidFill>
-                  <a:srgbClr val="1C1B19"/>
-                </a:solidFill>
-                <a:latin typeface="Source Serif 4"/>
-              </a:rPr>
-              <a:t/>
-            </a:r>
-          </a:p>
-          <a:p>
-            <a:pPr algn="l">
-              <a:spcAft>
-                <a:spcPts val="630"/>
-              </a:spcAft>
-            </a:pPr>
-            <a:r>
-              <a:rPr sz="1100" b="1" i="0">
-                <a:solidFill>
-                  <a:srgbClr val="0B2D5B"/>
-                </a:solidFill>
-                <a:latin typeface="Inter Tight"/>
-              </a:rPr>
-              <a:t>SHORT ON TIME (20-MINUTE ADVISORY)</a:t>
-            </a:r>
-          </a:p>
-          <a:p>
-            <a:pPr algn="l">
-              <a:spcAft>
-                <a:spcPts val="630"/>
-              </a:spcAft>
-            </a:pPr>
-            <a:r>
-              <a:rPr sz="1400" b="0" i="0">
-                <a:solidFill>
-                  <a:srgbClr val="1C1B19"/>
-                </a:solidFill>
-                <a:latin typeface="Source Serif 4"/>
-              </a:rPr>
-              <a:t>The guess (3), four stops (6), graduation party stops 3 and 4 only (7), signs and the call (4). Share the take-home link so students get the rest.</a:t>
-            </a:r>
-          </a:p>
-        </p:txBody>
-      </p:sp>
-    </p:spTree>
-  </p:cSld>
-  <p:clrMapOvr>
-    <a:masterClrMapping/>
-  </p:clrMapOvr>
-</p:sld>
-</file>
-
-<file path=ppt/slides/slide12.xml><?xml version="1.0" encoding="utf-8"?>
-<p:sld xmlns:a="http://schemas.openxmlformats.org/drawingml/2006/main" xmlns:p="http://schemas.openxmlformats.org/presentationml/2006/main" xmlns:r="http://schemas.openxmlformats.org/officeDocument/2006/relationships" show="0">
-  <p:cSld>
-    <p:bg>
-      <p:bgPr>
-        <a:solidFill>
-          <a:srgbClr val="EEEBE4"/>
-        </a:solidFill>
-        <a:effectLst/>
-      </p:bgPr>
-    </p:bg>
-    <p:spTree>
-      <p:nvGrpSpPr>
-        <p:cNvPr id="1" name=""/>
-        <p:cNvGrpSpPr/>
-        <p:nvPr/>
-      </p:nvGrpSpPr>
-      <p:grpSpPr/>
-      <p:sp>
-        <p:nvSpPr>
-          <p:cNvPr id="2" name="Rectangle 1"/>
+              <a:t>Your friend laughs about blacking out last weekend. It's the third time this semester.</a:t>
+            </a:r>
+          </a:p>
+        </p:txBody>
+      </p:sp>
+      <p:sp>
+        <p:nvSpPr>
+          <p:cNvPr id="12" name="Rectangle 11"/>
           <p:cNvSpPr/>
           <p:nvPr/>
         </p:nvSpPr>
         <p:spPr>
           <a:xfrm>
-            <a:off x="0" y="0"/>
-            <a:ext cx="12191695" cy="384048"/>
+            <a:off x="8016239" y="2103120"/>
+            <a:ext cx="3322320" cy="3840480"/>
           </a:xfrm>
           <a:prstGeom prst="rect">
             <a:avLst/>
           </a:prstGeom>
           <a:solidFill>
-            <a:srgbClr val="0B2D5B"/>
+            <a:srgbClr val="FFFFFF"/>
           </a:solidFill>
-          <a:ln>
-            <a:noFill/>
+          <a:ln w="15875">
+            <a:solidFill>
+              <a:srgbClr val="D8D2C6"/>
+            </a:solidFill>
           </a:ln>
           <a:effectLst/>
         </p:spPr>
@@ -5547,14 +5166,14 @@
       </p:sp>
       <p:sp>
         <p:nvSpPr>
-          <p:cNvPr id="3" name="TextBox 2"/>
+          <p:cNvPr id="13" name="TextBox 12"/>
           <p:cNvSpPr txBox="1"/>
           <p:nvPr/>
         </p:nvSpPr>
         <p:spPr>
           <a:xfrm>
-            <a:off x="548640" y="100584"/>
-            <a:ext cx="10972800" cy="274320"/>
+            <a:off x="8244839" y="2286000"/>
+            <a:ext cx="2865120" cy="365760"/>
           </a:xfrm>
           <a:prstGeom prst="rect">
             <a:avLst/>
@@ -5569,31 +5188,31 @@
           <a:p>
             <a:pPr algn="l">
               <a:spcAft>
-                <a:spcPts val="495"/>
-              </a:spcAft>
-            </a:pPr>
-            <a:r>
-              <a:rPr sz="1100" b="1" i="0">
-                <a:solidFill>
-                  <a:srgbClr val="FFFFFF"/>
+                <a:spcPts val="585"/>
+              </a:spcAft>
+            </a:pPr>
+            <a:r>
+              <a:rPr sz="1300" b="1" i="0">
+                <a:solidFill>
+                  <a:srgbClr val="0B2D5B"/>
                 </a:solidFill>
                 <a:latin typeface="Inter Tight"/>
               </a:rPr>
-              <a:t>TEACHER PAGE  ·  skipped when you present  ·  Before you teach</a:t>
-            </a:r>
-          </a:p>
-        </p:txBody>
-      </p:sp>
-      <p:sp>
-        <p:nvSpPr>
-          <p:cNvPr id="4" name="TextBox 3"/>
+              <a:t>A FAMILY DINNER</a:t>
+            </a:r>
+          </a:p>
+        </p:txBody>
+      </p:sp>
+      <p:sp>
+        <p:nvSpPr>
+          <p:cNvPr id="14" name="TextBox 13"/>
           <p:cNvSpPr txBox="1"/>
           <p:nvPr/>
         </p:nvSpPr>
         <p:spPr>
           <a:xfrm>
-            <a:off x="548640" y="685800"/>
-            <a:ext cx="10972800" cy="640080"/>
+            <a:off x="8244839" y="2743200"/>
+            <a:ext cx="2865120" cy="3017520"/>
           </a:xfrm>
           <a:prstGeom prst="rect">
             <a:avLst/>
@@ -5608,31 +5227,101 @@
           <a:p>
             <a:pPr algn="l">
               <a:spcAft>
-                <a:spcPts val="1350"/>
-              </a:spcAft>
-            </a:pPr>
-            <a:r>
-              <a:rPr sz="3000" b="1" i="0">
+                <a:spcPts val="810"/>
+              </a:spcAft>
+            </a:pPr>
+            <a:r>
+              <a:rPr sz="1800" b="0" i="0">
                 <a:solidFill>
                   <a:srgbClr val="1C1B19"/>
                 </a:solidFill>
                 <a:latin typeface="Source Serif 4"/>
               </a:rPr>
-              <a:t>Before you teach</a:t>
-            </a:r>
-          </a:p>
-        </p:txBody>
-      </p:sp>
-      <p:sp>
-        <p:nvSpPr>
-          <p:cNvPr id="5" name="TextBox 4"/>
+              <a:t>An uncle pours you a small glass of wine. Your parents are fine with it.</a:t>
+            </a:r>
+          </a:p>
+        </p:txBody>
+      </p:sp>
+    </p:spTree>
+  </p:cSld>
+  <p:clrMapOvr>
+    <a:masterClrMapping/>
+  </p:clrMapOvr>
+</p:sld>
+</file>
+
+<file path=ppt/slides/slide11.xml><?xml version="1.0" encoding="utf-8"?>
+<p:sld xmlns:a="http://schemas.openxmlformats.org/drawingml/2006/main" xmlns:p="http://schemas.openxmlformats.org/presentationml/2006/main" xmlns:r="http://schemas.openxmlformats.org/officeDocument/2006/relationships">
+  <p:cSld>
+    <p:bg>
+      <p:bgPr>
+        <a:solidFill>
+          <a:srgbClr val="F7F4EE"/>
+        </a:solidFill>
+        <a:effectLst/>
+      </p:bgPr>
+    </p:bg>
+    <p:spTree>
+      <p:nvGrpSpPr>
+        <p:cNvPr id="1" name=""/>
+        <p:cNvGrpSpPr/>
+        <p:nvPr/>
+      </p:nvGrpSpPr>
+      <p:grpSpPr/>
+      <p:sp>
+        <p:nvSpPr>
+          <p:cNvPr id="2" name="Rectangle 1"/>
+          <p:cNvSpPr/>
+          <p:nvPr/>
+        </p:nvSpPr>
+        <p:spPr>
+          <a:xfrm>
+            <a:off x="548640" y="502920"/>
+            <a:ext cx="457200" cy="54864"/>
+          </a:xfrm>
+          <a:prstGeom prst="rect">
+            <a:avLst/>
+          </a:prstGeom>
+          <a:solidFill>
+            <a:srgbClr val="F47B20"/>
+          </a:solidFill>
+          <a:ln>
+            <a:noFill/>
+          </a:ln>
+          <a:effectLst/>
+        </p:spPr>
+        <p:style>
+          <a:lnRef idx="1">
+            <a:schemeClr val="accent1"/>
+          </a:lnRef>
+          <a:fillRef idx="3">
+            <a:schemeClr val="accent1"/>
+          </a:fillRef>
+          <a:effectRef idx="2">
+            <a:schemeClr val="accent1"/>
+          </a:effectRef>
+          <a:fontRef idx="minor">
+            <a:schemeClr val="lt1"/>
+          </a:fontRef>
+        </p:style>
+        <p:txBody>
+          <a:bodyPr rtlCol="0" anchor="ctr"/>
+          <a:lstStyle/>
+          <a:p>
+            <a:pPr algn="ctr"/>
+          </a:p>
+        </p:txBody>
+      </p:sp>
+      <p:sp>
+        <p:nvSpPr>
+          <p:cNvPr id="3" name="TextBox 2"/>
           <p:cNvSpPr txBox="1"/>
           <p:nvPr/>
         </p:nvSpPr>
         <p:spPr>
           <a:xfrm>
-            <a:off x="548640" y="1463040"/>
-            <a:ext cx="5394960" cy="4937760"/>
+            <a:off x="1143000" y="393192"/>
+            <a:ext cx="8229600" cy="274320"/>
           </a:xfrm>
           <a:prstGeom prst="rect">
             <a:avLst/>
@@ -5647,159 +5336,31 @@
           <a:p>
             <a:pPr algn="l">
               <a:spcAft>
-                <a:spcPts val="585"/>
-              </a:spcAft>
-            </a:pPr>
-            <a:r>
-              <a:rPr sz="1500" b="1" i="0">
-                <a:solidFill>
-                  <a:srgbClr val="1C1B19"/>
-                </a:solidFill>
-                <a:latin typeface="Source Serif 4"/>
-              </a:rPr>
-              <a:t>Assume every kind of home is in the room.</a:t>
-            </a:r>
-          </a:p>
-          <a:p>
-            <a:pPr algn="l">
-              <a:spcAft>
-                <a:spcPts val="585"/>
-              </a:spcAft>
-            </a:pPr>
-            <a:r>
-              <a:rPr sz="1300" b="0" i="0">
-                <a:solidFill>
-                  <a:srgbClr val="1C1B19"/>
-                </a:solidFill>
-                <a:latin typeface="Source Serif 4"/>
-              </a:rPr>
-              <a:t>Students who never drink, students who drink at parties, students whose family serves wine at holidays, students whose faith forbids it, and students living with an adult who drinks heavily. Talk to all of them. No show of hands about anyone's drinking.</a:t>
-            </a:r>
-          </a:p>
-          <a:p>
-            <a:pPr algn="l">
-              <a:spcAft>
-                <a:spcPts val="585"/>
-              </a:spcAft>
-            </a:pPr>
-            <a:r>
-              <a:rPr sz="1300" b="0" i="0">
-                <a:solidFill>
-                  <a:srgbClr val="1C1B19"/>
-                </a:solidFill>
-                <a:latin typeface="Source Serif 4"/>
-              </a:rPr>
-              <a:t/>
-            </a:r>
-          </a:p>
-          <a:p>
-            <a:pPr algn="l">
-              <a:spcAft>
-                <a:spcPts val="585"/>
-              </a:spcAft>
-            </a:pPr>
-            <a:r>
-              <a:rPr sz="1500" b="1" i="0">
-                <a:solidFill>
-                  <a:srgbClr val="1C1B19"/>
-                </a:solidFill>
-                <a:latin typeface="Source Serif 4"/>
-              </a:rPr>
-              <a:t>Lead with the numbers.</a:t>
-            </a:r>
-          </a:p>
-          <a:p>
-            <a:pPr algn="l">
-              <a:spcAft>
-                <a:spcPts val="585"/>
-              </a:spcAft>
-            </a:pPr>
-            <a:r>
-              <a:rPr sz="1300" b="0" i="0">
-                <a:solidFill>
-                  <a:srgbClr val="1C1B19"/>
-                </a:solidFill>
-                <a:latin typeface="Source Serif 4"/>
-              </a:rPr>
-              <a:t>Most of their grade isn't drinking. Teens overestimate how many peers drink, and that guess shapes what they do. Saying the real number out loud does real work.</a:t>
-            </a:r>
-          </a:p>
-          <a:p>
-            <a:pPr algn="l">
-              <a:spcAft>
-                <a:spcPts val="585"/>
-              </a:spcAft>
-            </a:pPr>
-            <a:r>
-              <a:rPr sz="1300" b="0" i="0">
-                <a:solidFill>
-                  <a:srgbClr val="1C1B19"/>
-                </a:solidFill>
-                <a:latin typeface="Source Serif 4"/>
-              </a:rPr>
-              <a:t/>
-            </a:r>
-          </a:p>
-          <a:p>
-            <a:pPr algn="l">
-              <a:spcAft>
-                <a:spcPts val="585"/>
-              </a:spcAft>
-            </a:pPr>
-            <a:r>
-              <a:rPr sz="1500" b="1" i="0">
-                <a:solidFill>
-                  <a:srgbClr val="1C1B19"/>
-                </a:solidFill>
-                <a:latin typeface="Source Serif 4"/>
-              </a:rPr>
-              <a:t>Make the 911 message impossible to miss.</a:t>
-            </a:r>
-          </a:p>
-          <a:p>
-            <a:pPr algn="l">
-              <a:spcAft>
-                <a:spcPts val="585"/>
-              </a:spcAft>
-            </a:pPr>
-            <a:r>
-              <a:rPr sz="1300" b="0" i="0">
-                <a:solidFill>
-                  <a:srgbClr val="1C1B19"/>
-                </a:solidFill>
-                <a:latin typeface="Source Serif 4"/>
-              </a:rPr>
-              <a:t>If someone can't be woken, is breathing slowly or with long pauses, or is vomiting while passed out, the answer is 911. Say it more than once. Fear of getting in trouble is the main reason people wait.</a:t>
-            </a:r>
-          </a:p>
-          <a:p>
-            <a:pPr algn="l">
-              <a:spcAft>
-                <a:spcPts val="585"/>
-              </a:spcAft>
-            </a:pPr>
-            <a:r>
-              <a:rPr sz="1300" b="0" i="0">
-                <a:solidFill>
-                  <a:srgbClr val="1C1B19"/>
-                </a:solidFill>
-                <a:latin typeface="Source Serif 4"/>
-              </a:rPr>
-              <a:t/>
-            </a:r>
-          </a:p>
-        </p:txBody>
-      </p:sp>
-      <p:sp>
-        <p:nvSpPr>
-          <p:cNvPr id="6" name="TextBox 5"/>
+                <a:spcPts val="540"/>
+              </a:spcAft>
+            </a:pPr>
+            <a:r>
+              <a:rPr sz="1200" b="1" i="0">
+                <a:solidFill>
+                  <a:srgbClr val="5D5A54"/>
+                </a:solidFill>
+                <a:latin typeface="Inter Tight"/>
+              </a:rPr>
+              <a:t>YOUR PLAN</a:t>
+            </a:r>
+          </a:p>
+        </p:txBody>
+      </p:sp>
+      <p:sp>
+        <p:nvSpPr>
+          <p:cNvPr id="4" name="TextBox 3"/>
           <p:cNvSpPr txBox="1"/>
           <p:nvPr/>
         </p:nvSpPr>
         <p:spPr>
           <a:xfrm>
-            <a:off x="6217920" y="1463040"/>
-            <a:ext cx="5394960" cy="4937760"/>
+            <a:off x="8229600" y="6400800"/>
+            <a:ext cx="3410712" cy="274320"/>
           </a:xfrm>
           <a:prstGeom prst="rect">
             <a:avLst/>
@@ -5812,147 +5373,784 @@
           </a:bodyPr>
           <a:lstStyle/>
           <a:p>
-            <a:pPr algn="l">
-              <a:spcAft>
-                <a:spcPts val="585"/>
-              </a:spcAft>
-            </a:pPr>
-            <a:r>
-              <a:rPr sz="1500" b="1" i="0">
+            <a:pPr algn="r">
+              <a:spcAft>
+                <a:spcPts val="450"/>
+              </a:spcAft>
+            </a:pPr>
+            <a:r>
+              <a:rPr sz="1000" b="0" i="0">
+                <a:solidFill>
+                  <a:srgbClr val="5D5A54"/>
+                </a:solidFill>
+                <a:latin typeface="Inter Tight"/>
+              </a:rPr>
+              <a:t>Beaver Counseling</a:t>
+            </a:r>
+          </a:p>
+        </p:txBody>
+      </p:sp>
+      <p:sp>
+        <p:nvSpPr>
+          <p:cNvPr id="5" name="TextBox 4"/>
+          <p:cNvSpPr txBox="1"/>
+          <p:nvPr/>
+        </p:nvSpPr>
+        <p:spPr>
+          <a:xfrm>
+            <a:off x="822960" y="1005840"/>
+            <a:ext cx="10515600" cy="1097280"/>
+          </a:xfrm>
+          <a:prstGeom prst="rect">
+            <a:avLst/>
+          </a:prstGeom>
+          <a:noFill/>
+        </p:spPr>
+        <p:txBody>
+          <a:bodyPr wrap="square" anchor="t" lIns="0" rIns="0" tIns="0" bIns="0">
+            <a:spAutoFit/>
+          </a:bodyPr>
+          <a:lstStyle/>
+          <a:p>
+            <a:pPr algn="l">
+              <a:spcAft>
+                <a:spcPts val="1620"/>
+              </a:spcAft>
+            </a:pPr>
+            <a:r>
+              <a:rPr sz="3600" b="1" i="0">
                 <a:solidFill>
                   <a:srgbClr val="1C1B19"/>
                 </a:solidFill>
                 <a:latin typeface="Source Serif 4"/>
               </a:rPr>
-              <a:t>Be honest about the law.</a:t>
-            </a:r>
-          </a:p>
-          <a:p>
-            <a:pPr algn="l">
-              <a:spcAft>
-                <a:spcPts val="585"/>
-              </a:spcAft>
-            </a:pPr>
-            <a:r>
-              <a:rPr sz="1300" b="0" i="0">
+              <a:t>Set it up before you go</a:t>
+            </a:r>
+          </a:p>
+        </p:txBody>
+      </p:sp>
+      <p:sp>
+        <p:nvSpPr>
+          <p:cNvPr id="6" name="TextBox 5"/>
+          <p:cNvSpPr txBox="1"/>
+          <p:nvPr/>
+        </p:nvSpPr>
+        <p:spPr>
+          <a:xfrm>
+            <a:off x="822960" y="2194560"/>
+            <a:ext cx="548640" cy="1005840"/>
+          </a:xfrm>
+          <a:prstGeom prst="rect">
+            <a:avLst/>
+          </a:prstGeom>
+          <a:noFill/>
+        </p:spPr>
+        <p:txBody>
+          <a:bodyPr wrap="square" anchor="t" lIns="0" rIns="0" tIns="0" bIns="0">
+            <a:spAutoFit/>
+          </a:bodyPr>
+          <a:lstStyle/>
+          <a:p>
+            <a:pPr algn="l">
+              <a:spcAft>
+                <a:spcPts val="1170"/>
+              </a:spcAft>
+            </a:pPr>
+            <a:r>
+              <a:rPr sz="2600" b="1" i="0">
+                <a:solidFill>
+                  <a:srgbClr val="F47B20"/>
+                </a:solidFill>
+                <a:latin typeface="Source Serif 4"/>
+              </a:rPr>
+              <a:t>1</a:t>
+            </a:r>
+          </a:p>
+        </p:txBody>
+      </p:sp>
+      <p:sp>
+        <p:nvSpPr>
+          <p:cNvPr id="7" name="TextBox 6"/>
+          <p:cNvSpPr txBox="1"/>
+          <p:nvPr/>
+        </p:nvSpPr>
+        <p:spPr>
+          <a:xfrm>
+            <a:off x="1463040" y="2231136"/>
+            <a:ext cx="9875520" cy="1005840"/>
+          </a:xfrm>
+          <a:prstGeom prst="rect">
+            <a:avLst/>
+          </a:prstGeom>
+          <a:noFill/>
+        </p:spPr>
+        <p:txBody>
+          <a:bodyPr wrap="square" anchor="t" lIns="0" rIns="0" tIns="0" bIns="0">
+            <a:spAutoFit/>
+          </a:bodyPr>
+          <a:lstStyle/>
+          <a:p>
+            <a:pPr algn="l">
+              <a:spcAft>
+                <a:spcPts val="945"/>
+              </a:spcAft>
+            </a:pPr>
+            <a:r>
+              <a:rPr sz="2100" b="1" i="0">
                 <a:solidFill>
                   <a:srgbClr val="1C1B19"/>
                 </a:solidFill>
                 <a:latin typeface="Source Serif 4"/>
               </a:rPr>
-              <a:t>Massachusetts' Good Samaritan law covers drug overdose calls and doesn't specifically cover underage drinking. Don't promise students immunity. Tell them to call anyway, because trouble is temporary.</a:t>
-            </a:r>
-          </a:p>
-          <a:p>
-            <a:pPr algn="l">
-              <a:spcAft>
-                <a:spcPts val="585"/>
-              </a:spcAft>
-            </a:pPr>
-            <a:r>
-              <a:rPr sz="1300" b="0" i="0">
+              <a:t>Pick your exit-plan person.</a:t>
+            </a:r>
+          </a:p>
+          <a:p>
+            <a:pPr algn="l">
+              <a:spcAft>
+                <a:spcPts val="945"/>
+              </a:spcAft>
+            </a:pPr>
+            <a:r>
+              <a:rPr sz="1600" b="0" i="0">
+                <a:solidFill>
+                  <a:srgbClr val="5D5A54"/>
+                </a:solidFill>
+                <a:latin typeface="Source Serif 4"/>
+              </a:rPr>
+              <a:t>Someone you can text a code word to, no questions.</a:t>
+            </a:r>
+          </a:p>
+        </p:txBody>
+      </p:sp>
+      <p:sp>
+        <p:nvSpPr>
+          <p:cNvPr id="8" name="TextBox 7"/>
+          <p:cNvSpPr txBox="1"/>
+          <p:nvPr/>
+        </p:nvSpPr>
+        <p:spPr>
+          <a:xfrm>
+            <a:off x="822960" y="3200400"/>
+            <a:ext cx="548640" cy="1005840"/>
+          </a:xfrm>
+          <a:prstGeom prst="rect">
+            <a:avLst/>
+          </a:prstGeom>
+          <a:noFill/>
+        </p:spPr>
+        <p:txBody>
+          <a:bodyPr wrap="square" anchor="t" lIns="0" rIns="0" tIns="0" bIns="0">
+            <a:spAutoFit/>
+          </a:bodyPr>
+          <a:lstStyle/>
+          <a:p>
+            <a:pPr algn="l">
+              <a:spcAft>
+                <a:spcPts val="1170"/>
+              </a:spcAft>
+            </a:pPr>
+            <a:r>
+              <a:rPr sz="2600" b="1" i="0">
+                <a:solidFill>
+                  <a:srgbClr val="F47B20"/>
+                </a:solidFill>
+                <a:latin typeface="Source Serif 4"/>
+              </a:rPr>
+              <a:t>2</a:t>
+            </a:r>
+          </a:p>
+        </p:txBody>
+      </p:sp>
+      <p:sp>
+        <p:nvSpPr>
+          <p:cNvPr id="9" name="TextBox 8"/>
+          <p:cNvSpPr txBox="1"/>
+          <p:nvPr/>
+        </p:nvSpPr>
+        <p:spPr>
+          <a:xfrm>
+            <a:off x="1463040" y="3236976"/>
+            <a:ext cx="9875520" cy="1005840"/>
+          </a:xfrm>
+          <a:prstGeom prst="rect">
+            <a:avLst/>
+          </a:prstGeom>
+          <a:noFill/>
+        </p:spPr>
+        <p:txBody>
+          <a:bodyPr wrap="square" anchor="t" lIns="0" rIns="0" tIns="0" bIns="0">
+            <a:spAutoFit/>
+          </a:bodyPr>
+          <a:lstStyle/>
+          <a:p>
+            <a:pPr algn="l">
+              <a:spcAft>
+                <a:spcPts val="945"/>
+              </a:spcAft>
+            </a:pPr>
+            <a:r>
+              <a:rPr sz="2100" b="1" i="0">
                 <a:solidFill>
                   <a:srgbClr val="1C1B19"/>
                 </a:solidFill>
                 <a:latin typeface="Source Serif 4"/>
               </a:rPr>
-              <a:t/>
-            </a:r>
-          </a:p>
-          <a:p>
-            <a:pPr algn="l">
-              <a:spcAft>
-                <a:spcPts val="585"/>
-              </a:spcAft>
-            </a:pPr>
-            <a:r>
-              <a:rPr sz="1500" b="1" i="0">
+              <a:t>Not drinking is normal.</a:t>
+            </a:r>
+          </a:p>
+          <a:p>
+            <a:pPr algn="l">
+              <a:spcAft>
+                <a:spcPts val="945"/>
+              </a:spcAft>
+            </a:pPr>
+            <a:r>
+              <a:rPr sz="1600" b="0" i="0">
+                <a:solidFill>
+                  <a:srgbClr val="5D5A54"/>
+                </a:solidFill>
+                <a:latin typeface="Source Serif 4"/>
+              </a:rPr>
+              <a:t>Most of your grade made that choice.</a:t>
+            </a:r>
+          </a:p>
+        </p:txBody>
+      </p:sp>
+      <p:sp>
+        <p:nvSpPr>
+          <p:cNvPr id="10" name="TextBox 9"/>
+          <p:cNvSpPr txBox="1"/>
+          <p:nvPr/>
+        </p:nvSpPr>
+        <p:spPr>
+          <a:xfrm>
+            <a:off x="822960" y="4206240"/>
+            <a:ext cx="548640" cy="1005840"/>
+          </a:xfrm>
+          <a:prstGeom prst="rect">
+            <a:avLst/>
+          </a:prstGeom>
+          <a:noFill/>
+        </p:spPr>
+        <p:txBody>
+          <a:bodyPr wrap="square" anchor="t" lIns="0" rIns="0" tIns="0" bIns="0">
+            <a:spAutoFit/>
+          </a:bodyPr>
+          <a:lstStyle/>
+          <a:p>
+            <a:pPr algn="l">
+              <a:spcAft>
+                <a:spcPts val="1170"/>
+              </a:spcAft>
+            </a:pPr>
+            <a:r>
+              <a:rPr sz="2600" b="1" i="0">
+                <a:solidFill>
+                  <a:srgbClr val="F47B20"/>
+                </a:solidFill>
+                <a:latin typeface="Source Serif 4"/>
+              </a:rPr>
+              <a:t>3</a:t>
+            </a:r>
+          </a:p>
+        </p:txBody>
+      </p:sp>
+      <p:sp>
+        <p:nvSpPr>
+          <p:cNvPr id="11" name="TextBox 10"/>
+          <p:cNvSpPr txBox="1"/>
+          <p:nvPr/>
+        </p:nvSpPr>
+        <p:spPr>
+          <a:xfrm>
+            <a:off x="1463040" y="4242816"/>
+            <a:ext cx="9875520" cy="1005840"/>
+          </a:xfrm>
+          <a:prstGeom prst="rect">
+            <a:avLst/>
+          </a:prstGeom>
+          <a:noFill/>
+        </p:spPr>
+        <p:txBody>
+          <a:bodyPr wrap="square" anchor="t" lIns="0" rIns="0" tIns="0" bIns="0">
+            <a:spAutoFit/>
+          </a:bodyPr>
+          <a:lstStyle/>
+          <a:p>
+            <a:pPr algn="l">
+              <a:spcAft>
+                <a:spcPts val="945"/>
+              </a:spcAft>
+            </a:pPr>
+            <a:r>
+              <a:rPr sz="2100" b="1" i="0">
                 <a:solidFill>
                   <a:srgbClr val="1C1B19"/>
                 </a:solidFill>
                 <a:latin typeface="Source Serif 4"/>
               </a:rPr>
-              <a:t>If a student mentions drinking at home.</a:t>
-            </a:r>
-          </a:p>
-          <a:p>
-            <a:pPr algn="l">
-              <a:spcAft>
-                <a:spcPts val="585"/>
-              </a:spcAft>
-            </a:pPr>
-            <a:r>
-              <a:rPr sz="1300" b="0" i="0">
+              <a:t>If alcohol is there, protect the basics.</a:t>
+            </a:r>
+          </a:p>
+          <a:p>
+            <a:pPr algn="l">
+              <a:spcAft>
+                <a:spcPts val="945"/>
+              </a:spcAft>
+            </a:pPr>
+            <a:r>
+              <a:rPr sz="1600" b="0" i="0">
+                <a:solidFill>
+                  <a:srgbClr val="5D5A54"/>
+                </a:solidFill>
+                <a:latin typeface="Source Serif 4"/>
+              </a:rPr>
+              <a:t>Eat first, go slow, own cup, never mix.</a:t>
+            </a:r>
+          </a:p>
+        </p:txBody>
+      </p:sp>
+      <p:sp>
+        <p:nvSpPr>
+          <p:cNvPr id="12" name="TextBox 11"/>
+          <p:cNvSpPr txBox="1"/>
+          <p:nvPr/>
+        </p:nvSpPr>
+        <p:spPr>
+          <a:xfrm>
+            <a:off x="822960" y="5212080"/>
+            <a:ext cx="548640" cy="1005840"/>
+          </a:xfrm>
+          <a:prstGeom prst="rect">
+            <a:avLst/>
+          </a:prstGeom>
+          <a:noFill/>
+        </p:spPr>
+        <p:txBody>
+          <a:bodyPr wrap="square" anchor="t" lIns="0" rIns="0" tIns="0" bIns="0">
+            <a:spAutoFit/>
+          </a:bodyPr>
+          <a:lstStyle/>
+          <a:p>
+            <a:pPr algn="l">
+              <a:spcAft>
+                <a:spcPts val="1170"/>
+              </a:spcAft>
+            </a:pPr>
+            <a:r>
+              <a:rPr sz="2600" b="1" i="0">
+                <a:solidFill>
+                  <a:srgbClr val="F47B20"/>
+                </a:solidFill>
+                <a:latin typeface="Source Serif 4"/>
+              </a:rPr>
+              <a:t>4</a:t>
+            </a:r>
+          </a:p>
+        </p:txBody>
+      </p:sp>
+      <p:sp>
+        <p:nvSpPr>
+          <p:cNvPr id="13" name="TextBox 12"/>
+          <p:cNvSpPr txBox="1"/>
+          <p:nvPr/>
+        </p:nvSpPr>
+        <p:spPr>
+          <a:xfrm>
+            <a:off x="1463040" y="5248656"/>
+            <a:ext cx="9875520" cy="1005840"/>
+          </a:xfrm>
+          <a:prstGeom prst="rect">
+            <a:avLst/>
+          </a:prstGeom>
+          <a:noFill/>
+        </p:spPr>
+        <p:txBody>
+          <a:bodyPr wrap="square" anchor="t" lIns="0" rIns="0" tIns="0" bIns="0">
+            <a:spAutoFit/>
+          </a:bodyPr>
+          <a:lstStyle/>
+          <a:p>
+            <a:pPr algn="l">
+              <a:spcAft>
+                <a:spcPts val="945"/>
+              </a:spcAft>
+            </a:pPr>
+            <a:r>
+              <a:rPr sz="2100" b="1" i="0">
                 <a:solidFill>
                   <a:srgbClr val="1C1B19"/>
                 </a:solidFill>
                 <a:latin typeface="Source Serif 4"/>
               </a:rPr>
-              <a:t>Some students are worried about a parent. Thank them quietly, don't probe in front of the class, and walk them to a counselor that day.</a:t>
-            </a:r>
-          </a:p>
-          <a:p>
-            <a:pPr algn="l">
-              <a:spcAft>
-                <a:spcPts val="585"/>
-              </a:spcAft>
-            </a:pPr>
-            <a:r>
-              <a:rPr sz="1300" b="0" i="0">
+              <a:t>Never ride with a driver who drank.</a:t>
+            </a:r>
+          </a:p>
+          <a:p>
+            <a:pPr algn="l">
+              <a:spcAft>
+                <a:spcPts val="945"/>
+              </a:spcAft>
+            </a:pPr>
+            <a:r>
+              <a:rPr sz="1600" b="0" i="0">
+                <a:solidFill>
+                  <a:srgbClr val="5D5A54"/>
+                </a:solidFill>
+                <a:latin typeface="Source Serif 4"/>
+              </a:rPr>
+              <a:t>Call your person instead.</a:t>
+            </a:r>
+          </a:p>
+        </p:txBody>
+      </p:sp>
+    </p:spTree>
+  </p:cSld>
+  <p:clrMapOvr>
+    <a:masterClrMapping/>
+  </p:clrMapOvr>
+</p:sld>
+</file>
+
+<file path=ppt/slides/slide12.xml><?xml version="1.0" encoding="utf-8"?>
+<p:sld xmlns:a="http://schemas.openxmlformats.org/drawingml/2006/main" xmlns:p="http://schemas.openxmlformats.org/presentationml/2006/main" xmlns:r="http://schemas.openxmlformats.org/officeDocument/2006/relationships">
+  <p:cSld>
+    <p:bg>
+      <p:bgPr>
+        <a:solidFill>
+          <a:srgbClr val="F7F4EE"/>
+        </a:solidFill>
+        <a:effectLst/>
+      </p:bgPr>
+    </p:bg>
+    <p:spTree>
+      <p:nvGrpSpPr>
+        <p:cNvPr id="1" name=""/>
+        <p:cNvGrpSpPr/>
+        <p:nvPr/>
+      </p:nvGrpSpPr>
+      <p:grpSpPr/>
+      <p:sp>
+        <p:nvSpPr>
+          <p:cNvPr id="2" name="Rectangle 1"/>
+          <p:cNvSpPr/>
+          <p:nvPr/>
+        </p:nvSpPr>
+        <p:spPr>
+          <a:xfrm>
+            <a:off x="548640" y="502920"/>
+            <a:ext cx="457200" cy="54864"/>
+          </a:xfrm>
+          <a:prstGeom prst="rect">
+            <a:avLst/>
+          </a:prstGeom>
+          <a:solidFill>
+            <a:srgbClr val="F47B20"/>
+          </a:solidFill>
+          <a:ln>
+            <a:noFill/>
+          </a:ln>
+          <a:effectLst/>
+        </p:spPr>
+        <p:style>
+          <a:lnRef idx="1">
+            <a:schemeClr val="accent1"/>
+          </a:lnRef>
+          <a:fillRef idx="3">
+            <a:schemeClr val="accent1"/>
+          </a:fillRef>
+          <a:effectRef idx="2">
+            <a:schemeClr val="accent1"/>
+          </a:effectRef>
+          <a:fontRef idx="minor">
+            <a:schemeClr val="lt1"/>
+          </a:fontRef>
+        </p:style>
+        <p:txBody>
+          <a:bodyPr rtlCol="0" anchor="ctr"/>
+          <a:lstStyle/>
+          <a:p>
+            <a:pPr algn="ctr"/>
+          </a:p>
+        </p:txBody>
+      </p:sp>
+      <p:sp>
+        <p:nvSpPr>
+          <p:cNvPr id="3" name="TextBox 2"/>
+          <p:cNvSpPr txBox="1"/>
+          <p:nvPr/>
+        </p:nvSpPr>
+        <p:spPr>
+          <a:xfrm>
+            <a:off x="1143000" y="393192"/>
+            <a:ext cx="8229600" cy="274320"/>
+          </a:xfrm>
+          <a:prstGeom prst="rect">
+            <a:avLst/>
+          </a:prstGeom>
+          <a:noFill/>
+        </p:spPr>
+        <p:txBody>
+          <a:bodyPr wrap="square" anchor="t" lIns="0" rIns="0" tIns="0" bIns="0">
+            <a:spAutoFit/>
+          </a:bodyPr>
+          <a:lstStyle/>
+          <a:p>
+            <a:pPr algn="l">
+              <a:spcAft>
+                <a:spcPts val="540"/>
+              </a:spcAft>
+            </a:pPr>
+            <a:r>
+              <a:rPr sz="1200" b="1" i="0">
+                <a:solidFill>
+                  <a:srgbClr val="5D5A54"/>
+                </a:solidFill>
+                <a:latin typeface="Inter Tight"/>
+              </a:rPr>
+              <a:t>BEFORE YOU GO</a:t>
+            </a:r>
+          </a:p>
+        </p:txBody>
+      </p:sp>
+      <p:sp>
+        <p:nvSpPr>
+          <p:cNvPr id="4" name="TextBox 3"/>
+          <p:cNvSpPr txBox="1"/>
+          <p:nvPr/>
+        </p:nvSpPr>
+        <p:spPr>
+          <a:xfrm>
+            <a:off x="8229600" y="6400800"/>
+            <a:ext cx="3410712" cy="274320"/>
+          </a:xfrm>
+          <a:prstGeom prst="rect">
+            <a:avLst/>
+          </a:prstGeom>
+          <a:noFill/>
+        </p:spPr>
+        <p:txBody>
+          <a:bodyPr wrap="square" anchor="t" lIns="0" rIns="0" tIns="0" bIns="0">
+            <a:spAutoFit/>
+          </a:bodyPr>
+          <a:lstStyle/>
+          <a:p>
+            <a:pPr algn="r">
+              <a:spcAft>
+                <a:spcPts val="450"/>
+              </a:spcAft>
+            </a:pPr>
+            <a:r>
+              <a:rPr sz="1000" b="0" i="0">
+                <a:solidFill>
+                  <a:srgbClr val="5D5A54"/>
+                </a:solidFill>
+                <a:latin typeface="Inter Tight"/>
+              </a:rPr>
+              <a:t>Beaver Counseling</a:t>
+            </a:r>
+          </a:p>
+        </p:txBody>
+      </p:sp>
+      <p:sp>
+        <p:nvSpPr>
+          <p:cNvPr id="5" name="TextBox 4"/>
+          <p:cNvSpPr txBox="1"/>
+          <p:nvPr/>
+        </p:nvSpPr>
+        <p:spPr>
+          <a:xfrm>
+            <a:off x="822960" y="1188720"/>
+            <a:ext cx="10515600" cy="914400"/>
+          </a:xfrm>
+          <a:prstGeom prst="rect">
+            <a:avLst/>
+          </a:prstGeom>
+          <a:noFill/>
+        </p:spPr>
+        <p:txBody>
+          <a:bodyPr wrap="square" anchor="t" lIns="0" rIns="0" tIns="0" bIns="0">
+            <a:spAutoFit/>
+          </a:bodyPr>
+          <a:lstStyle/>
+          <a:p>
+            <a:pPr algn="l">
+              <a:spcAft>
+                <a:spcPts val="1620"/>
+              </a:spcAft>
+            </a:pPr>
+            <a:r>
+              <a:rPr sz="3600" b="1" i="0">
                 <a:solidFill>
                   <a:srgbClr val="1C1B19"/>
                 </a:solidFill>
                 <a:latin typeface="Source Serif 4"/>
               </a:rPr>
-              <a:t/>
-            </a:r>
-          </a:p>
-          <a:p>
-            <a:pPr algn="l">
-              <a:spcAft>
-                <a:spcPts val="585"/>
-              </a:spcAft>
-            </a:pPr>
-            <a:r>
-              <a:rPr sz="1500" b="1" i="0">
+              <a:t>Exit card</a:t>
+            </a:r>
+          </a:p>
+        </p:txBody>
+      </p:sp>
+      <p:sp>
+        <p:nvSpPr>
+          <p:cNvPr id="6" name="TextBox 5"/>
+          <p:cNvSpPr txBox="1"/>
+          <p:nvPr/>
+        </p:nvSpPr>
+        <p:spPr>
+          <a:xfrm>
+            <a:off x="822960" y="2286000"/>
+            <a:ext cx="10515600" cy="1463040"/>
+          </a:xfrm>
+          <a:prstGeom prst="rect">
+            <a:avLst/>
+          </a:prstGeom>
+          <a:noFill/>
+        </p:spPr>
+        <p:txBody>
+          <a:bodyPr wrap="square" anchor="t" lIns="0" rIns="0" tIns="0" bIns="0">
+            <a:spAutoFit/>
+          </a:bodyPr>
+          <a:lstStyle/>
+          <a:p>
+            <a:pPr algn="l">
+              <a:spcAft>
+                <a:spcPts val="1080"/>
+              </a:spcAft>
+            </a:pPr>
+            <a:r>
+              <a:rPr sz="2400" b="0" i="0">
                 <a:solidFill>
                   <a:srgbClr val="1C1B19"/>
                 </a:solidFill>
                 <a:latin typeface="Source Serif 4"/>
               </a:rPr>
-              <a:t>If a student says they black out.</a:t>
-            </a:r>
-          </a:p>
-          <a:p>
-            <a:pPr algn="l">
-              <a:spcAft>
-                <a:spcPts val="585"/>
-              </a:spcAft>
-            </a:pPr>
-            <a:r>
-              <a:rPr sz="1300" b="0" i="0">
+              <a:t>Theo's friend says "let him sleep it off." What do you say back?</a:t>
+            </a:r>
+          </a:p>
+        </p:txBody>
+      </p:sp>
+      <p:sp>
+        <p:nvSpPr>
+          <p:cNvPr id="7" name="Rectangle 6"/>
+          <p:cNvSpPr/>
+          <p:nvPr/>
+        </p:nvSpPr>
+        <p:spPr>
+          <a:xfrm>
+            <a:off x="822960" y="4023360"/>
+            <a:ext cx="10515600" cy="1371600"/>
+          </a:xfrm>
+          <a:prstGeom prst="rect">
+            <a:avLst/>
+          </a:prstGeom>
+          <a:solidFill>
+            <a:srgbClr val="FFFFFF"/>
+          </a:solidFill>
+          <a:ln w="15875">
+            <a:solidFill>
+              <a:srgbClr val="1C1B19"/>
+            </a:solidFill>
+          </a:ln>
+          <a:effectLst/>
+        </p:spPr>
+        <p:style>
+          <a:lnRef idx="1">
+            <a:schemeClr val="accent1"/>
+          </a:lnRef>
+          <a:fillRef idx="3">
+            <a:schemeClr val="accent1"/>
+          </a:fillRef>
+          <a:effectRef idx="2">
+            <a:schemeClr val="accent1"/>
+          </a:effectRef>
+          <a:fontRef idx="minor">
+            <a:schemeClr val="lt1"/>
+          </a:fontRef>
+        </p:style>
+        <p:txBody>
+          <a:bodyPr rtlCol="0" anchor="ctr"/>
+          <a:lstStyle/>
+          <a:p>
+            <a:pPr algn="ctr"/>
+          </a:p>
+        </p:txBody>
+      </p:sp>
+      <p:sp>
+        <p:nvSpPr>
+          <p:cNvPr id="8" name="TextBox 7"/>
+          <p:cNvSpPr txBox="1"/>
+          <p:nvPr/>
+        </p:nvSpPr>
+        <p:spPr>
+          <a:xfrm>
+            <a:off x="1097280" y="4206240"/>
+            <a:ext cx="10058400" cy="365760"/>
+          </a:xfrm>
+          <a:prstGeom prst="rect">
+            <a:avLst/>
+          </a:prstGeom>
+          <a:noFill/>
+        </p:spPr>
+        <p:txBody>
+          <a:bodyPr wrap="square" anchor="t" lIns="0" rIns="0" tIns="0" bIns="0">
+            <a:spAutoFit/>
+          </a:bodyPr>
+          <a:lstStyle/>
+          <a:p>
+            <a:pPr algn="l">
+              <a:spcAft>
+                <a:spcPts val="540"/>
+              </a:spcAft>
+            </a:pPr>
+            <a:r>
+              <a:rPr sz="1200" b="1" i="0">
+                <a:solidFill>
+                  <a:srgbClr val="0B2D5B"/>
+                </a:solidFill>
+                <a:latin typeface="Inter Tight"/>
+              </a:rPr>
+              <a:t>STUDENT PAGE</a:t>
+            </a:r>
+          </a:p>
+        </p:txBody>
+      </p:sp>
+      <p:sp>
+        <p:nvSpPr>
+          <p:cNvPr id="9" name="TextBox 8"/>
+          <p:cNvSpPr txBox="1"/>
+          <p:nvPr/>
+        </p:nvSpPr>
+        <p:spPr>
+          <a:xfrm>
+            <a:off x="1097280" y="4617720"/>
+            <a:ext cx="10058400" cy="640080"/>
+          </a:xfrm>
+          <a:prstGeom prst="rect">
+            <a:avLst/>
+          </a:prstGeom>
+          <a:noFill/>
+        </p:spPr>
+        <p:txBody>
+          <a:bodyPr wrap="square" anchor="t" lIns="0" rIns="0" tIns="0" bIns="0">
+            <a:spAutoFit/>
+          </a:bodyPr>
+          <a:lstStyle/>
+          <a:p>
+            <a:pPr algn="l">
+              <a:spcAft>
+                <a:spcPts val="900"/>
+              </a:spcAft>
+            </a:pPr>
+            <a:r>
+              <a:rPr sz="2000" b="0" i="0">
                 <a:solidFill>
                   <a:srgbClr val="1C1B19"/>
                 </a:solidFill>
-                <a:latin typeface="Source Serif 4"/>
-              </a:rPr>
-              <a:t>Stay calm and private. Blackouts mean a lot of alcohol, fast. Tell them you're glad they said something and connect them with a counselor that day.</a:t>
-            </a:r>
-          </a:p>
-          <a:p>
-            <a:pPr algn="l">
-              <a:spcAft>
-                <a:spcPts val="585"/>
-              </a:spcAft>
-            </a:pPr>
-            <a:r>
-              <a:rPr sz="1300" b="0" i="0">
-                <a:solidFill>
-                  <a:srgbClr val="1C1B19"/>
-                </a:solidFill>
-                <a:latin typeface="Source Serif 4"/>
-              </a:rPr>
-              <a:t/>
+                <a:latin typeface="Inter Tight"/>
+              </a:rPr>
+              <a:t>https://rmwtoolkit.github.io/bcds-toolkit/alcohol-and-your-brain-high-school.html</a:t>
             </a:r>
           </a:p>
         </p:txBody>
@@ -6061,7 +6259,7 @@
                 </a:solidFill>
                 <a:latin typeface="Inter Tight"/>
               </a:rPr>
-              <a:t>TEACHER PAGE  ·  skipped when you present  ·  Every student in the room</a:t>
+              <a:t>TEACHER PAGE  ·  skipped when you present  ·  Lesson plan</a:t>
             </a:r>
           </a:p>
         </p:txBody>
@@ -6075,7 +6273,7 @@
         <p:spPr>
           <a:xfrm>
             <a:off x="548640" y="685800"/>
-            <a:ext cx="10972800" cy="640080"/>
+            <a:ext cx="10972800" cy="731520"/>
           </a:xfrm>
           <a:prstGeom prst="rect">
             <a:avLst/>
@@ -6090,17 +6288,17 @@
           <a:p>
             <a:pPr algn="l">
               <a:spcAft>
-                <a:spcPts val="1350"/>
-              </a:spcAft>
-            </a:pPr>
-            <a:r>
-              <a:rPr sz="3000" b="1" i="0">
+                <a:spcPts val="1530"/>
+              </a:spcAft>
+            </a:pPr>
+            <a:r>
+              <a:rPr sz="3400" b="1" i="0">
                 <a:solidFill>
                   <a:srgbClr val="1C1B19"/>
                 </a:solidFill>
                 <a:latin typeface="Source Serif 4"/>
               </a:rPr>
-              <a:t>Every student in the room</a:t>
+              <a:t>The Drinking Game</a:t>
             </a:r>
           </a:p>
         </p:txBody>
@@ -6139,7 +6337,7 @@
                 </a:solidFill>
                 <a:latin typeface="Inter Tight"/>
               </a:rPr>
-              <a:t>Culture, family, identity, ability and money: what to keep in mind for this topic.</a:t>
+              <a:t>Upper School  ·  45 minutes (20-minute advisory version below)  ·  Health class, advisory, or a counselor-led group</a:t>
             </a:r>
           </a:p>
         </p:txBody>
@@ -6153,7 +6351,7 @@
         <p:spPr>
           <a:xfrm>
             <a:off x="548640" y="1828800"/>
-            <a:ext cx="5394960" cy="4572000"/>
+            <a:ext cx="5120640" cy="4389120"/>
           </a:xfrm>
           <a:prstGeom prst="rect">
             <a:avLst/>
@@ -6168,145 +6366,113 @@
           <a:p>
             <a:pPr algn="l">
               <a:spcAft>
-                <a:spcPts val="585"/>
-              </a:spcAft>
-            </a:pPr>
-            <a:r>
-              <a:rPr sz="1500" b="1" i="0">
+                <a:spcPts val="675"/>
+              </a:spcAft>
+            </a:pPr>
+            <a:r>
+              <a:rPr sz="1100" b="1" i="0">
+                <a:solidFill>
+                  <a:srgbClr val="0B2D5B"/>
+                </a:solidFill>
+                <a:latin typeface="Inter Tight"/>
+              </a:rPr>
+              <a:t>GOAL</a:t>
+            </a:r>
+          </a:p>
+          <a:p>
+            <a:pPr algn="l">
+              <a:spcAft>
+                <a:spcPts val="675"/>
+              </a:spcAft>
+            </a:pPr>
+            <a:r>
+              <a:rPr sz="1500" b="0" i="0">
                 <a:solidFill>
                   <a:srgbClr val="1C1B19"/>
                 </a:solidFill>
                 <a:latin typeface="Source Serif 4"/>
               </a:rPr>
-              <a:t>Faith and culture.</a:t>
-            </a:r>
-          </a:p>
-          <a:p>
-            <a:pPr algn="l">
-              <a:spcAft>
-                <a:spcPts val="585"/>
-              </a:spcAft>
-            </a:pPr>
-            <a:r>
-              <a:rPr sz="1300" b="0" i="0">
+              <a:t>Students can explain the order alcohol affects the brain (judgment, memory, balance, breathing), why the last drink isn't the peak, and exactly what to do when someone shows signs of alcohol poisoning. Not drinking gets named as the normal choice it is. Nobody in the room should feel judged for their family's habits.</a:t>
+            </a:r>
+          </a:p>
+          <a:p>
+            <a:pPr algn="l">
+              <a:spcAft>
+                <a:spcPts val="675"/>
+              </a:spcAft>
+            </a:pPr>
+            <a:r>
+              <a:rPr sz="1500" b="0" i="0">
                 <a:solidFill>
                   <a:srgbClr val="1C1B19"/>
                 </a:solidFill>
                 <a:latin typeface="Source Serif 4"/>
               </a:rPr>
-              <a:t>For some students alcohol is forbidden; for others wine is part of a holiday table. Present facts about the brain and leave the values to the student and their family.</a:t>
-            </a:r>
-          </a:p>
-          <a:p>
-            <a:pPr algn="l">
-              <a:spcAft>
-                <a:spcPts val="585"/>
-              </a:spcAft>
-            </a:pPr>
-            <a:r>
-              <a:rPr sz="1300" b="0" i="0">
+              <a:t/>
+            </a:r>
+          </a:p>
+          <a:p>
+            <a:pPr algn="l">
+              <a:spcAft>
+                <a:spcPts val="675"/>
+              </a:spcAft>
+            </a:pPr>
+            <a:r>
+              <a:rPr sz="1100" b="1" i="0">
+                <a:solidFill>
+                  <a:srgbClr val="0B2D5B"/>
+                </a:solidFill>
+                <a:latin typeface="Inter Tight"/>
+              </a:rPr>
+              <a:t>MATERIALS</a:t>
+            </a:r>
+          </a:p>
+          <a:p>
+            <a:pPr algn="l">
+              <a:spcAft>
+                <a:spcPts val="675"/>
+              </a:spcAft>
+            </a:pPr>
+            <a:r>
+              <a:rPr sz="1500" b="0" i="0">
                 <a:solidFill>
                   <a:srgbClr val="1C1B19"/>
                 </a:solidFill>
                 <a:latin typeface="Source Serif 4"/>
               </a:rPr>
-              <a:t/>
-            </a:r>
-          </a:p>
-          <a:p>
-            <a:pPr algn="l">
-              <a:spcAft>
-                <a:spcPts val="585"/>
-              </a:spcAft>
-            </a:pPr>
-            <a:r>
-              <a:rPr sz="1500" b="1" i="0">
+              <a:t>Paper and pens for the exit card</a:t>
+            </a:r>
+          </a:p>
+          <a:p>
+            <a:pPr algn="l">
+              <a:spcAft>
+                <a:spcPts val="675"/>
+              </a:spcAft>
+            </a:pPr>
+            <a:r>
+              <a:rPr sz="1500" b="0" i="0">
                 <a:solidFill>
                   <a:srgbClr val="1C1B19"/>
                 </a:solidFill>
                 <a:latin typeface="Source Serif 4"/>
               </a:rPr>
-              <a:t>Family drinking.</a:t>
-            </a:r>
-          </a:p>
-          <a:p>
-            <a:pPr algn="l">
-              <a:spcAft>
-                <a:spcPts val="585"/>
-              </a:spcAft>
-            </a:pPr>
-            <a:r>
-              <a:rPr sz="1300" b="0" i="0">
+              <a:t>Nothing to draw: the four stops and the curve are cartoons on the slides</a:t>
+            </a:r>
+          </a:p>
+          <a:p>
+            <a:pPr algn="l">
+              <a:spcAft>
+                <a:spcPts val="675"/>
+              </a:spcAft>
+            </a:pPr>
+            <a:r>
+              <a:rPr sz="1500" b="0" i="0">
                 <a:solidFill>
                   <a:srgbClr val="1C1B19"/>
                 </a:solidFill>
                 <a:latin typeface="Source Serif 4"/>
               </a:rPr>
-              <a:t>"Parent" can mean a grandparent, aunt, foster parent or older sibling, and some of those adults drink too much. Never make a drinking parent sound foolish. A student may be protecting them.</a:t>
-            </a:r>
-          </a:p>
-          <a:p>
-            <a:pPr algn="l">
-              <a:spcAft>
-                <a:spcPts val="585"/>
-              </a:spcAft>
-            </a:pPr>
-            <a:r>
-              <a:rPr sz="1300" b="0" i="0">
-                <a:solidFill>
-                  <a:srgbClr val="1C1B19"/>
-                </a:solidFill>
-                <a:latin typeface="Source Serif 4"/>
-              </a:rPr>
-              <a:t/>
-            </a:r>
-          </a:p>
-          <a:p>
-            <a:pPr algn="l">
-              <a:spcAft>
-                <a:spcPts val="585"/>
-              </a:spcAft>
-            </a:pPr>
-            <a:r>
-              <a:rPr sz="1500" b="1" i="0">
-                <a:solidFill>
-                  <a:srgbClr val="1C1B19"/>
-                </a:solidFill>
-                <a:latin typeface="Source Serif 4"/>
-              </a:rPr>
-              <a:t>Who they call.</a:t>
-            </a:r>
-          </a:p>
-          <a:p>
-            <a:pPr algn="l">
-              <a:spcAft>
-                <a:spcPts val="585"/>
-              </a:spcAft>
-            </a:pPr>
-            <a:r>
-              <a:rPr sz="1300" b="0" i="0">
-                <a:solidFill>
-                  <a:srgbClr val="1C1B19"/>
-                </a:solidFill>
-                <a:latin typeface="Source Serif 4"/>
-              </a:rPr>
-              <a:t>The exit-plan person might be a parent, an older sibling, a cousin or a family friend. Some families will pick up with no questions; some won't. Let students choose their own person.</a:t>
-            </a:r>
-          </a:p>
-          <a:p>
-            <a:pPr algn="l">
-              <a:spcAft>
-                <a:spcPts val="585"/>
-              </a:spcAft>
-            </a:pPr>
-            <a:r>
-              <a:rPr sz="1300" b="0" i="0">
-                <a:solidFill>
-                  <a:srgbClr val="1C1B19"/>
-                </a:solidFill>
-                <a:latin typeface="Source Serif 4"/>
-              </a:rPr>
-              <a:t/>
+              <a:t>The take-home link (last slide) to share after class</a:t>
             </a:r>
           </a:p>
         </p:txBody>
@@ -6319,8 +6485,8 @@
         </p:nvSpPr>
         <p:spPr>
           <a:xfrm>
-            <a:off x="6217920" y="1828800"/>
-            <a:ext cx="5394960" cy="4572000"/>
+            <a:off x="6126480" y="1828800"/>
+            <a:ext cx="5486400" cy="4389120"/>
           </a:xfrm>
           <a:prstGeom prst="rect">
             <a:avLst/>
@@ -6335,145 +6501,290 @@
           <a:p>
             <a:pPr algn="l">
               <a:spcAft>
-                <a:spcPts val="585"/>
-              </a:spcAft>
-            </a:pPr>
-            <a:r>
-              <a:rPr sz="1500" b="1" i="0">
+                <a:spcPts val="630"/>
+              </a:spcAft>
+            </a:pPr>
+            <a:r>
+              <a:rPr sz="1100" b="1" i="0">
+                <a:solidFill>
+                  <a:srgbClr val="0B2D5B"/>
+                </a:solidFill>
+                <a:latin typeface="Inter Tight"/>
+              </a:rPr>
+              <a:t>FLOW</a:t>
+            </a:r>
+          </a:p>
+          <a:p>
+            <a:pPr algn="l">
+              <a:spcAft>
+                <a:spcPts val="630"/>
+              </a:spcAft>
+            </a:pPr>
+            <a:r>
+              <a:rPr sz="1300" b="1" i="0">
+                <a:solidFill>
+                  <a:srgbClr val="F47B20"/>
+                </a:solidFill>
+                <a:latin typeface="Inter Tight"/>
+              </a:rPr>
+              <a:t>3 min   </a:t>
+            </a:r>
+            <a:r>
+              <a:rPr sz="1400" b="0" i="0">
                 <a:solidFill>
                   <a:srgbClr val="1C1B19"/>
                 </a:solidFill>
                 <a:latin typeface="Source Serif 4"/>
               </a:rPr>
-              <a:t>Fear of police.</a:t>
-            </a:r>
-          </a:p>
-          <a:p>
-            <a:pPr algn="l">
-              <a:spcAft>
-                <a:spcPts val="585"/>
-              </a:spcAft>
-            </a:pPr>
-            <a:r>
-              <a:rPr sz="1300" b="0" i="0">
+              <a:t>Quick guess: how many of your grade drink?</a:t>
+            </a:r>
+          </a:p>
+          <a:p>
+            <a:pPr algn="l">
+              <a:spcAft>
+                <a:spcPts val="630"/>
+              </a:spcAft>
+            </a:pPr>
+            <a:r>
+              <a:rPr sz="1300" b="1" i="0">
+                <a:solidFill>
+                  <a:srgbClr val="F47B20"/>
+                </a:solidFill>
+                <a:latin typeface="Inter Tight"/>
+              </a:rPr>
+              <a:t>3 min   </a:t>
+            </a:r>
+            <a:r>
+              <a:rPr sz="1400" b="0" i="0">
                 <a:solidFill>
                   <a:srgbClr val="1C1B19"/>
                 </a:solidFill>
                 <a:latin typeface="Source Serif 4"/>
               </a:rPr>
-              <a:t>For some students, calling 911 brings real worries about immigration status or how police treat their community. Name that calmly. For a medical emergency like alcohol poisoning, 911 is still the call.</a:t>
-            </a:r>
-          </a:p>
-          <a:p>
-            <a:pPr algn="l">
-              <a:spcAft>
-                <a:spcPts val="585"/>
-              </a:spcAft>
-            </a:pPr>
-            <a:r>
-              <a:rPr sz="1300" b="0" i="0">
+              <a:t>Honestly: the trailer vs. the movie</a:t>
+            </a:r>
+          </a:p>
+          <a:p>
+            <a:pPr algn="l">
+              <a:spcAft>
+                <a:spcPts val="630"/>
+              </a:spcAft>
+            </a:pPr>
+            <a:r>
+              <a:rPr sz="1300" b="1" i="0">
+                <a:solidFill>
+                  <a:srgbClr val="F47B20"/>
+                </a:solidFill>
+                <a:latin typeface="Inter Tight"/>
+              </a:rPr>
+              <a:t>8 min   </a:t>
+            </a:r>
+            <a:r>
+              <a:rPr sz="1400" b="0" i="0">
                 <a:solidFill>
                   <a:srgbClr val="1C1B19"/>
                 </a:solidFill>
                 <a:latin typeface="Source Serif 4"/>
               </a:rPr>
+              <a:t>Four stops: what alcohol does, in order</a:t>
+            </a:r>
+          </a:p>
+          <a:p>
+            <a:pPr algn="l">
+              <a:spcAft>
+                <a:spcPts val="630"/>
+              </a:spcAft>
+            </a:pPr>
+            <a:r>
+              <a:rPr sz="1300" b="1" i="0">
+                <a:solidFill>
+                  <a:srgbClr val="F47B20"/>
+                </a:solidFill>
+                <a:latin typeface="Inter Tight"/>
+              </a:rPr>
+              <a:t>4 min   </a:t>
+            </a:r>
+            <a:r>
+              <a:rPr sz="1400" b="0" i="0">
+                <a:solidFill>
+                  <a:srgbClr val="1C1B19"/>
+                </a:solidFill>
+                <a:latin typeface="Source Serif 4"/>
+              </a:rPr>
+              <a:t>The curve: why the last drink isn't the peak</a:t>
+            </a:r>
+          </a:p>
+          <a:p>
+            <a:pPr algn="l">
+              <a:spcAft>
+                <a:spcPts val="630"/>
+              </a:spcAft>
+            </a:pPr>
+            <a:r>
+              <a:rPr sz="1300" b="1" i="0">
+                <a:solidFill>
+                  <a:srgbClr val="F47B20"/>
+                </a:solidFill>
+                <a:latin typeface="Inter Tight"/>
+              </a:rPr>
+              <a:t>2 min   </a:t>
+            </a:r>
+            <a:r>
+              <a:rPr sz="1400" b="0" i="0">
+                <a:solidFill>
+                  <a:srgbClr val="1C1B19"/>
+                </a:solidFill>
+                <a:latin typeface="Source Serif 4"/>
+              </a:rPr>
+              <a:t>Lots of ways in: where the bottle comes from</a:t>
+            </a:r>
+          </a:p>
+          <a:p>
+            <a:pPr algn="l">
+              <a:spcAft>
+                <a:spcPts val="630"/>
+              </a:spcAft>
+            </a:pPr>
+            <a:r>
+              <a:rPr sz="1300" b="1" i="0">
+                <a:solidFill>
+                  <a:srgbClr val="F47B20"/>
+                </a:solidFill>
+                <a:latin typeface="Inter Tight"/>
+              </a:rPr>
+              <a:t>8 min   </a:t>
+            </a:r>
+            <a:r>
+              <a:rPr sz="1400" b="0" i="0">
+                <a:solidFill>
+                  <a:srgbClr val="1C1B19"/>
+                </a:solidFill>
+                <a:latin typeface="Source Serif 4"/>
+              </a:rPr>
+              <a:t>Theo's Friday (four votes)</a:t>
+            </a:r>
+          </a:p>
+          <a:p>
+            <a:pPr algn="l">
+              <a:spcAft>
+                <a:spcPts val="630"/>
+              </a:spcAft>
+            </a:pPr>
+            <a:r>
+              <a:rPr sz="1300" b="1" i="0">
+                <a:solidFill>
+                  <a:srgbClr val="F47B20"/>
+                </a:solidFill>
+                <a:latin typeface="Inter Tight"/>
+              </a:rPr>
+              <a:t>8 min   </a:t>
+            </a:r>
+            <a:r>
+              <a:rPr sz="1400" b="0" i="0">
+                <a:solidFill>
+                  <a:srgbClr val="1C1B19"/>
+                </a:solidFill>
+                <a:latin typeface="Source Serif 4"/>
+              </a:rPr>
+              <a:t>When to call, and three moments (pairs)</a:t>
+            </a:r>
+          </a:p>
+          <a:p>
+            <a:pPr algn="l">
+              <a:spcAft>
+                <a:spcPts val="630"/>
+              </a:spcAft>
+            </a:pPr>
+            <a:r>
+              <a:rPr sz="1300" b="1" i="0">
+                <a:solidFill>
+                  <a:srgbClr val="F47B20"/>
+                </a:solidFill>
+                <a:latin typeface="Inter Tight"/>
+              </a:rPr>
+              <a:t>4 min   </a:t>
+            </a:r>
+            <a:r>
+              <a:rPr sz="1400" b="0" i="0">
+                <a:solidFill>
+                  <a:srgbClr val="1C1B19"/>
+                </a:solidFill>
+                <a:latin typeface="Source Serif 4"/>
+              </a:rPr>
+              <a:t>Your plan (private)</a:t>
+            </a:r>
+          </a:p>
+          <a:p>
+            <a:pPr algn="l">
+              <a:spcAft>
+                <a:spcPts val="630"/>
+              </a:spcAft>
+            </a:pPr>
+            <a:r>
+              <a:rPr sz="1300" b="1" i="0">
+                <a:solidFill>
+                  <a:srgbClr val="F47B20"/>
+                </a:solidFill>
+                <a:latin typeface="Inter Tight"/>
+              </a:rPr>
+              <a:t>5 min   </a:t>
+            </a:r>
+            <a:r>
+              <a:rPr sz="1400" b="0" i="0">
+                <a:solidFill>
+                  <a:srgbClr val="1C1B19"/>
+                </a:solidFill>
+                <a:latin typeface="Source Serif 4"/>
+              </a:rPr>
+              <a:t>Exit card and take-home link</a:t>
+            </a:r>
+          </a:p>
+          <a:p>
+            <a:pPr algn="l">
+              <a:spcAft>
+                <a:spcPts val="630"/>
+              </a:spcAft>
+            </a:pPr>
+            <a:r>
+              <a:rPr sz="1400" b="0" i="0">
+                <a:solidFill>
+                  <a:srgbClr val="1C1B19"/>
+                </a:solidFill>
+                <a:latin typeface="Source Serif 4"/>
+              </a:rPr>
               <a:t/>
             </a:r>
           </a:p>
           <a:p>
             <a:pPr algn="l">
               <a:spcAft>
-                <a:spcPts val="585"/>
-              </a:spcAft>
-            </a:pPr>
-            <a:r>
-              <a:rPr sz="1500" b="1" i="0">
+                <a:spcPts val="630"/>
+              </a:spcAft>
+            </a:pPr>
+            <a:r>
+              <a:rPr sz="1100" b="1" i="0">
+                <a:solidFill>
+                  <a:srgbClr val="0B2D5B"/>
+                </a:solidFill>
+                <a:latin typeface="Inter Tight"/>
+              </a:rPr>
+              <a:t>SHORT ON TIME (20-MINUTE ADVISORY)</a:t>
+            </a:r>
+          </a:p>
+          <a:p>
+            <a:pPr algn="l">
+              <a:spcAft>
+                <a:spcPts val="630"/>
+              </a:spcAft>
+            </a:pPr>
+            <a:r>
+              <a:rPr sz="1400" b="0" i="0">
                 <a:solidFill>
                   <a:srgbClr val="1C1B19"/>
                 </a:solidFill>
                 <a:latin typeface="Source Serif 4"/>
               </a:rPr>
-              <a:t>Mixed examples.</a:t>
-            </a:r>
-          </a:p>
-          <a:p>
-            <a:pPr algn="l">
-              <a:spcAft>
-                <a:spcPts val="585"/>
-              </a:spcAft>
-            </a:pPr>
-            <a:r>
-              <a:rPr sz="1300" b="0" i="0">
-                <a:solidFill>
-                  <a:srgbClr val="1C1B19"/>
-                </a:solidFill>
-                <a:latin typeface="Source Serif 4"/>
-              </a:rPr>
-              <a:t>Use names and situations from many backgrounds, and include LGBTQ+ students in the party stories without making identity the reason anyone drinks.</a:t>
-            </a:r>
-          </a:p>
-          <a:p>
-            <a:pPr algn="l">
-              <a:spcAft>
-                <a:spcPts val="585"/>
-              </a:spcAft>
-            </a:pPr>
-            <a:r>
-              <a:rPr sz="1300" b="0" i="0">
-                <a:solidFill>
-                  <a:srgbClr val="1C1B19"/>
-                </a:solidFill>
-                <a:latin typeface="Source Serif 4"/>
-              </a:rPr>
-              <a:t/>
-            </a:r>
-          </a:p>
-          <a:p>
-            <a:pPr algn="l">
-              <a:spcAft>
-                <a:spcPts val="585"/>
-              </a:spcAft>
-            </a:pPr>
-            <a:r>
-              <a:rPr sz="1500" b="1" i="0">
-                <a:solidFill>
-                  <a:srgbClr val="1C1B19"/>
-                </a:solidFill>
-                <a:latin typeface="Source Serif 4"/>
-              </a:rPr>
-              <a:t>Money and parties.</a:t>
-            </a:r>
-          </a:p>
-          <a:p>
-            <a:pPr algn="l">
-              <a:spcAft>
-                <a:spcPts val="585"/>
-              </a:spcAft>
-            </a:pPr>
-            <a:r>
-              <a:rPr sz="1300" b="0" i="0">
-                <a:solidFill>
-                  <a:srgbClr val="1C1B19"/>
-                </a:solidFill>
-                <a:latin typeface="Source Serif 4"/>
-              </a:rPr>
-              <a:t>Some students go to big parties with adults pouring drinks; others never get invited. Keep the scenarios about choices, not about who has the house or the money.</a:t>
-            </a:r>
-          </a:p>
-          <a:p>
-            <a:pPr algn="l">
-              <a:spcAft>
-                <a:spcPts val="585"/>
-              </a:spcAft>
-            </a:pPr>
-            <a:r>
-              <a:rPr sz="1300" b="0" i="0">
-                <a:solidFill>
-                  <a:srgbClr val="1C1B19"/>
-                </a:solidFill>
-                <a:latin typeface="Source Serif 4"/>
-              </a:rPr>
-              <a:t/>
+              <a:t>The guess (3), four stops (6), Theo's Friday, stops 3 and 4 only (7), signs and the call (4). Share the take-home link so students get the rest.</a:t>
             </a:r>
           </a:p>
         </p:txBody>
@@ -6582,7 +6893,7 @@
                 </a:solidFill>
                 <a:latin typeface="Inter Tight"/>
               </a:rPr>
-              <a:t>TEACHER PAGE  ·  skipped when you present  ·  Background</a:t>
+              <a:t>TEACHER PAGE  ·  skipped when you present  ·  Before you teach</a:t>
             </a:r>
           </a:p>
         </p:txBody>
@@ -6621,7 +6932,7 @@
                 </a:solidFill>
                 <a:latin typeface="Source Serif 4"/>
               </a:rPr>
-              <a:t>What the research says</a:t>
+              <a:t>Before you teach</a:t>
             </a:r>
           </a:p>
         </p:txBody>
@@ -6654,13 +6965,29 @@
               </a:spcAft>
             </a:pPr>
             <a:r>
+              <a:rPr sz="1500" b="1" i="0">
+                <a:solidFill>
+                  <a:srgbClr val="1C1B19"/>
+                </a:solidFill>
+                <a:latin typeface="Source Serif 4"/>
+              </a:rPr>
+              <a:t>Assume every kind of home is in the room.</a:t>
+            </a:r>
+          </a:p>
+          <a:p>
+            <a:pPr algn="l">
+              <a:spcAft>
+                <a:spcPts val="585"/>
+              </a:spcAft>
+            </a:pPr>
+            <a:r>
               <a:rPr sz="1300" b="0" i="0">
                 <a:solidFill>
                   <a:srgbClr val="1C1B19"/>
                 </a:solidFill>
                 <a:latin typeface="Source Serif 4"/>
               </a:rPr>
-              <a:t>76% of U.S. 10th graders and 59% of 12th graders didn't drink at all in the past year. Teen drinking is near the lowest level the survey has recorded.</a:t>
+              <a:t>Students who never drink, students who drink at parties, students whose family serves wine at holidays, students whose faith forbids it, and students living with an adult who drinks heavily. Talk to all of them. No show of hands about anyone's drinking.</a:t>
             </a:r>
           </a:p>
           <a:p>
@@ -6670,13 +6997,13 @@
               </a:spcAft>
             </a:pPr>
             <a:r>
-              <a:rPr sz="1050" b="0" i="0">
-                <a:solidFill>
-                  <a:srgbClr val="5D5A54"/>
-                </a:solidFill>
-                <a:latin typeface="Inter Tight"/>
-              </a:rPr>
-              <a:t>Monitoring the Future, 2025</a:t>
+              <a:rPr sz="1300" b="0" i="0">
+                <a:solidFill>
+                  <a:srgbClr val="1C1B19"/>
+                </a:solidFill>
+                <a:latin typeface="Source Serif 4"/>
+              </a:rPr>
+              <a:t/>
             </a:r>
           </a:p>
           <a:p>
@@ -6686,13 +7013,29 @@
               </a:spcAft>
             </a:pPr>
             <a:r>
+              <a:rPr sz="1500" b="1" i="0">
+                <a:solidFill>
+                  <a:srgbClr val="1C1B19"/>
+                </a:solidFill>
+                <a:latin typeface="Source Serif 4"/>
+              </a:rPr>
+              <a:t>Lead with the numbers.</a:t>
+            </a:r>
+          </a:p>
+          <a:p>
+            <a:pPr algn="l">
+              <a:spcAft>
+                <a:spcPts val="585"/>
+              </a:spcAft>
+            </a:pPr>
+            <a:r>
               <a:rPr sz="1300" b="0" i="0">
                 <a:solidFill>
                   <a:srgbClr val="1C1B19"/>
                 </a:solidFill>
                 <a:latin typeface="Source Serif 4"/>
               </a:rPr>
-              <a:t>Teens feel fewer of alcohol's sedating, wobbly effects than adults do, so they get fewer natural stop signals.</a:t>
+              <a:t>Most of their grade isn't drinking. Teens overestimate how many peers drink, and that guess shapes what they do. Saying the real number out loud does real work.</a:t>
             </a:r>
           </a:p>
           <a:p>
@@ -6702,13 +7045,13 @@
               </a:spcAft>
             </a:pPr>
             <a:r>
-              <a:rPr sz="1050" b="0" i="0">
-                <a:solidFill>
-                  <a:srgbClr val="5D5A54"/>
-                </a:solidFill>
-                <a:latin typeface="Inter Tight"/>
-              </a:rPr>
-              <a:t>Spear, Nature Reviews Neuroscience, 2018</a:t>
+              <a:rPr sz="1300" b="0" i="0">
+                <a:solidFill>
+                  <a:srgbClr val="1C1B19"/>
+                </a:solidFill>
+                <a:latin typeface="Source Serif 4"/>
+              </a:rPr>
+              <a:t/>
             </a:r>
           </a:p>
           <a:p>
@@ -6718,13 +7061,29 @@
               </a:spcAft>
             </a:pPr>
             <a:r>
+              <a:rPr sz="1500" b="1" i="0">
+                <a:solidFill>
+                  <a:srgbClr val="1C1B19"/>
+                </a:solidFill>
+                <a:latin typeface="Source Serif 4"/>
+              </a:rPr>
+              <a:t>Make the 911 message impossible to miss.</a:t>
+            </a:r>
+          </a:p>
+          <a:p>
+            <a:pPr algn="l">
+              <a:spcAft>
+                <a:spcPts val="585"/>
+              </a:spcAft>
+            </a:pPr>
+            <a:r>
               <a:rPr sz="1300" b="0" i="0">
                 <a:solidFill>
                   <a:srgbClr val="1C1B19"/>
                 </a:solidFill>
                 <a:latin typeface="Source Serif 4"/>
               </a:rPr>
-              <a:t>134 young people were scanned repeatedly between ages 12 and 24. Those who became heavy drinkers lost gray matter faster in frontal and temporal areas. This shows a link, not proof of cause.</a:t>
+              <a:t>If someone can't be woken, is breathing slowly or with long pauses, or is vomiting while passed out, the answer is 911. Say it more than once. Fear of getting in trouble is the main reason people wait.</a:t>
             </a:r>
           </a:p>
           <a:p>
@@ -6734,45 +7093,13 @@
               </a:spcAft>
             </a:pPr>
             <a:r>
-              <a:rPr sz="1050" b="0" i="0">
-                <a:solidFill>
-                  <a:srgbClr val="5D5A54"/>
-                </a:solidFill>
-                <a:latin typeface="Inter Tight"/>
-              </a:rPr>
-              <a:t>Squeglia et al., American Journal of Psychiatry, 2015</a:t>
-            </a:r>
-          </a:p>
-          <a:p>
-            <a:pPr algn="l">
-              <a:spcAft>
-                <a:spcPts val="585"/>
-              </a:spcAft>
-            </a:pPr>
-            <a:r>
               <a:rPr sz="1300" b="0" i="0">
                 <a:solidFill>
                   <a:srgbClr val="1C1B19"/>
                 </a:solidFill>
                 <a:latin typeface="Source Serif 4"/>
               </a:rPr>
-              <a:t>483 teens scanned before they ever drank showed the same frontal pattern after heavy drinking began.</a:t>
-            </a:r>
-          </a:p>
-          <a:p>
-            <a:pPr algn="l">
-              <a:spcAft>
-                <a:spcPts val="585"/>
-              </a:spcAft>
-            </a:pPr>
-            <a:r>
-              <a:rPr sz="1050" b="0" i="0">
-                <a:solidFill>
-                  <a:srgbClr val="5D5A54"/>
-                </a:solidFill>
-                <a:latin typeface="Inter Tight"/>
-              </a:rPr>
-              <a:t>Pfefferbaum et al., American Journal of Psychiatry, 2018</a:t>
+              <a:t/>
             </a:r>
           </a:p>
         </p:txBody>
@@ -6805,12 +7132,976 @@
               </a:spcAft>
             </a:pPr>
             <a:r>
+              <a:rPr sz="1500" b="1" i="0">
+                <a:solidFill>
+                  <a:srgbClr val="1C1B19"/>
+                </a:solidFill>
+                <a:latin typeface="Source Serif 4"/>
+              </a:rPr>
+              <a:t>Be honest about the law.</a:t>
+            </a:r>
+          </a:p>
+          <a:p>
+            <a:pPr algn="l">
+              <a:spcAft>
+                <a:spcPts val="585"/>
+              </a:spcAft>
+            </a:pPr>
+            <a:r>
               <a:rPr sz="1300" b="0" i="0">
                 <a:solidFill>
                   <a:srgbClr val="1C1B19"/>
                 </a:solidFill>
                 <a:latin typeface="Source Serif 4"/>
               </a:rPr>
+              <a:t>Massachusetts' Good Samaritan law covers drug overdose calls and doesn't specifically cover underage drinking. Don't promise students immunity. Tell them to call anyway, because trouble is temporary.</a:t>
+            </a:r>
+          </a:p>
+          <a:p>
+            <a:pPr algn="l">
+              <a:spcAft>
+                <a:spcPts val="585"/>
+              </a:spcAft>
+            </a:pPr>
+            <a:r>
+              <a:rPr sz="1300" b="0" i="0">
+                <a:solidFill>
+                  <a:srgbClr val="1C1B19"/>
+                </a:solidFill>
+                <a:latin typeface="Source Serif 4"/>
+              </a:rPr>
+              <a:t/>
+            </a:r>
+          </a:p>
+          <a:p>
+            <a:pPr algn="l">
+              <a:spcAft>
+                <a:spcPts val="585"/>
+              </a:spcAft>
+            </a:pPr>
+            <a:r>
+              <a:rPr sz="1500" b="1" i="0">
+                <a:solidFill>
+                  <a:srgbClr val="1C1B19"/>
+                </a:solidFill>
+                <a:latin typeface="Source Serif 4"/>
+              </a:rPr>
+              <a:t>If a student mentions drinking at home.</a:t>
+            </a:r>
+          </a:p>
+          <a:p>
+            <a:pPr algn="l">
+              <a:spcAft>
+                <a:spcPts val="585"/>
+              </a:spcAft>
+            </a:pPr>
+            <a:r>
+              <a:rPr sz="1300" b="0" i="0">
+                <a:solidFill>
+                  <a:srgbClr val="1C1B19"/>
+                </a:solidFill>
+                <a:latin typeface="Source Serif 4"/>
+              </a:rPr>
+              <a:t>Some students are worried about a parent. Thank them quietly, don't probe in front of the class, and walk them to a counselor that day.</a:t>
+            </a:r>
+          </a:p>
+          <a:p>
+            <a:pPr algn="l">
+              <a:spcAft>
+                <a:spcPts val="585"/>
+              </a:spcAft>
+            </a:pPr>
+            <a:r>
+              <a:rPr sz="1300" b="0" i="0">
+                <a:solidFill>
+                  <a:srgbClr val="1C1B19"/>
+                </a:solidFill>
+                <a:latin typeface="Source Serif 4"/>
+              </a:rPr>
+              <a:t/>
+            </a:r>
+          </a:p>
+          <a:p>
+            <a:pPr algn="l">
+              <a:spcAft>
+                <a:spcPts val="585"/>
+              </a:spcAft>
+            </a:pPr>
+            <a:r>
+              <a:rPr sz="1500" b="1" i="0">
+                <a:solidFill>
+                  <a:srgbClr val="1C1B19"/>
+                </a:solidFill>
+                <a:latin typeface="Source Serif 4"/>
+              </a:rPr>
+              <a:t>If a student says they black out.</a:t>
+            </a:r>
+          </a:p>
+          <a:p>
+            <a:pPr algn="l">
+              <a:spcAft>
+                <a:spcPts val="585"/>
+              </a:spcAft>
+            </a:pPr>
+            <a:r>
+              <a:rPr sz="1300" b="0" i="0">
+                <a:solidFill>
+                  <a:srgbClr val="1C1B19"/>
+                </a:solidFill>
+                <a:latin typeface="Source Serif 4"/>
+              </a:rPr>
+              <a:t>Stay calm and private. Blackouts mean a lot of alcohol, fast. Tell them you're glad they said something and connect them with a counselor that day.</a:t>
+            </a:r>
+          </a:p>
+          <a:p>
+            <a:pPr algn="l">
+              <a:spcAft>
+                <a:spcPts val="585"/>
+              </a:spcAft>
+            </a:pPr>
+            <a:r>
+              <a:rPr sz="1300" b="0" i="0">
+                <a:solidFill>
+                  <a:srgbClr val="1C1B19"/>
+                </a:solidFill>
+                <a:latin typeface="Source Serif 4"/>
+              </a:rPr>
+              <a:t/>
+            </a:r>
+          </a:p>
+        </p:txBody>
+      </p:sp>
+    </p:spTree>
+  </p:cSld>
+  <p:clrMapOvr>
+    <a:masterClrMapping/>
+  </p:clrMapOvr>
+</p:sld>
+</file>
+
+<file path=ppt/slides/slide15.xml><?xml version="1.0" encoding="utf-8"?>
+<p:sld xmlns:a="http://schemas.openxmlformats.org/drawingml/2006/main" xmlns:p="http://schemas.openxmlformats.org/presentationml/2006/main" xmlns:r="http://schemas.openxmlformats.org/officeDocument/2006/relationships" show="0">
+  <p:cSld>
+    <p:bg>
+      <p:bgPr>
+        <a:solidFill>
+          <a:srgbClr val="EEEBE4"/>
+        </a:solidFill>
+        <a:effectLst/>
+      </p:bgPr>
+    </p:bg>
+    <p:spTree>
+      <p:nvGrpSpPr>
+        <p:cNvPr id="1" name=""/>
+        <p:cNvGrpSpPr/>
+        <p:nvPr/>
+      </p:nvGrpSpPr>
+      <p:grpSpPr/>
+      <p:sp>
+        <p:nvSpPr>
+          <p:cNvPr id="2" name="Rectangle 1"/>
+          <p:cNvSpPr/>
+          <p:nvPr/>
+        </p:nvSpPr>
+        <p:spPr>
+          <a:xfrm>
+            <a:off x="0" y="0"/>
+            <a:ext cx="12191695" cy="384048"/>
+          </a:xfrm>
+          <a:prstGeom prst="rect">
+            <a:avLst/>
+          </a:prstGeom>
+          <a:solidFill>
+            <a:srgbClr val="0B2D5B"/>
+          </a:solidFill>
+          <a:ln>
+            <a:noFill/>
+          </a:ln>
+          <a:effectLst/>
+        </p:spPr>
+        <p:style>
+          <a:lnRef idx="1">
+            <a:schemeClr val="accent1"/>
+          </a:lnRef>
+          <a:fillRef idx="3">
+            <a:schemeClr val="accent1"/>
+          </a:fillRef>
+          <a:effectRef idx="2">
+            <a:schemeClr val="accent1"/>
+          </a:effectRef>
+          <a:fontRef idx="minor">
+            <a:schemeClr val="lt1"/>
+          </a:fontRef>
+        </p:style>
+        <p:txBody>
+          <a:bodyPr rtlCol="0" anchor="ctr"/>
+          <a:lstStyle/>
+          <a:p>
+            <a:pPr algn="ctr"/>
+          </a:p>
+        </p:txBody>
+      </p:sp>
+      <p:sp>
+        <p:nvSpPr>
+          <p:cNvPr id="3" name="TextBox 2"/>
+          <p:cNvSpPr txBox="1"/>
+          <p:nvPr/>
+        </p:nvSpPr>
+        <p:spPr>
+          <a:xfrm>
+            <a:off x="548640" y="100584"/>
+            <a:ext cx="10972800" cy="274320"/>
+          </a:xfrm>
+          <a:prstGeom prst="rect">
+            <a:avLst/>
+          </a:prstGeom>
+          <a:noFill/>
+        </p:spPr>
+        <p:txBody>
+          <a:bodyPr wrap="square" anchor="t" lIns="0" rIns="0" tIns="0" bIns="0">
+            <a:spAutoFit/>
+          </a:bodyPr>
+          <a:lstStyle/>
+          <a:p>
+            <a:pPr algn="l">
+              <a:spcAft>
+                <a:spcPts val="495"/>
+              </a:spcAft>
+            </a:pPr>
+            <a:r>
+              <a:rPr sz="1100" b="1" i="0">
+                <a:solidFill>
+                  <a:srgbClr val="FFFFFF"/>
+                </a:solidFill>
+                <a:latin typeface="Inter Tight"/>
+              </a:rPr>
+              <a:t>TEACHER PAGE  ·  skipped when you present  ·  Every student in the room</a:t>
+            </a:r>
+          </a:p>
+        </p:txBody>
+      </p:sp>
+      <p:sp>
+        <p:nvSpPr>
+          <p:cNvPr id="4" name="TextBox 3"/>
+          <p:cNvSpPr txBox="1"/>
+          <p:nvPr/>
+        </p:nvSpPr>
+        <p:spPr>
+          <a:xfrm>
+            <a:off x="548640" y="685800"/>
+            <a:ext cx="10972800" cy="640080"/>
+          </a:xfrm>
+          <a:prstGeom prst="rect">
+            <a:avLst/>
+          </a:prstGeom>
+          <a:noFill/>
+        </p:spPr>
+        <p:txBody>
+          <a:bodyPr wrap="square" anchor="t" lIns="0" rIns="0" tIns="0" bIns="0">
+            <a:spAutoFit/>
+          </a:bodyPr>
+          <a:lstStyle/>
+          <a:p>
+            <a:pPr algn="l">
+              <a:spcAft>
+                <a:spcPts val="1350"/>
+              </a:spcAft>
+            </a:pPr>
+            <a:r>
+              <a:rPr sz="3000" b="1" i="0">
+                <a:solidFill>
+                  <a:srgbClr val="1C1B19"/>
+                </a:solidFill>
+                <a:latin typeface="Source Serif 4"/>
+              </a:rPr>
+              <a:t>Every student in the room</a:t>
+            </a:r>
+          </a:p>
+        </p:txBody>
+      </p:sp>
+      <p:sp>
+        <p:nvSpPr>
+          <p:cNvPr id="5" name="TextBox 4"/>
+          <p:cNvSpPr txBox="1"/>
+          <p:nvPr/>
+        </p:nvSpPr>
+        <p:spPr>
+          <a:xfrm>
+            <a:off x="548640" y="1325880"/>
+            <a:ext cx="10972800" cy="365760"/>
+          </a:xfrm>
+          <a:prstGeom prst="rect">
+            <a:avLst/>
+          </a:prstGeom>
+          <a:noFill/>
+        </p:spPr>
+        <p:txBody>
+          <a:bodyPr wrap="square" anchor="t" lIns="0" rIns="0" tIns="0" bIns="0">
+            <a:spAutoFit/>
+          </a:bodyPr>
+          <a:lstStyle/>
+          <a:p>
+            <a:pPr algn="l">
+              <a:spcAft>
+                <a:spcPts val="630"/>
+              </a:spcAft>
+            </a:pPr>
+            <a:r>
+              <a:rPr sz="1400" b="0" i="0">
+                <a:solidFill>
+                  <a:srgbClr val="5D5A54"/>
+                </a:solidFill>
+                <a:latin typeface="Inter Tight"/>
+              </a:rPr>
+              <a:t>Culture, family, identity, ability and money: what to keep in mind for this topic.</a:t>
+            </a:r>
+          </a:p>
+        </p:txBody>
+      </p:sp>
+      <p:sp>
+        <p:nvSpPr>
+          <p:cNvPr id="6" name="TextBox 5"/>
+          <p:cNvSpPr txBox="1"/>
+          <p:nvPr/>
+        </p:nvSpPr>
+        <p:spPr>
+          <a:xfrm>
+            <a:off x="548640" y="1828800"/>
+            <a:ext cx="5394960" cy="4572000"/>
+          </a:xfrm>
+          <a:prstGeom prst="rect">
+            <a:avLst/>
+          </a:prstGeom>
+          <a:noFill/>
+        </p:spPr>
+        <p:txBody>
+          <a:bodyPr wrap="square" anchor="t" lIns="0" rIns="0" tIns="0" bIns="0">
+            <a:spAutoFit/>
+          </a:bodyPr>
+          <a:lstStyle/>
+          <a:p>
+            <a:pPr algn="l">
+              <a:spcAft>
+                <a:spcPts val="585"/>
+              </a:spcAft>
+            </a:pPr>
+            <a:r>
+              <a:rPr sz="1500" b="1" i="0">
+                <a:solidFill>
+                  <a:srgbClr val="1C1B19"/>
+                </a:solidFill>
+                <a:latin typeface="Source Serif 4"/>
+              </a:rPr>
+              <a:t>Faith and culture.</a:t>
+            </a:r>
+          </a:p>
+          <a:p>
+            <a:pPr algn="l">
+              <a:spcAft>
+                <a:spcPts val="585"/>
+              </a:spcAft>
+            </a:pPr>
+            <a:r>
+              <a:rPr sz="1300" b="0" i="0">
+                <a:solidFill>
+                  <a:srgbClr val="1C1B19"/>
+                </a:solidFill>
+                <a:latin typeface="Source Serif 4"/>
+              </a:rPr>
+              <a:t>For some students alcohol is forbidden; for others wine is part of a holiday table. Present facts about the brain and leave the values to the student and their family.</a:t>
+            </a:r>
+          </a:p>
+          <a:p>
+            <a:pPr algn="l">
+              <a:spcAft>
+                <a:spcPts val="585"/>
+              </a:spcAft>
+            </a:pPr>
+            <a:r>
+              <a:rPr sz="1300" b="0" i="0">
+                <a:solidFill>
+                  <a:srgbClr val="1C1B19"/>
+                </a:solidFill>
+                <a:latin typeface="Source Serif 4"/>
+              </a:rPr>
+              <a:t/>
+            </a:r>
+          </a:p>
+          <a:p>
+            <a:pPr algn="l">
+              <a:spcAft>
+                <a:spcPts val="585"/>
+              </a:spcAft>
+            </a:pPr>
+            <a:r>
+              <a:rPr sz="1500" b="1" i="0">
+                <a:solidFill>
+                  <a:srgbClr val="1C1B19"/>
+                </a:solidFill>
+                <a:latin typeface="Source Serif 4"/>
+              </a:rPr>
+              <a:t>Family drinking.</a:t>
+            </a:r>
+          </a:p>
+          <a:p>
+            <a:pPr algn="l">
+              <a:spcAft>
+                <a:spcPts val="585"/>
+              </a:spcAft>
+            </a:pPr>
+            <a:r>
+              <a:rPr sz="1300" b="0" i="0">
+                <a:solidFill>
+                  <a:srgbClr val="1C1B19"/>
+                </a:solidFill>
+                <a:latin typeface="Source Serif 4"/>
+              </a:rPr>
+              <a:t>"Parent" can mean a grandparent, aunt, foster parent or older sibling, and some of those adults drink too much. Never make a drinking parent sound foolish. A student may be protecting them.</a:t>
+            </a:r>
+          </a:p>
+          <a:p>
+            <a:pPr algn="l">
+              <a:spcAft>
+                <a:spcPts val="585"/>
+              </a:spcAft>
+            </a:pPr>
+            <a:r>
+              <a:rPr sz="1300" b="0" i="0">
+                <a:solidFill>
+                  <a:srgbClr val="1C1B19"/>
+                </a:solidFill>
+                <a:latin typeface="Source Serif 4"/>
+              </a:rPr>
+              <a:t/>
+            </a:r>
+          </a:p>
+          <a:p>
+            <a:pPr algn="l">
+              <a:spcAft>
+                <a:spcPts val="585"/>
+              </a:spcAft>
+            </a:pPr>
+            <a:r>
+              <a:rPr sz="1500" b="1" i="0">
+                <a:solidFill>
+                  <a:srgbClr val="1C1B19"/>
+                </a:solidFill>
+                <a:latin typeface="Source Serif 4"/>
+              </a:rPr>
+              <a:t>Who they call.</a:t>
+            </a:r>
+          </a:p>
+          <a:p>
+            <a:pPr algn="l">
+              <a:spcAft>
+                <a:spcPts val="585"/>
+              </a:spcAft>
+            </a:pPr>
+            <a:r>
+              <a:rPr sz="1300" b="0" i="0">
+                <a:solidFill>
+                  <a:srgbClr val="1C1B19"/>
+                </a:solidFill>
+                <a:latin typeface="Source Serif 4"/>
+              </a:rPr>
+              <a:t>The exit-plan person might be a parent, an older sibling, a cousin or a family friend. Some families will pick up with no questions; some won't. Let students choose their own person.</a:t>
+            </a:r>
+          </a:p>
+          <a:p>
+            <a:pPr algn="l">
+              <a:spcAft>
+                <a:spcPts val="585"/>
+              </a:spcAft>
+            </a:pPr>
+            <a:r>
+              <a:rPr sz="1300" b="0" i="0">
+                <a:solidFill>
+                  <a:srgbClr val="1C1B19"/>
+                </a:solidFill>
+                <a:latin typeface="Source Serif 4"/>
+              </a:rPr>
+              <a:t/>
+            </a:r>
+          </a:p>
+        </p:txBody>
+      </p:sp>
+      <p:sp>
+        <p:nvSpPr>
+          <p:cNvPr id="7" name="TextBox 6"/>
+          <p:cNvSpPr txBox="1"/>
+          <p:nvPr/>
+        </p:nvSpPr>
+        <p:spPr>
+          <a:xfrm>
+            <a:off x="6217920" y="1828800"/>
+            <a:ext cx="5394960" cy="4572000"/>
+          </a:xfrm>
+          <a:prstGeom prst="rect">
+            <a:avLst/>
+          </a:prstGeom>
+          <a:noFill/>
+        </p:spPr>
+        <p:txBody>
+          <a:bodyPr wrap="square" anchor="t" lIns="0" rIns="0" tIns="0" bIns="0">
+            <a:spAutoFit/>
+          </a:bodyPr>
+          <a:lstStyle/>
+          <a:p>
+            <a:pPr algn="l">
+              <a:spcAft>
+                <a:spcPts val="585"/>
+              </a:spcAft>
+            </a:pPr>
+            <a:r>
+              <a:rPr sz="1500" b="1" i="0">
+                <a:solidFill>
+                  <a:srgbClr val="1C1B19"/>
+                </a:solidFill>
+                <a:latin typeface="Source Serif 4"/>
+              </a:rPr>
+              <a:t>Fear of police.</a:t>
+            </a:r>
+          </a:p>
+          <a:p>
+            <a:pPr algn="l">
+              <a:spcAft>
+                <a:spcPts val="585"/>
+              </a:spcAft>
+            </a:pPr>
+            <a:r>
+              <a:rPr sz="1300" b="0" i="0">
+                <a:solidFill>
+                  <a:srgbClr val="1C1B19"/>
+                </a:solidFill>
+                <a:latin typeface="Source Serif 4"/>
+              </a:rPr>
+              <a:t>For some students, calling 911 brings real worries about immigration status or how police treat their community. Name that calmly. For a medical emergency like alcohol poisoning, 911 is still the call.</a:t>
+            </a:r>
+          </a:p>
+          <a:p>
+            <a:pPr algn="l">
+              <a:spcAft>
+                <a:spcPts val="585"/>
+              </a:spcAft>
+            </a:pPr>
+            <a:r>
+              <a:rPr sz="1300" b="0" i="0">
+                <a:solidFill>
+                  <a:srgbClr val="1C1B19"/>
+                </a:solidFill>
+                <a:latin typeface="Source Serif 4"/>
+              </a:rPr>
+              <a:t/>
+            </a:r>
+          </a:p>
+          <a:p>
+            <a:pPr algn="l">
+              <a:spcAft>
+                <a:spcPts val="585"/>
+              </a:spcAft>
+            </a:pPr>
+            <a:r>
+              <a:rPr sz="1500" b="1" i="0">
+                <a:solidFill>
+                  <a:srgbClr val="1C1B19"/>
+                </a:solidFill>
+                <a:latin typeface="Source Serif 4"/>
+              </a:rPr>
+              <a:t>Mixed examples.</a:t>
+            </a:r>
+          </a:p>
+          <a:p>
+            <a:pPr algn="l">
+              <a:spcAft>
+                <a:spcPts val="585"/>
+              </a:spcAft>
+            </a:pPr>
+            <a:r>
+              <a:rPr sz="1300" b="0" i="0">
+                <a:solidFill>
+                  <a:srgbClr val="1C1B19"/>
+                </a:solidFill>
+                <a:latin typeface="Source Serif 4"/>
+              </a:rPr>
+              <a:t>Use names and situations from many backgrounds, and include LGBTQ+ students in the party stories without making identity the reason anyone drinks.</a:t>
+            </a:r>
+          </a:p>
+          <a:p>
+            <a:pPr algn="l">
+              <a:spcAft>
+                <a:spcPts val="585"/>
+              </a:spcAft>
+            </a:pPr>
+            <a:r>
+              <a:rPr sz="1300" b="0" i="0">
+                <a:solidFill>
+                  <a:srgbClr val="1C1B19"/>
+                </a:solidFill>
+                <a:latin typeface="Source Serif 4"/>
+              </a:rPr>
+              <a:t/>
+            </a:r>
+          </a:p>
+          <a:p>
+            <a:pPr algn="l">
+              <a:spcAft>
+                <a:spcPts val="585"/>
+              </a:spcAft>
+            </a:pPr>
+            <a:r>
+              <a:rPr sz="1500" b="1" i="0">
+                <a:solidFill>
+                  <a:srgbClr val="1C1B19"/>
+                </a:solidFill>
+                <a:latin typeface="Source Serif 4"/>
+              </a:rPr>
+              <a:t>Money and parties.</a:t>
+            </a:r>
+          </a:p>
+          <a:p>
+            <a:pPr algn="l">
+              <a:spcAft>
+                <a:spcPts val="585"/>
+              </a:spcAft>
+            </a:pPr>
+            <a:r>
+              <a:rPr sz="1300" b="0" i="0">
+                <a:solidFill>
+                  <a:srgbClr val="1C1B19"/>
+                </a:solidFill>
+                <a:latin typeface="Source Serif 4"/>
+              </a:rPr>
+              <a:t>Some students hang out in basements where a parent buys or allows the drinks; others never get invited anywhere. Keep the scenarios about choices, not about who has the house or the money.</a:t>
+            </a:r>
+          </a:p>
+          <a:p>
+            <a:pPr algn="l">
+              <a:spcAft>
+                <a:spcPts val="585"/>
+              </a:spcAft>
+            </a:pPr>
+            <a:r>
+              <a:rPr sz="1300" b="0" i="0">
+                <a:solidFill>
+                  <a:srgbClr val="1C1B19"/>
+                </a:solidFill>
+                <a:latin typeface="Source Serif 4"/>
+              </a:rPr>
+              <a:t/>
+            </a:r>
+          </a:p>
+        </p:txBody>
+      </p:sp>
+    </p:spTree>
+  </p:cSld>
+  <p:clrMapOvr>
+    <a:masterClrMapping/>
+  </p:clrMapOvr>
+</p:sld>
+</file>
+
+<file path=ppt/slides/slide16.xml><?xml version="1.0" encoding="utf-8"?>
+<p:sld xmlns:a="http://schemas.openxmlformats.org/drawingml/2006/main" xmlns:p="http://schemas.openxmlformats.org/presentationml/2006/main" xmlns:r="http://schemas.openxmlformats.org/officeDocument/2006/relationships" show="0">
+  <p:cSld>
+    <p:bg>
+      <p:bgPr>
+        <a:solidFill>
+          <a:srgbClr val="EEEBE4"/>
+        </a:solidFill>
+        <a:effectLst/>
+      </p:bgPr>
+    </p:bg>
+    <p:spTree>
+      <p:nvGrpSpPr>
+        <p:cNvPr id="1" name=""/>
+        <p:cNvGrpSpPr/>
+        <p:nvPr/>
+      </p:nvGrpSpPr>
+      <p:grpSpPr/>
+      <p:sp>
+        <p:nvSpPr>
+          <p:cNvPr id="2" name="Rectangle 1"/>
+          <p:cNvSpPr/>
+          <p:nvPr/>
+        </p:nvSpPr>
+        <p:spPr>
+          <a:xfrm>
+            <a:off x="0" y="0"/>
+            <a:ext cx="12191695" cy="384048"/>
+          </a:xfrm>
+          <a:prstGeom prst="rect">
+            <a:avLst/>
+          </a:prstGeom>
+          <a:solidFill>
+            <a:srgbClr val="0B2D5B"/>
+          </a:solidFill>
+          <a:ln>
+            <a:noFill/>
+          </a:ln>
+          <a:effectLst/>
+        </p:spPr>
+        <p:style>
+          <a:lnRef idx="1">
+            <a:schemeClr val="accent1"/>
+          </a:lnRef>
+          <a:fillRef idx="3">
+            <a:schemeClr val="accent1"/>
+          </a:fillRef>
+          <a:effectRef idx="2">
+            <a:schemeClr val="accent1"/>
+          </a:effectRef>
+          <a:fontRef idx="minor">
+            <a:schemeClr val="lt1"/>
+          </a:fontRef>
+        </p:style>
+        <p:txBody>
+          <a:bodyPr rtlCol="0" anchor="ctr"/>
+          <a:lstStyle/>
+          <a:p>
+            <a:pPr algn="ctr"/>
+          </a:p>
+        </p:txBody>
+      </p:sp>
+      <p:sp>
+        <p:nvSpPr>
+          <p:cNvPr id="3" name="TextBox 2"/>
+          <p:cNvSpPr txBox="1"/>
+          <p:nvPr/>
+        </p:nvSpPr>
+        <p:spPr>
+          <a:xfrm>
+            <a:off x="548640" y="100584"/>
+            <a:ext cx="10972800" cy="274320"/>
+          </a:xfrm>
+          <a:prstGeom prst="rect">
+            <a:avLst/>
+          </a:prstGeom>
+          <a:noFill/>
+        </p:spPr>
+        <p:txBody>
+          <a:bodyPr wrap="square" anchor="t" lIns="0" rIns="0" tIns="0" bIns="0">
+            <a:spAutoFit/>
+          </a:bodyPr>
+          <a:lstStyle/>
+          <a:p>
+            <a:pPr algn="l">
+              <a:spcAft>
+                <a:spcPts val="495"/>
+              </a:spcAft>
+            </a:pPr>
+            <a:r>
+              <a:rPr sz="1100" b="1" i="0">
+                <a:solidFill>
+                  <a:srgbClr val="FFFFFF"/>
+                </a:solidFill>
+                <a:latin typeface="Inter Tight"/>
+              </a:rPr>
+              <a:t>TEACHER PAGE  ·  skipped when you present  ·  Background</a:t>
+            </a:r>
+          </a:p>
+        </p:txBody>
+      </p:sp>
+      <p:sp>
+        <p:nvSpPr>
+          <p:cNvPr id="4" name="TextBox 3"/>
+          <p:cNvSpPr txBox="1"/>
+          <p:nvPr/>
+        </p:nvSpPr>
+        <p:spPr>
+          <a:xfrm>
+            <a:off x="548640" y="685800"/>
+            <a:ext cx="10972800" cy="640080"/>
+          </a:xfrm>
+          <a:prstGeom prst="rect">
+            <a:avLst/>
+          </a:prstGeom>
+          <a:noFill/>
+        </p:spPr>
+        <p:txBody>
+          <a:bodyPr wrap="square" anchor="t" lIns="0" rIns="0" tIns="0" bIns="0">
+            <a:spAutoFit/>
+          </a:bodyPr>
+          <a:lstStyle/>
+          <a:p>
+            <a:pPr algn="l">
+              <a:spcAft>
+                <a:spcPts val="1350"/>
+              </a:spcAft>
+            </a:pPr>
+            <a:r>
+              <a:rPr sz="3000" b="1" i="0">
+                <a:solidFill>
+                  <a:srgbClr val="1C1B19"/>
+                </a:solidFill>
+                <a:latin typeface="Source Serif 4"/>
+              </a:rPr>
+              <a:t>What the research says</a:t>
+            </a:r>
+          </a:p>
+        </p:txBody>
+      </p:sp>
+      <p:sp>
+        <p:nvSpPr>
+          <p:cNvPr id="5" name="TextBox 4"/>
+          <p:cNvSpPr txBox="1"/>
+          <p:nvPr/>
+        </p:nvSpPr>
+        <p:spPr>
+          <a:xfrm>
+            <a:off x="548640" y="1463040"/>
+            <a:ext cx="5394960" cy="4937760"/>
+          </a:xfrm>
+          <a:prstGeom prst="rect">
+            <a:avLst/>
+          </a:prstGeom>
+          <a:noFill/>
+        </p:spPr>
+        <p:txBody>
+          <a:bodyPr wrap="square" anchor="t" lIns="0" rIns="0" tIns="0" bIns="0">
+            <a:spAutoFit/>
+          </a:bodyPr>
+          <a:lstStyle/>
+          <a:p>
+            <a:pPr algn="l">
+              <a:spcAft>
+                <a:spcPts val="585"/>
+              </a:spcAft>
+            </a:pPr>
+            <a:r>
+              <a:rPr sz="1300" b="0" i="0">
+                <a:solidFill>
+                  <a:srgbClr val="1C1B19"/>
+                </a:solidFill>
+                <a:latin typeface="Source Serif 4"/>
+              </a:rPr>
+              <a:t>76% of U.S. 10th graders and 59% of 12th graders didn't drink at all in the past year. Teen drinking is near the lowest level the survey has recorded.</a:t>
+            </a:r>
+          </a:p>
+          <a:p>
+            <a:pPr algn="l">
+              <a:spcAft>
+                <a:spcPts val="585"/>
+              </a:spcAft>
+            </a:pPr>
+            <a:r>
+              <a:rPr sz="1050" b="0" i="0">
+                <a:solidFill>
+                  <a:srgbClr val="5D5A54"/>
+                </a:solidFill>
+                <a:latin typeface="Inter Tight"/>
+              </a:rPr>
+              <a:t>Monitoring the Future, 2025</a:t>
+            </a:r>
+          </a:p>
+          <a:p>
+            <a:pPr algn="l">
+              <a:spcAft>
+                <a:spcPts val="585"/>
+              </a:spcAft>
+            </a:pPr>
+            <a:r>
+              <a:rPr sz="1300" b="0" i="0">
+                <a:solidFill>
+                  <a:srgbClr val="1C1B19"/>
+                </a:solidFill>
+                <a:latin typeface="Source Serif 4"/>
+              </a:rPr>
+              <a:t>Teens feel fewer of alcohol's sedating, wobbly effects than adults do, so they get fewer natural stop signals.</a:t>
+            </a:r>
+          </a:p>
+          <a:p>
+            <a:pPr algn="l">
+              <a:spcAft>
+                <a:spcPts val="585"/>
+              </a:spcAft>
+            </a:pPr>
+            <a:r>
+              <a:rPr sz="1050" b="0" i="0">
+                <a:solidFill>
+                  <a:srgbClr val="5D5A54"/>
+                </a:solidFill>
+                <a:latin typeface="Inter Tight"/>
+              </a:rPr>
+              <a:t>Spear, Nature Reviews Neuroscience, 2018</a:t>
+            </a:r>
+          </a:p>
+          <a:p>
+            <a:pPr algn="l">
+              <a:spcAft>
+                <a:spcPts val="585"/>
+              </a:spcAft>
+            </a:pPr>
+            <a:r>
+              <a:rPr sz="1300" b="0" i="0">
+                <a:solidFill>
+                  <a:srgbClr val="1C1B19"/>
+                </a:solidFill>
+                <a:latin typeface="Source Serif 4"/>
+              </a:rPr>
+              <a:t>134 young people were scanned repeatedly between ages 12 and 24. Those who became heavy drinkers lost gray matter faster in frontal and temporal areas. This shows a link, not proof of cause.</a:t>
+            </a:r>
+          </a:p>
+          <a:p>
+            <a:pPr algn="l">
+              <a:spcAft>
+                <a:spcPts val="585"/>
+              </a:spcAft>
+            </a:pPr>
+            <a:r>
+              <a:rPr sz="1050" b="0" i="0">
+                <a:solidFill>
+                  <a:srgbClr val="5D5A54"/>
+                </a:solidFill>
+                <a:latin typeface="Inter Tight"/>
+              </a:rPr>
+              <a:t>Squeglia et al., American Journal of Psychiatry, 2015</a:t>
+            </a:r>
+          </a:p>
+          <a:p>
+            <a:pPr algn="l">
+              <a:spcAft>
+                <a:spcPts val="585"/>
+              </a:spcAft>
+            </a:pPr>
+            <a:r>
+              <a:rPr sz="1300" b="0" i="0">
+                <a:solidFill>
+                  <a:srgbClr val="1C1B19"/>
+                </a:solidFill>
+                <a:latin typeface="Source Serif 4"/>
+              </a:rPr>
+              <a:t>483 teens scanned before they ever drank showed the same frontal pattern after heavy drinking began.</a:t>
+            </a:r>
+          </a:p>
+          <a:p>
+            <a:pPr algn="l">
+              <a:spcAft>
+                <a:spcPts val="585"/>
+              </a:spcAft>
+            </a:pPr>
+            <a:r>
+              <a:rPr sz="1050" b="0" i="0">
+                <a:solidFill>
+                  <a:srgbClr val="5D5A54"/>
+                </a:solidFill>
+                <a:latin typeface="Inter Tight"/>
+              </a:rPr>
+              <a:t>Pfefferbaum et al., American Journal of Psychiatry, 2018</a:t>
+            </a:r>
+          </a:p>
+          <a:p>
+            <a:pPr algn="l">
+              <a:spcAft>
+                <a:spcPts val="585"/>
+              </a:spcAft>
+            </a:pPr>
+            <a:r>
+              <a:rPr sz="1300" b="0" i="0">
+                <a:solidFill>
+                  <a:srgbClr val="1C1B19"/>
+                </a:solidFill>
+                <a:latin typeface="Source Serif 4"/>
+              </a:rPr>
               <a:t>51% of college students who drank reported at least one blackout.</a:t>
             </a:r>
           </a:p>
@@ -6830,6 +8121,29 @@
               <a:t>White et al., Journal of American College Health, 2002</a:t>
             </a:r>
           </a:p>
+        </p:txBody>
+      </p:sp>
+      <p:sp>
+        <p:nvSpPr>
+          <p:cNvPr id="6" name="TextBox 5"/>
+          <p:cNvSpPr txBox="1"/>
+          <p:nvPr/>
+        </p:nvSpPr>
+        <p:spPr>
+          <a:xfrm>
+            <a:off x="6217920" y="1463040"/>
+            <a:ext cx="5394960" cy="4937760"/>
+          </a:xfrm>
+          <a:prstGeom prst="rect">
+            <a:avLst/>
+          </a:prstGeom>
+          <a:noFill/>
+        </p:spPr>
+        <p:txBody>
+          <a:bodyPr wrap="square" anchor="t" lIns="0" rIns="0" tIns="0" bIns="0">
+            <a:spAutoFit/>
+          </a:bodyPr>
+          <a:lstStyle/>
           <a:p>
             <a:pPr algn="l">
               <a:spcAft>
@@ -6924,6 +8238,38 @@
                 <a:latin typeface="Inter Tight"/>
               </a:rPr>
               <a:t>Mattick et al., The Lancet Public Health, 2018</a:t>
+            </a:r>
+          </a:p>
+          <a:p>
+            <a:pPr algn="l">
+              <a:spcAft>
+                <a:spcPts val="585"/>
+              </a:spcAft>
+            </a:pPr>
+            <a:r>
+              <a:rPr sz="1300" b="0" i="0">
+                <a:solidFill>
+                  <a:srgbClr val="1C1B19"/>
+                </a:solidFill>
+                <a:latin typeface="Source Serif 4"/>
+              </a:rPr>
+              <a:t>In Massachusetts, an adult who supplies alcohol to, or knowingly allows drinking by, someone else's child under 21 on property they own or control can be fined up to $2,000, jailed up to a year, or both. Hosts can also be sued if a guest is hurt.</a:t>
+            </a:r>
+          </a:p>
+          <a:p>
+            <a:pPr algn="l">
+              <a:spcAft>
+                <a:spcPts val="585"/>
+              </a:spcAft>
+            </a:pPr>
+            <a:r>
+              <a:rPr sz="1050" b="0" i="0">
+                <a:solidFill>
+                  <a:srgbClr val="5D5A54"/>
+                </a:solidFill>
+                <a:latin typeface="Inter Tight"/>
+              </a:rPr>
+              <a:t>Massachusetts General Laws c.138 §34</a:t>
             </a:r>
           </a:p>
         </p:txBody>
@@ -7032,7 +8378,7 @@
                 </a:solidFill>
                 <a:latin typeface="Inter Tight"/>
               </a:rPr>
-              <a:t>ALCOHOL AND YOUR BRAIN</a:t>
+              <a:t>THE DRINKING GAME</a:t>
             </a:r>
           </a:p>
         </p:txBody>
@@ -7110,7 +8456,7 @@
                 </a:solidFill>
                 <a:latin typeface="Source Serif 4"/>
               </a:rPr>
-              <a:t>Alcohol and Your Brain</a:t>
+              <a:t>The Drinking Game</a:t>
             </a:r>
           </a:p>
         </p:txBody>
@@ -7149,7 +8495,7 @@
                 </a:solidFill>
                 <a:latin typeface="Source Serif 4"/>
               </a:rPr>
-              <a:t>What actually happens, in order, and what to do when a night goes wrong.</a:t>
+              <a:t>What alcohol actually does, how the night usually goes, and what to do when it goes wrong.</a:t>
             </a:r>
           </a:p>
         </p:txBody>
@@ -7189,6 +8535,45 @@
                 <a:latin typeface="Inter Tight"/>
               </a:rPr>
               <a:t>Beaver Upper School · Counseling</a:t>
+            </a:r>
+          </a:p>
+        </p:txBody>
+      </p:sp>
+      <p:sp>
+        <p:nvSpPr>
+          <p:cNvPr id="8" name="TextBox 7"/>
+          <p:cNvSpPr txBox="1"/>
+          <p:nvPr/>
+        </p:nvSpPr>
+        <p:spPr>
+          <a:xfrm>
+            <a:off x="6766560" y="5897880"/>
+            <a:ext cx="4846320" cy="640080"/>
+          </a:xfrm>
+          <a:prstGeom prst="rect">
+            <a:avLst/>
+          </a:prstGeom>
+          <a:noFill/>
+        </p:spPr>
+        <p:txBody>
+          <a:bodyPr wrap="square" anchor="t" lIns="0" rIns="0" tIns="0" bIns="0">
+            <a:spAutoFit/>
+          </a:bodyPr>
+          <a:lstStyle/>
+          <a:p>
+            <a:pPr algn="r">
+              <a:spcAft>
+                <a:spcPts val="495"/>
+              </a:spcAft>
+            </a:pPr>
+            <a:r>
+              <a:rPr sz="1100" b="0" i="0">
+                <a:solidFill>
+                  <a:srgbClr val="E8E4DA"/>
+                </a:solidFill>
+                <a:latin typeface="Inter Tight"/>
+              </a:rPr>
+              <a:t>Written by Dr. Rick Wilson, with AI-assisted drafting. Every lesson is reviewed and edited by Dr. Wilson.</a:t>
             </a:r>
           </a:p>
         </p:txBody>
@@ -7567,7 +8952,7 @@
                 </a:solidFill>
                 <a:latin typeface="Inter Tight"/>
               </a:rPr>
-              <a:t>FOUR STOPS</a:t>
+              <a:t>HONESTLY</a:t>
             </a:r>
           </a:p>
         </p:txBody>
@@ -7611,571 +8996,30 @@
           </a:p>
         </p:txBody>
       </p:sp>
-      <p:sp>
-        <p:nvSpPr>
-          <p:cNvPr id="5" name="TextBox 4"/>
-          <p:cNvSpPr txBox="1"/>
-          <p:nvPr/>
-        </p:nvSpPr>
-        <p:spPr>
-          <a:xfrm>
-            <a:off x="822960" y="1005840"/>
-            <a:ext cx="10515600" cy="914400"/>
-          </a:xfrm>
-          <a:prstGeom prst="rect">
-            <a:avLst/>
-          </a:prstGeom>
-          <a:noFill/>
-        </p:spPr>
-        <p:txBody>
-          <a:bodyPr wrap="square" anchor="t" lIns="0" rIns="0" tIns="0" bIns="0">
-            <a:spAutoFit/>
-          </a:bodyPr>
-          <a:lstStyle/>
-          <a:p>
-            <a:pPr algn="l">
-              <a:spcAft>
-                <a:spcPts val="1530"/>
-              </a:spcAft>
-            </a:pPr>
-            <a:r>
-              <a:rPr sz="3400" b="1" i="0">
-                <a:solidFill>
-                  <a:srgbClr val="1C1B19"/>
-                </a:solidFill>
-                <a:latin typeface="Source Serif 4"/>
-              </a:rPr>
-              <a:t>What alcohol slows, in order</a:t>
-            </a:r>
-          </a:p>
-        </p:txBody>
-      </p:sp>
-      <p:sp>
-        <p:nvSpPr>
-          <p:cNvPr id="6" name="Rectangle 5"/>
-          <p:cNvSpPr/>
-          <p:nvPr/>
-        </p:nvSpPr>
-        <p:spPr>
-          <a:xfrm>
-            <a:off x="822960" y="2743200"/>
-            <a:ext cx="1874519" cy="1005840"/>
-          </a:xfrm>
-          <a:prstGeom prst="rect">
-            <a:avLst/>
-          </a:prstGeom>
-          <a:solidFill>
-            <a:srgbClr val="FFFFFF"/>
-          </a:solidFill>
-          <a:ln w="15875">
-            <a:solidFill>
-              <a:srgbClr val="0B2D5B"/>
-            </a:solidFill>
-          </a:ln>
-          <a:effectLst/>
-        </p:spPr>
-        <p:style>
-          <a:lnRef idx="1">
-            <a:schemeClr val="accent1"/>
-          </a:lnRef>
-          <a:fillRef idx="3">
-            <a:schemeClr val="accent1"/>
-          </a:fillRef>
-          <a:effectRef idx="2">
-            <a:schemeClr val="accent1"/>
-          </a:effectRef>
-          <a:fontRef idx="minor">
-            <a:schemeClr val="lt1"/>
-          </a:fontRef>
-        </p:style>
-        <p:txBody>
-          <a:bodyPr rtlCol="0" anchor="ctr"/>
-          <a:lstStyle/>
-          <a:p>
-            <a:pPr algn="ctr"/>
-          </a:p>
-        </p:txBody>
-      </p:sp>
-      <p:sp>
-        <p:nvSpPr>
-          <p:cNvPr id="7" name="TextBox 6"/>
-          <p:cNvSpPr txBox="1"/>
-          <p:nvPr/>
-        </p:nvSpPr>
-        <p:spPr>
-          <a:xfrm>
-            <a:off x="822960" y="2743200"/>
-            <a:ext cx="1874519" cy="1005840"/>
-          </a:xfrm>
-          <a:prstGeom prst="rect">
-            <a:avLst/>
-          </a:prstGeom>
-          <a:noFill/>
-        </p:spPr>
-        <p:txBody>
-          <a:bodyPr wrap="square" anchor="ctr" lIns="0" rIns="0" tIns="0" bIns="0">
-            <a:spAutoFit/>
-          </a:bodyPr>
-          <a:lstStyle/>
-          <a:p>
-            <a:pPr algn="ctr">
-              <a:spcAft>
-                <a:spcPts val="900"/>
-              </a:spcAft>
-            </a:pPr>
-            <a:r>
-              <a:rPr sz="2000" b="1" i="0">
-                <a:solidFill>
-                  <a:srgbClr val="1C1B19"/>
-                </a:solidFill>
-                <a:latin typeface="Source Serif 4"/>
-              </a:rPr>
-              <a:t>Judgment</a:t>
-            </a:r>
-          </a:p>
-        </p:txBody>
-      </p:sp>
-      <p:cxnSp>
-        <p:nvCxnSpPr>
-          <p:cNvPr id="8" name="Connector 7"/>
-          <p:cNvCxnSpPr/>
-          <p:nvPr/>
-        </p:nvCxnSpPr>
-        <p:spPr>
-          <a:xfrm>
-            <a:off x="2752344" y="3246120"/>
-            <a:ext cx="896112" cy="0"/>
-          </a:xfrm>
-          <a:prstGeom prst="line">
-            <a:avLst/>
-          </a:prstGeom>
-          <a:ln w="31750">
-            <a:solidFill>
-              <a:srgbClr val="F47B20"/>
-            </a:solidFill>
-            <a:tailEnd type="triangle"/>
-          </a:ln>
-        </p:spPr>
-        <p:style>
-          <a:lnRef idx="2">
-            <a:schemeClr val="accent1"/>
-          </a:lnRef>
-          <a:fillRef idx="0">
-            <a:schemeClr val="accent1"/>
-          </a:fillRef>
-          <a:effectRef idx="1">
-            <a:schemeClr val="accent1"/>
-          </a:effectRef>
-          <a:fontRef idx="minor">
-            <a:schemeClr val="tx1"/>
-          </a:fontRef>
-        </p:style>
-      </p:cxnSp>
-      <p:sp>
-        <p:nvSpPr>
-          <p:cNvPr id="9" name="Rectangle 8"/>
-          <p:cNvSpPr/>
-          <p:nvPr/>
-        </p:nvSpPr>
-        <p:spPr>
-          <a:xfrm>
-            <a:off x="3703320" y="2743200"/>
-            <a:ext cx="1874519" cy="1005840"/>
-          </a:xfrm>
-          <a:prstGeom prst="rect">
-            <a:avLst/>
-          </a:prstGeom>
-          <a:solidFill>
-            <a:srgbClr val="FFFFFF"/>
-          </a:solidFill>
-          <a:ln w="15875">
-            <a:solidFill>
-              <a:srgbClr val="0B2D5B"/>
-            </a:solidFill>
-          </a:ln>
-          <a:effectLst/>
-        </p:spPr>
-        <p:style>
-          <a:lnRef idx="1">
-            <a:schemeClr val="accent1"/>
-          </a:lnRef>
-          <a:fillRef idx="3">
-            <a:schemeClr val="accent1"/>
-          </a:fillRef>
-          <a:effectRef idx="2">
-            <a:schemeClr val="accent1"/>
-          </a:effectRef>
-          <a:fontRef idx="minor">
-            <a:schemeClr val="lt1"/>
-          </a:fontRef>
-        </p:style>
-        <p:txBody>
-          <a:bodyPr rtlCol="0" anchor="ctr"/>
-          <a:lstStyle/>
-          <a:p>
-            <a:pPr algn="ctr"/>
-          </a:p>
-        </p:txBody>
-      </p:sp>
-      <p:sp>
-        <p:nvSpPr>
-          <p:cNvPr id="10" name="TextBox 9"/>
-          <p:cNvSpPr txBox="1"/>
-          <p:nvPr/>
-        </p:nvSpPr>
-        <p:spPr>
-          <a:xfrm>
-            <a:off x="3703320" y="2743200"/>
-            <a:ext cx="1874519" cy="1005840"/>
-          </a:xfrm>
-          <a:prstGeom prst="rect">
-            <a:avLst/>
-          </a:prstGeom>
-          <a:noFill/>
-        </p:spPr>
-        <p:txBody>
-          <a:bodyPr wrap="square" anchor="ctr" lIns="0" rIns="0" tIns="0" bIns="0">
-            <a:spAutoFit/>
-          </a:bodyPr>
-          <a:lstStyle/>
-          <a:p>
-            <a:pPr algn="ctr">
-              <a:spcAft>
-                <a:spcPts val="900"/>
-              </a:spcAft>
-            </a:pPr>
-            <a:r>
-              <a:rPr sz="2000" b="1" i="0">
-                <a:solidFill>
-                  <a:srgbClr val="1C1B19"/>
-                </a:solidFill>
-                <a:latin typeface="Source Serif 4"/>
-              </a:rPr>
-              <a:t>Memory</a:t>
-            </a:r>
-          </a:p>
-        </p:txBody>
-      </p:sp>
-      <p:cxnSp>
-        <p:nvCxnSpPr>
-          <p:cNvPr id="11" name="Connector 10"/>
-          <p:cNvCxnSpPr/>
-          <p:nvPr/>
-        </p:nvCxnSpPr>
-        <p:spPr>
-          <a:xfrm>
-            <a:off x="5632704" y="3246120"/>
-            <a:ext cx="896112" cy="0"/>
-          </a:xfrm>
-          <a:prstGeom prst="line">
-            <a:avLst/>
-          </a:prstGeom>
-          <a:ln w="31750">
-            <a:solidFill>
-              <a:srgbClr val="F47B20"/>
-            </a:solidFill>
-            <a:tailEnd type="triangle"/>
-          </a:ln>
-        </p:spPr>
-        <p:style>
-          <a:lnRef idx="2">
-            <a:schemeClr val="accent1"/>
-          </a:lnRef>
-          <a:fillRef idx="0">
-            <a:schemeClr val="accent1"/>
-          </a:fillRef>
-          <a:effectRef idx="1">
-            <a:schemeClr val="accent1"/>
-          </a:effectRef>
-          <a:fontRef idx="minor">
-            <a:schemeClr val="tx1"/>
-          </a:fontRef>
-        </p:style>
-      </p:cxnSp>
-      <p:sp>
-        <p:nvSpPr>
-          <p:cNvPr id="12" name="Rectangle 11"/>
-          <p:cNvSpPr/>
-          <p:nvPr/>
-        </p:nvSpPr>
-        <p:spPr>
-          <a:xfrm>
-            <a:off x="6583680" y="2743200"/>
-            <a:ext cx="1874519" cy="1005840"/>
-          </a:xfrm>
-          <a:prstGeom prst="rect">
-            <a:avLst/>
-          </a:prstGeom>
-          <a:solidFill>
-            <a:srgbClr val="FFFFFF"/>
-          </a:solidFill>
-          <a:ln w="15875">
-            <a:solidFill>
-              <a:srgbClr val="0B2D5B"/>
-            </a:solidFill>
-          </a:ln>
-          <a:effectLst/>
-        </p:spPr>
-        <p:style>
-          <a:lnRef idx="1">
-            <a:schemeClr val="accent1"/>
-          </a:lnRef>
-          <a:fillRef idx="3">
-            <a:schemeClr val="accent1"/>
-          </a:fillRef>
-          <a:effectRef idx="2">
-            <a:schemeClr val="accent1"/>
-          </a:effectRef>
-          <a:fontRef idx="minor">
-            <a:schemeClr val="lt1"/>
-          </a:fontRef>
-        </p:style>
-        <p:txBody>
-          <a:bodyPr rtlCol="0" anchor="ctr"/>
-          <a:lstStyle/>
-          <a:p>
-            <a:pPr algn="ctr"/>
-          </a:p>
-        </p:txBody>
-      </p:sp>
-      <p:sp>
-        <p:nvSpPr>
-          <p:cNvPr id="13" name="TextBox 12"/>
-          <p:cNvSpPr txBox="1"/>
-          <p:nvPr/>
-        </p:nvSpPr>
-        <p:spPr>
-          <a:xfrm>
-            <a:off x="6583680" y="2743200"/>
-            <a:ext cx="1874519" cy="1005840"/>
-          </a:xfrm>
-          <a:prstGeom prst="rect">
-            <a:avLst/>
-          </a:prstGeom>
-          <a:noFill/>
-        </p:spPr>
-        <p:txBody>
-          <a:bodyPr wrap="square" anchor="ctr" lIns="0" rIns="0" tIns="0" bIns="0">
-            <a:spAutoFit/>
-          </a:bodyPr>
-          <a:lstStyle/>
-          <a:p>
-            <a:pPr algn="ctr">
-              <a:spcAft>
-                <a:spcPts val="900"/>
-              </a:spcAft>
-            </a:pPr>
-            <a:r>
-              <a:rPr sz="2000" b="1" i="0">
-                <a:solidFill>
-                  <a:srgbClr val="1C1B19"/>
-                </a:solidFill>
-                <a:latin typeface="Source Serif 4"/>
-              </a:rPr>
-              <a:t>Balance</a:t>
-            </a:r>
-          </a:p>
-        </p:txBody>
-      </p:sp>
-      <p:cxnSp>
-        <p:nvCxnSpPr>
-          <p:cNvPr id="14" name="Connector 13"/>
-          <p:cNvCxnSpPr/>
-          <p:nvPr/>
-        </p:nvCxnSpPr>
-        <p:spPr>
-          <a:xfrm>
-            <a:off x="8513064" y="3246120"/>
-            <a:ext cx="896112" cy="0"/>
-          </a:xfrm>
-          <a:prstGeom prst="line">
-            <a:avLst/>
-          </a:prstGeom>
-          <a:ln w="31750">
-            <a:solidFill>
-              <a:srgbClr val="F47B20"/>
-            </a:solidFill>
-            <a:tailEnd type="triangle"/>
-          </a:ln>
-        </p:spPr>
-        <p:style>
-          <a:lnRef idx="2">
-            <a:schemeClr val="accent1"/>
-          </a:lnRef>
-          <a:fillRef idx="0">
-            <a:schemeClr val="accent1"/>
-          </a:fillRef>
-          <a:effectRef idx="1">
-            <a:schemeClr val="accent1"/>
-          </a:effectRef>
-          <a:fontRef idx="minor">
-            <a:schemeClr val="tx1"/>
-          </a:fontRef>
-        </p:style>
-      </p:cxnSp>
-      <p:sp>
-        <p:nvSpPr>
-          <p:cNvPr id="15" name="Rectangle 14"/>
-          <p:cNvSpPr/>
-          <p:nvPr/>
-        </p:nvSpPr>
-        <p:spPr>
-          <a:xfrm>
-            <a:off x="9464040" y="2743200"/>
-            <a:ext cx="1874519" cy="1005840"/>
-          </a:xfrm>
-          <a:prstGeom prst="rect">
-            <a:avLst/>
-          </a:prstGeom>
-          <a:solidFill>
-            <a:srgbClr val="FFFFFF"/>
-          </a:solidFill>
-          <a:ln w="15875">
-            <a:solidFill>
-              <a:srgbClr val="0B2D5B"/>
-            </a:solidFill>
-          </a:ln>
-          <a:effectLst/>
-        </p:spPr>
-        <p:style>
-          <a:lnRef idx="1">
-            <a:schemeClr val="accent1"/>
-          </a:lnRef>
-          <a:fillRef idx="3">
-            <a:schemeClr val="accent1"/>
-          </a:fillRef>
-          <a:effectRef idx="2">
-            <a:schemeClr val="accent1"/>
-          </a:effectRef>
-          <a:fontRef idx="minor">
-            <a:schemeClr val="lt1"/>
-          </a:fontRef>
-        </p:style>
-        <p:txBody>
-          <a:bodyPr rtlCol="0" anchor="ctr"/>
-          <a:lstStyle/>
-          <a:p>
-            <a:pPr algn="ctr"/>
-          </a:p>
-        </p:txBody>
-      </p:sp>
-      <p:sp>
-        <p:nvSpPr>
-          <p:cNvPr id="16" name="TextBox 15"/>
-          <p:cNvSpPr txBox="1"/>
-          <p:nvPr/>
-        </p:nvSpPr>
-        <p:spPr>
-          <a:xfrm>
-            <a:off x="9464040" y="2743200"/>
-            <a:ext cx="1874519" cy="1005840"/>
-          </a:xfrm>
-          <a:prstGeom prst="rect">
-            <a:avLst/>
-          </a:prstGeom>
-          <a:noFill/>
-        </p:spPr>
-        <p:txBody>
-          <a:bodyPr wrap="square" anchor="ctr" lIns="0" rIns="0" tIns="0" bIns="0">
-            <a:spAutoFit/>
-          </a:bodyPr>
-          <a:lstStyle/>
-          <a:p>
-            <a:pPr algn="ctr">
-              <a:spcAft>
-                <a:spcPts val="900"/>
-              </a:spcAft>
-            </a:pPr>
-            <a:r>
-              <a:rPr sz="2000" b="1" i="0">
-                <a:solidFill>
-                  <a:srgbClr val="1C1B19"/>
-                </a:solidFill>
-                <a:latin typeface="Source Serif 4"/>
-              </a:rPr>
-              <a:t>Breathing</a:t>
-            </a:r>
-          </a:p>
-        </p:txBody>
-      </p:sp>
-      <p:sp>
-        <p:nvSpPr>
-          <p:cNvPr id="17" name="TextBox 16"/>
-          <p:cNvSpPr txBox="1"/>
-          <p:nvPr/>
-        </p:nvSpPr>
-        <p:spPr>
-          <a:xfrm>
-            <a:off x="822960" y="4160520"/>
-            <a:ext cx="10515600" cy="457200"/>
-          </a:xfrm>
-          <a:prstGeom prst="rect">
-            <a:avLst/>
-          </a:prstGeom>
-          <a:noFill/>
-        </p:spPr>
-        <p:txBody>
-          <a:bodyPr wrap="square" anchor="t" lIns="0" rIns="0" tIns="0" bIns="0">
-            <a:spAutoFit/>
-          </a:bodyPr>
-          <a:lstStyle/>
-          <a:p>
-            <a:pPr algn="ctr">
-              <a:spcAft>
-                <a:spcPts val="810"/>
-              </a:spcAft>
-            </a:pPr>
-            <a:r>
-              <a:rPr sz="1800" b="1" i="0">
-                <a:solidFill>
-                  <a:srgbClr val="F47B20"/>
-                </a:solidFill>
-                <a:latin typeface="Inter Tight"/>
-              </a:rPr>
-              <a:t/>
-            </a:r>
-          </a:p>
-        </p:txBody>
-      </p:sp>
-      <p:sp>
-        <p:nvSpPr>
-          <p:cNvPr id="18" name="TextBox 17"/>
-          <p:cNvSpPr txBox="1"/>
-          <p:nvPr/>
-        </p:nvSpPr>
-        <p:spPr>
-          <a:xfrm>
-            <a:off x="822960" y="4846320"/>
-            <a:ext cx="10515600" cy="1188720"/>
-          </a:xfrm>
-          <a:prstGeom prst="rect">
-            <a:avLst/>
-          </a:prstGeom>
-          <a:noFill/>
-        </p:spPr>
-        <p:txBody>
-          <a:bodyPr wrap="square" anchor="t" lIns="0" rIns="0" tIns="0" bIns="0">
-            <a:spAutoFit/>
-          </a:bodyPr>
-          <a:lstStyle/>
-          <a:p>
-            <a:pPr algn="ctr">
-              <a:spcAft>
-                <a:spcPts val="900"/>
-              </a:spcAft>
-            </a:pPr>
-            <a:r>
-              <a:rPr sz="2000" b="0" i="1">
-                <a:solidFill>
-                  <a:srgbClr val="5D5A54"/>
-                </a:solidFill>
-                <a:latin typeface="Source Serif 4"/>
-              </a:rPr>
-              <a:t>It boosts the brain's "slow down" signal. Each stop is a deeper part of the brain.</a:t>
-            </a:r>
-          </a:p>
-        </p:txBody>
-      </p:sp>
+      <p:pic>
+        <p:nvPicPr>
+          <p:cNvPr id="5" name="Picture 4" descr="drinking-game-toon-1.jpg"/>
+          <p:cNvPicPr>
+            <a:picLocks noChangeAspect="1"/>
+          </p:cNvPicPr>
+          <p:nvPr/>
+        </p:nvPicPr>
+        <p:blipFill>
+          <a:blip r:embed="rId2"/>
+          <a:stretch>
+            <a:fillRect/>
+          </a:stretch>
+        </p:blipFill>
+        <p:spPr>
+          <a:xfrm>
+            <a:off x="0" y="0"/>
+            <a:ext cx="12192000" cy="6858000"/>
+          </a:xfrm>
+          <a:prstGeom prst="rect">
+            <a:avLst/>
+          </a:prstGeom>
+        </p:spPr>
+      </p:pic>
     </p:spTree>
   </p:cSld>
   <p:clrMapOvr>
@@ -8280,7 +9124,7 @@
                 </a:solidFill>
                 <a:latin typeface="Inter Tight"/>
               </a:rPr>
-              <a:t>THE CURVE</a:t>
+              <a:t>FOUR STOPS</a:t>
             </a:r>
           </a:p>
         </p:txBody>
@@ -8324,84 +9168,30 @@
           </a:p>
         </p:txBody>
       </p:sp>
-      <p:sp>
-        <p:nvSpPr>
-          <p:cNvPr id="5" name="TextBox 4"/>
-          <p:cNvSpPr txBox="1"/>
-          <p:nvPr/>
-        </p:nvSpPr>
-        <p:spPr>
-          <a:xfrm>
-            <a:off x="822960" y="1463040"/>
-            <a:ext cx="10515600" cy="3291840"/>
-          </a:xfrm>
-          <a:prstGeom prst="rect">
-            <a:avLst/>
-          </a:prstGeom>
-          <a:noFill/>
-        </p:spPr>
-        <p:txBody>
-          <a:bodyPr wrap="square" anchor="ctr" lIns="0" rIns="0" tIns="0" bIns="0">
-            <a:spAutoFit/>
-          </a:bodyPr>
-          <a:lstStyle/>
-          <a:p>
-            <a:pPr algn="l">
-              <a:spcAft>
-                <a:spcPts val="2070"/>
-              </a:spcAft>
-            </a:pPr>
-            <a:r>
-              <a:rPr sz="4600" b="1" i="0">
-                <a:solidFill>
-                  <a:srgbClr val="1C1B19"/>
-                </a:solidFill>
-                <a:latin typeface="Source Serif 4"/>
-              </a:rPr>
-              <a:t>The last drink isn't the peak.</a:t>
-            </a:r>
-          </a:p>
-        </p:txBody>
-      </p:sp>
-      <p:sp>
-        <p:nvSpPr>
-          <p:cNvPr id="6" name="TextBox 5"/>
-          <p:cNvSpPr txBox="1"/>
-          <p:nvPr/>
-        </p:nvSpPr>
-        <p:spPr>
-          <a:xfrm>
-            <a:off x="822960" y="4846320"/>
-            <a:ext cx="10515600" cy="1097280"/>
-          </a:xfrm>
-          <a:prstGeom prst="rect">
-            <a:avLst/>
-          </a:prstGeom>
-          <a:noFill/>
-        </p:spPr>
-        <p:txBody>
-          <a:bodyPr wrap="square" anchor="t" lIns="0" rIns="0" tIns="0" bIns="0">
-            <a:spAutoFit/>
-          </a:bodyPr>
-          <a:lstStyle/>
-          <a:p>
-            <a:pPr algn="l">
-              <a:spcAft>
-                <a:spcPts val="990"/>
-              </a:spcAft>
-            </a:pPr>
-            <a:r>
-              <a:rPr sz="2200" b="0" i="1">
-                <a:solidFill>
-                  <a:srgbClr val="5D5A54"/>
-                </a:solidFill>
-                <a:latin typeface="Source Serif 4"/>
-              </a:rPr>
-              <a:t>Alcohol keeps rising for 30 to 90 minutes after the last sip. The liver clears about one drink an hour, no matter what.</a:t>
-            </a:r>
-          </a:p>
-        </p:txBody>
-      </p:sp>
+      <p:pic>
+        <p:nvPicPr>
+          <p:cNvPr id="5" name="Picture 4" descr="drinking-game-toon-2.jpg"/>
+          <p:cNvPicPr>
+            <a:picLocks noChangeAspect="1"/>
+          </p:cNvPicPr>
+          <p:nvPr/>
+        </p:nvPicPr>
+        <p:blipFill>
+          <a:blip r:embed="rId2"/>
+          <a:stretch>
+            <a:fillRect/>
+          </a:stretch>
+        </p:blipFill>
+        <p:spPr>
+          <a:xfrm>
+            <a:off x="0" y="0"/>
+            <a:ext cx="12192000" cy="6858000"/>
+          </a:xfrm>
+          <a:prstGeom prst="rect">
+            <a:avLst/>
+          </a:prstGeom>
+        </p:spPr>
+      </p:pic>
     </p:spTree>
   </p:cSld>
   <p:clrMapOvr>
@@ -8506,7 +9296,7 @@
                 </a:solidFill>
                 <a:latin typeface="Inter Tight"/>
               </a:rPr>
-              <a:t>GRADUATION PARTY</a:t>
+              <a:t>THE CURVE</a:t>
             </a:r>
           </a:p>
         </p:txBody>
@@ -8550,421 +9340,30 @@
           </a:p>
         </p:txBody>
       </p:sp>
-      <p:sp>
-        <p:nvSpPr>
-          <p:cNvPr id="5" name="TextBox 4"/>
-          <p:cNvSpPr txBox="1"/>
-          <p:nvPr/>
-        </p:nvSpPr>
-        <p:spPr>
-          <a:xfrm>
-            <a:off x="822960" y="1005840"/>
-            <a:ext cx="10515600" cy="1097280"/>
-          </a:xfrm>
-          <a:prstGeom prst="rect">
-            <a:avLst/>
-          </a:prstGeom>
-          <a:noFill/>
-        </p:spPr>
-        <p:txBody>
-          <a:bodyPr wrap="square" anchor="t" lIns="0" rIns="0" tIns="0" bIns="0">
-            <a:spAutoFit/>
-          </a:bodyPr>
-          <a:lstStyle/>
-          <a:p>
-            <a:pPr algn="l">
-              <a:spcAft>
-                <a:spcPts val="1620"/>
-              </a:spcAft>
-            </a:pPr>
-            <a:r>
-              <a:rPr sz="3600" b="1" i="0">
-                <a:solidFill>
-                  <a:srgbClr val="1C1B19"/>
-                </a:solidFill>
-                <a:latin typeface="Source Serif 4"/>
-              </a:rPr>
-              <a:t>Dani's night. Vote 1, 2 or 3 with your fingers.</a:t>
-            </a:r>
-          </a:p>
-        </p:txBody>
-      </p:sp>
-      <p:sp>
-        <p:nvSpPr>
-          <p:cNvPr id="6" name="TextBox 5"/>
-          <p:cNvSpPr txBox="1"/>
-          <p:nvPr/>
-        </p:nvSpPr>
-        <p:spPr>
-          <a:xfrm>
-            <a:off x="822960" y="2194560"/>
-            <a:ext cx="548640" cy="1005840"/>
-          </a:xfrm>
-          <a:prstGeom prst="rect">
-            <a:avLst/>
-          </a:prstGeom>
-          <a:noFill/>
-        </p:spPr>
-        <p:txBody>
-          <a:bodyPr wrap="square" anchor="t" lIns="0" rIns="0" tIns="0" bIns="0">
-            <a:spAutoFit/>
-          </a:bodyPr>
-          <a:lstStyle/>
-          <a:p>
-            <a:pPr algn="l">
-              <a:spcAft>
-                <a:spcPts val="1170"/>
-              </a:spcAft>
-            </a:pPr>
-            <a:r>
-              <a:rPr sz="2600" b="1" i="0">
-                <a:solidFill>
-                  <a:srgbClr val="F47B20"/>
-                </a:solidFill>
-                <a:latin typeface="Source Serif 4"/>
-              </a:rPr>
-              <a:t>1</a:t>
-            </a:r>
-          </a:p>
-        </p:txBody>
-      </p:sp>
-      <p:sp>
-        <p:nvSpPr>
-          <p:cNvPr id="7" name="TextBox 6"/>
-          <p:cNvSpPr txBox="1"/>
-          <p:nvPr/>
-        </p:nvSpPr>
-        <p:spPr>
-          <a:xfrm>
-            <a:off x="1463040" y="2231136"/>
-            <a:ext cx="9875520" cy="1005840"/>
-          </a:xfrm>
-          <a:prstGeom prst="rect">
-            <a:avLst/>
-          </a:prstGeom>
-          <a:noFill/>
-        </p:spPr>
-        <p:txBody>
-          <a:bodyPr wrap="square" anchor="t" lIns="0" rIns="0" tIns="0" bIns="0">
-            <a:spAutoFit/>
-          </a:bodyPr>
-          <a:lstStyle/>
-          <a:p>
-            <a:pPr algn="l">
-              <a:spcAft>
-                <a:spcPts val="945"/>
-              </a:spcAft>
-            </a:pPr>
-            <a:r>
-              <a:rPr sz="2100" b="1" i="0">
-                <a:solidFill>
-                  <a:srgbClr val="1C1B19"/>
-                </a:solidFill>
-                <a:latin typeface="Source Serif 4"/>
-              </a:rPr>
-              <a:t>8:30. A friend's dad is mixing drinks.</a:t>
-            </a:r>
-          </a:p>
-          <a:p>
-            <a:pPr algn="l">
-              <a:spcAft>
-                <a:spcPts val="945"/>
-              </a:spcAft>
-            </a:pPr>
-            <a:r>
-              <a:rPr sz="1600" b="0" i="0">
-                <a:solidFill>
-                  <a:srgbClr val="5D5A54"/>
-                </a:solidFill>
-                <a:latin typeface="Source Serif 4"/>
-              </a:rPr>
-              <a:t>"Better here than somewhere worse."</a:t>
-            </a:r>
-          </a:p>
-        </p:txBody>
-      </p:sp>
-      <p:sp>
-        <p:nvSpPr>
-          <p:cNvPr id="8" name="TextBox 7"/>
-          <p:cNvSpPr txBox="1"/>
-          <p:nvPr/>
-        </p:nvSpPr>
-        <p:spPr>
-          <a:xfrm>
-            <a:off x="822960" y="3200400"/>
-            <a:ext cx="548640" cy="1005840"/>
-          </a:xfrm>
-          <a:prstGeom prst="rect">
-            <a:avLst/>
-          </a:prstGeom>
-          <a:noFill/>
-        </p:spPr>
-        <p:txBody>
-          <a:bodyPr wrap="square" anchor="t" lIns="0" rIns="0" tIns="0" bIns="0">
-            <a:spAutoFit/>
-          </a:bodyPr>
-          <a:lstStyle/>
-          <a:p>
-            <a:pPr algn="l">
-              <a:spcAft>
-                <a:spcPts val="1170"/>
-              </a:spcAft>
-            </a:pPr>
-            <a:r>
-              <a:rPr sz="2600" b="1" i="0">
-                <a:solidFill>
-                  <a:srgbClr val="F47B20"/>
-                </a:solidFill>
-                <a:latin typeface="Source Serif 4"/>
-              </a:rPr>
-              <a:t>2</a:t>
-            </a:r>
-          </a:p>
-        </p:txBody>
-      </p:sp>
-      <p:sp>
-        <p:nvSpPr>
-          <p:cNvPr id="9" name="TextBox 8"/>
-          <p:cNvSpPr txBox="1"/>
-          <p:nvPr/>
-        </p:nvSpPr>
-        <p:spPr>
-          <a:xfrm>
-            <a:off x="1463040" y="3236976"/>
-            <a:ext cx="9875520" cy="1005840"/>
-          </a:xfrm>
-          <a:prstGeom prst="rect">
-            <a:avLst/>
-          </a:prstGeom>
-          <a:noFill/>
-        </p:spPr>
-        <p:txBody>
-          <a:bodyPr wrap="square" anchor="t" lIns="0" rIns="0" tIns="0" bIns="0">
-            <a:spAutoFit/>
-          </a:bodyPr>
-          <a:lstStyle/>
-          <a:p>
-            <a:pPr algn="l">
-              <a:spcAft>
-                <a:spcPts val="945"/>
-              </a:spcAft>
-            </a:pPr>
-            <a:r>
-              <a:rPr sz="2100" b="1" i="0">
-                <a:solidFill>
-                  <a:srgbClr val="1C1B19"/>
-                </a:solidFill>
-                <a:latin typeface="Source Serif 4"/>
-              </a:rPr>
-              <a:t>10:00. Theo did four shots in twenty minutes.</a:t>
-            </a:r>
-          </a:p>
-          <a:p>
-            <a:pPr algn="l">
-              <a:spcAft>
-                <a:spcPts val="945"/>
-              </a:spcAft>
-            </a:pPr>
-            <a:r>
-              <a:rPr sz="1600" b="0" i="0">
-                <a:solidFill>
-                  <a:srgbClr val="5D5A54"/>
-                </a:solidFill>
-                <a:latin typeface="Source Serif 4"/>
-              </a:rPr>
-              <a:t>"I feel nothing."</a:t>
-            </a:r>
-          </a:p>
-        </p:txBody>
-      </p:sp>
-      <p:sp>
-        <p:nvSpPr>
-          <p:cNvPr id="10" name="TextBox 9"/>
-          <p:cNvSpPr txBox="1"/>
-          <p:nvPr/>
-        </p:nvSpPr>
-        <p:spPr>
-          <a:xfrm>
-            <a:off x="822960" y="4206240"/>
-            <a:ext cx="548640" cy="1005840"/>
-          </a:xfrm>
-          <a:prstGeom prst="rect">
-            <a:avLst/>
-          </a:prstGeom>
-          <a:noFill/>
-        </p:spPr>
-        <p:txBody>
-          <a:bodyPr wrap="square" anchor="t" lIns="0" rIns="0" tIns="0" bIns="0">
-            <a:spAutoFit/>
-          </a:bodyPr>
-          <a:lstStyle/>
-          <a:p>
-            <a:pPr algn="l">
-              <a:spcAft>
-                <a:spcPts val="1170"/>
-              </a:spcAft>
-            </a:pPr>
-            <a:r>
-              <a:rPr sz="2600" b="1" i="0">
-                <a:solidFill>
-                  <a:srgbClr val="F47B20"/>
-                </a:solidFill>
-                <a:latin typeface="Source Serif 4"/>
-              </a:rPr>
-              <a:t>3</a:t>
-            </a:r>
-          </a:p>
-        </p:txBody>
-      </p:sp>
-      <p:sp>
-        <p:nvSpPr>
-          <p:cNvPr id="11" name="TextBox 10"/>
-          <p:cNvSpPr txBox="1"/>
-          <p:nvPr/>
-        </p:nvSpPr>
-        <p:spPr>
-          <a:xfrm>
-            <a:off x="1463040" y="4242816"/>
-            <a:ext cx="9875520" cy="1005840"/>
-          </a:xfrm>
-          <a:prstGeom prst="rect">
-            <a:avLst/>
-          </a:prstGeom>
-          <a:noFill/>
-        </p:spPr>
-        <p:txBody>
-          <a:bodyPr wrap="square" anchor="t" lIns="0" rIns="0" tIns="0" bIns="0">
-            <a:spAutoFit/>
-          </a:bodyPr>
-          <a:lstStyle/>
-          <a:p>
-            <a:pPr algn="l">
-              <a:spcAft>
-                <a:spcPts val="945"/>
-              </a:spcAft>
-            </a:pPr>
-            <a:r>
-              <a:rPr sz="2100" b="1" i="0">
-                <a:solidFill>
-                  <a:srgbClr val="1C1B19"/>
-                </a:solidFill>
-                <a:latin typeface="Source Serif 4"/>
-              </a:rPr>
-              <a:t>11:00. Theo is slurring and has thrown up.</a:t>
-            </a:r>
-          </a:p>
-          <a:p>
-            <a:pPr algn="l">
-              <a:spcAft>
-                <a:spcPts val="945"/>
-              </a:spcAft>
-            </a:pPr>
-            <a:r>
-              <a:rPr sz="1600" b="0" i="0">
-                <a:solidFill>
-                  <a:srgbClr val="5D5A54"/>
-                </a:solidFill>
-                <a:latin typeface="Source Serif 4"/>
-              </a:rPr>
-              <a:t>He wants to lie down alone in the basement.</a:t>
-            </a:r>
-          </a:p>
-        </p:txBody>
-      </p:sp>
-      <p:sp>
-        <p:nvSpPr>
-          <p:cNvPr id="12" name="TextBox 11"/>
-          <p:cNvSpPr txBox="1"/>
-          <p:nvPr/>
-        </p:nvSpPr>
-        <p:spPr>
-          <a:xfrm>
-            <a:off x="822960" y="5212080"/>
-            <a:ext cx="548640" cy="1005840"/>
-          </a:xfrm>
-          <a:prstGeom prst="rect">
-            <a:avLst/>
-          </a:prstGeom>
-          <a:noFill/>
-        </p:spPr>
-        <p:txBody>
-          <a:bodyPr wrap="square" anchor="t" lIns="0" rIns="0" tIns="0" bIns="0">
-            <a:spAutoFit/>
-          </a:bodyPr>
-          <a:lstStyle/>
-          <a:p>
-            <a:pPr algn="l">
-              <a:spcAft>
-                <a:spcPts val="1170"/>
-              </a:spcAft>
-            </a:pPr>
-            <a:r>
-              <a:rPr sz="2600" b="1" i="0">
-                <a:solidFill>
-                  <a:srgbClr val="F47B20"/>
-                </a:solidFill>
-                <a:latin typeface="Source Serif 4"/>
-              </a:rPr>
-              <a:t>4</a:t>
-            </a:r>
-          </a:p>
-        </p:txBody>
-      </p:sp>
-      <p:sp>
-        <p:nvSpPr>
-          <p:cNvPr id="13" name="TextBox 12"/>
-          <p:cNvSpPr txBox="1"/>
-          <p:nvPr/>
-        </p:nvSpPr>
-        <p:spPr>
-          <a:xfrm>
-            <a:off x="1463040" y="5248656"/>
-            <a:ext cx="9875520" cy="1005840"/>
-          </a:xfrm>
-          <a:prstGeom prst="rect">
-            <a:avLst/>
-          </a:prstGeom>
-          <a:noFill/>
-        </p:spPr>
-        <p:txBody>
-          <a:bodyPr wrap="square" anchor="t" lIns="0" rIns="0" tIns="0" bIns="0">
-            <a:spAutoFit/>
-          </a:bodyPr>
-          <a:lstStyle/>
-          <a:p>
-            <a:pPr algn="l">
-              <a:spcAft>
-                <a:spcPts val="945"/>
-              </a:spcAft>
-            </a:pPr>
-            <a:r>
-              <a:rPr sz="2100" b="1" i="0">
-                <a:solidFill>
-                  <a:srgbClr val="1C1B19"/>
-                </a:solidFill>
-                <a:latin typeface="Source Serif 4"/>
-              </a:rPr>
-              <a:t>11:20. Theo won't wake up.</a:t>
-            </a:r>
-          </a:p>
-          <a:p>
-            <a:pPr algn="l">
-              <a:spcAft>
-                <a:spcPts val="945"/>
-              </a:spcAft>
-            </a:pPr>
-            <a:r>
-              <a:rPr sz="1600" b="0" i="0">
-                <a:solidFill>
-                  <a:srgbClr val="5D5A54"/>
-                </a:solidFill>
-                <a:latin typeface="Source Serif 4"/>
-              </a:rPr>
-              <a:t>Long pauses in his breathing. "Don't call. His parents will kill him."</a:t>
-            </a:r>
-          </a:p>
-        </p:txBody>
-      </p:sp>
+      <p:pic>
+        <p:nvPicPr>
+          <p:cNvPr id="5" name="Picture 4" descr="drinking-game-toon-3.jpg"/>
+          <p:cNvPicPr>
+            <a:picLocks noChangeAspect="1"/>
+          </p:cNvPicPr>
+          <p:nvPr/>
+        </p:nvPicPr>
+        <p:blipFill>
+          <a:blip r:embed="rId2"/>
+          <a:stretch>
+            <a:fillRect/>
+          </a:stretch>
+        </p:blipFill>
+        <p:spPr>
+          <a:xfrm>
+            <a:off x="0" y="0"/>
+            <a:ext cx="12192000" cy="6858000"/>
+          </a:xfrm>
+          <a:prstGeom prst="rect">
+            <a:avLst/>
+          </a:prstGeom>
+        </p:spPr>
+      </p:pic>
     </p:spTree>
   </p:cSld>
   <p:clrMapOvr>
@@ -9069,7 +9468,7 @@
                 </a:solidFill>
                 <a:latin typeface="Inter Tight"/>
               </a:rPr>
-              <a:t>WHEN TO CALL</a:t>
+              <a:t>LOTS OF WAYS IN</a:t>
             </a:r>
           </a:p>
         </p:txBody>
@@ -9122,7 +9521,7 @@
         <p:spPr>
           <a:xfrm>
             <a:off x="822960" y="1005840"/>
-            <a:ext cx="10515600" cy="914400"/>
+            <a:ext cx="10515600" cy="1097280"/>
           </a:xfrm>
           <a:prstGeom prst="rect">
             <a:avLst/>
@@ -9137,77 +9536,31 @@
           <a:p>
             <a:pPr algn="l">
               <a:spcAft>
-                <a:spcPts val="1530"/>
-              </a:spcAft>
-            </a:pPr>
-            <a:r>
-              <a:rPr sz="3400" b="1" i="0">
+                <a:spcPts val="1620"/>
+              </a:spcAft>
+            </a:pPr>
+            <a:r>
+              <a:rPr sz="3600" b="1" i="0">
                 <a:solidFill>
                   <a:srgbClr val="1C1B19"/>
                 </a:solidFill>
                 <a:latin typeface="Source Serif 4"/>
               </a:rPr>
-              <a:t>Any one of these: call 911</a:t>
-            </a:r>
-          </a:p>
-        </p:txBody>
-      </p:sp>
-      <p:sp>
-        <p:nvSpPr>
-          <p:cNvPr id="6" name="Rectangle 5"/>
-          <p:cNvSpPr/>
-          <p:nvPr/>
-        </p:nvSpPr>
-        <p:spPr>
-          <a:xfrm>
-            <a:off x="822960" y="2103120"/>
-            <a:ext cx="5120640" cy="3931920"/>
-          </a:xfrm>
-          <a:prstGeom prst="rect">
-            <a:avLst/>
-          </a:prstGeom>
-          <a:solidFill>
-            <a:srgbClr val="FFFFFF"/>
-          </a:solidFill>
-          <a:ln w="15875">
-            <a:solidFill>
-              <a:srgbClr val="D8D2C6"/>
-            </a:solidFill>
-          </a:ln>
-          <a:effectLst/>
-        </p:spPr>
-        <p:style>
-          <a:lnRef idx="1">
-            <a:schemeClr val="accent1"/>
-          </a:lnRef>
-          <a:fillRef idx="3">
-            <a:schemeClr val="accent1"/>
-          </a:fillRef>
-          <a:effectRef idx="2">
-            <a:schemeClr val="accent1"/>
-          </a:effectRef>
-          <a:fontRef idx="minor">
-            <a:schemeClr val="lt1"/>
-          </a:fontRef>
-        </p:style>
-        <p:txBody>
-          <a:bodyPr rtlCol="0" anchor="ctr"/>
-          <a:lstStyle/>
-          <a:p>
-            <a:pPr algn="ctr"/>
-          </a:p>
-        </p:txBody>
-      </p:sp>
-      <p:sp>
-        <p:nvSpPr>
-          <p:cNvPr id="7" name="TextBox 6"/>
+              <a:t>Where the bottle usually comes from</a:t>
+            </a:r>
+          </a:p>
+        </p:txBody>
+      </p:sp>
+      <p:sp>
+        <p:nvSpPr>
+          <p:cNvPr id="6" name="TextBox 5"/>
           <p:cNvSpPr txBox="1"/>
           <p:nvPr/>
         </p:nvSpPr>
         <p:spPr>
           <a:xfrm>
-            <a:off x="1097280" y="2286000"/>
-            <a:ext cx="4572000" cy="457200"/>
+            <a:off x="822960" y="2194560"/>
+            <a:ext cx="548640" cy="1005840"/>
           </a:xfrm>
           <a:prstGeom prst="rect">
             <a:avLst/>
@@ -9222,31 +9575,31 @@
           <a:p>
             <a:pPr algn="l">
               <a:spcAft>
-                <a:spcPts val="585"/>
-              </a:spcAft>
-            </a:pPr>
-            <a:r>
-              <a:rPr sz="1300" b="1" i="0">
-                <a:solidFill>
-                  <a:srgbClr val="0B2D5B"/>
-                </a:solidFill>
-                <a:latin typeface="Inter Tight"/>
-              </a:rPr>
-              <a:t>THE SIGNS</a:t>
-            </a:r>
-          </a:p>
-        </p:txBody>
-      </p:sp>
-      <p:sp>
-        <p:nvSpPr>
-          <p:cNvPr id="8" name="TextBox 7"/>
+                <a:spcPts val="1170"/>
+              </a:spcAft>
+            </a:pPr>
+            <a:r>
+              <a:rPr sz="2600" b="1" i="0">
+                <a:solidFill>
+                  <a:srgbClr val="F47B20"/>
+                </a:solidFill>
+                <a:latin typeface="Source Serif 4"/>
+              </a:rPr>
+              <a:t>1</a:t>
+            </a:r>
+          </a:p>
+        </p:txBody>
+      </p:sp>
+      <p:sp>
+        <p:nvSpPr>
+          <p:cNvPr id="7" name="TextBox 6"/>
           <p:cNvSpPr txBox="1"/>
           <p:nvPr/>
         </p:nvSpPr>
         <p:spPr>
           <a:xfrm>
-            <a:off x="1097280" y="2788920"/>
-            <a:ext cx="4572000" cy="3108960"/>
+            <a:off x="1463040" y="2231136"/>
+            <a:ext cx="9875520" cy="1005840"/>
           </a:xfrm>
           <a:prstGeom prst="rect">
             <a:avLst/>
@@ -9261,125 +9614,47 @@
           <a:p>
             <a:pPr algn="l">
               <a:spcAft>
-                <a:spcPts val="855"/>
-              </a:spcAft>
-            </a:pPr>
-            <a:r>
-              <a:rPr sz="1900" b="0" i="0">
+                <a:spcPts val="945"/>
+              </a:spcAft>
+            </a:pPr>
+            <a:r>
+              <a:rPr sz="2100" b="1" i="0">
                 <a:solidFill>
                   <a:srgbClr val="1C1B19"/>
                 </a:solidFill>
                 <a:latin typeface="Source Serif 4"/>
               </a:rPr>
-              <a:t>Can't be woken up</a:t>
-            </a:r>
-          </a:p>
-          <a:p>
-            <a:pPr algn="l">
-              <a:spcAft>
-                <a:spcPts val="855"/>
-              </a:spcAft>
-            </a:pPr>
-            <a:r>
-              <a:rPr sz="1900" b="0" i="0">
-                <a:solidFill>
-                  <a:srgbClr val="1C1B19"/>
-                </a:solidFill>
-                <a:latin typeface="Source Serif 4"/>
-              </a:rPr>
-              <a:t>Vomiting while passed out</a:t>
-            </a:r>
-          </a:p>
-          <a:p>
-            <a:pPr algn="l">
-              <a:spcAft>
-                <a:spcPts val="855"/>
-              </a:spcAft>
-            </a:pPr>
-            <a:r>
-              <a:rPr sz="1900" b="0" i="0">
-                <a:solidFill>
-                  <a:srgbClr val="1C1B19"/>
-                </a:solidFill>
-                <a:latin typeface="Source Serif 4"/>
-              </a:rPr>
-              <a:t>Slow or gappy breathing</a:t>
-            </a:r>
-          </a:p>
-          <a:p>
-            <a:pPr algn="l">
-              <a:spcAft>
-                <a:spcPts val="855"/>
-              </a:spcAft>
-            </a:pPr>
-            <a:r>
-              <a:rPr sz="1900" b="0" i="0">
-                <a:solidFill>
-                  <a:srgbClr val="1C1B19"/>
-                </a:solidFill>
-                <a:latin typeface="Source Serif 4"/>
-              </a:rPr>
-              <a:t>Cold, pale or bluish skin, or a seizure</a:t>
-            </a:r>
-          </a:p>
-        </p:txBody>
-      </p:sp>
-      <p:sp>
-        <p:nvSpPr>
-          <p:cNvPr id="9" name="Rectangle 8"/>
-          <p:cNvSpPr/>
-          <p:nvPr/>
-        </p:nvSpPr>
-        <p:spPr>
-          <a:xfrm>
-            <a:off x="6309360" y="2103120"/>
-            <a:ext cx="5120640" cy="3931920"/>
-          </a:xfrm>
-          <a:prstGeom prst="rect">
-            <a:avLst/>
-          </a:prstGeom>
-          <a:solidFill>
-            <a:srgbClr val="FFFFFF"/>
-          </a:solidFill>
-          <a:ln w="15875">
-            <a:solidFill>
-              <a:srgbClr val="D8D2C6"/>
-            </a:solidFill>
-          </a:ln>
-          <a:effectLst/>
-        </p:spPr>
-        <p:style>
-          <a:lnRef idx="1">
-            <a:schemeClr val="accent1"/>
-          </a:lnRef>
-          <a:fillRef idx="3">
-            <a:schemeClr val="accent1"/>
-          </a:fillRef>
-          <a:effectRef idx="2">
-            <a:schemeClr val="accent1"/>
-          </a:effectRef>
-          <a:fontRef idx="minor">
-            <a:schemeClr val="lt1"/>
-          </a:fontRef>
-        </p:style>
-        <p:txBody>
-          <a:bodyPr rtlCol="0" anchor="ctr"/>
-          <a:lstStyle/>
-          <a:p>
-            <a:pPr algn="ctr"/>
-          </a:p>
-        </p:txBody>
-      </p:sp>
-      <p:sp>
-        <p:nvSpPr>
-          <p:cNvPr id="10" name="TextBox 9"/>
+              <a:t>A parent's cabinet, without them knowing.</a:t>
+            </a:r>
+          </a:p>
+          <a:p>
+            <a:pPr algn="l">
+              <a:spcAft>
+                <a:spcPts val="945"/>
+              </a:spcAft>
+            </a:pPr>
+            <a:r>
+              <a:rPr sz="1600" b="0" i="0">
+                <a:solidFill>
+                  <a:srgbClr val="5D5A54"/>
+                </a:solidFill>
+                <a:latin typeface="Source Serif 4"/>
+              </a:rPr>
+              <a:t>"They'll never notice. I'll add water."</a:t>
+            </a:r>
+          </a:p>
+        </p:txBody>
+      </p:sp>
+      <p:sp>
+        <p:nvSpPr>
+          <p:cNvPr id="8" name="TextBox 7"/>
           <p:cNvSpPr txBox="1"/>
           <p:nvPr/>
         </p:nvSpPr>
         <p:spPr>
           <a:xfrm>
-            <a:off x="6583680" y="2286000"/>
-            <a:ext cx="4572000" cy="457200"/>
+            <a:off x="822960" y="3200400"/>
+            <a:ext cx="548640" cy="1005840"/>
           </a:xfrm>
           <a:prstGeom prst="rect">
             <a:avLst/>
@@ -9394,31 +9669,31 @@
           <a:p>
             <a:pPr algn="l">
               <a:spcAft>
-                <a:spcPts val="585"/>
-              </a:spcAft>
-            </a:pPr>
-            <a:r>
-              <a:rPr sz="1300" b="1" i="0">
-                <a:solidFill>
-                  <a:srgbClr val="0B2D5B"/>
-                </a:solidFill>
-                <a:latin typeface="Inter Tight"/>
-              </a:rPr>
-              <a:t>WHAT YOU DO</a:t>
-            </a:r>
-          </a:p>
-        </p:txBody>
-      </p:sp>
-      <p:sp>
-        <p:nvSpPr>
-          <p:cNvPr id="11" name="TextBox 10"/>
+                <a:spcPts val="1170"/>
+              </a:spcAft>
+            </a:pPr>
+            <a:r>
+              <a:rPr sz="2600" b="1" i="0">
+                <a:solidFill>
+                  <a:srgbClr val="F47B20"/>
+                </a:solidFill>
+                <a:latin typeface="Source Serif 4"/>
+              </a:rPr>
+              <a:t>2</a:t>
+            </a:r>
+          </a:p>
+        </p:txBody>
+      </p:sp>
+      <p:sp>
+        <p:nvSpPr>
+          <p:cNvPr id="9" name="TextBox 8"/>
           <p:cNvSpPr txBox="1"/>
           <p:nvPr/>
         </p:nvSpPr>
         <p:spPr>
           <a:xfrm>
-            <a:off x="6583680" y="2788920"/>
-            <a:ext cx="4572000" cy="3108960"/>
+            <a:off x="1463040" y="3236976"/>
+            <a:ext cx="9875520" cy="1005840"/>
           </a:xfrm>
           <a:prstGeom prst="rect">
             <a:avLst/>
@@ -9433,65 +9708,221 @@
           <a:p>
             <a:pPr algn="l">
               <a:spcAft>
-                <a:spcPts val="855"/>
-              </a:spcAft>
-            </a:pPr>
-            <a:r>
-              <a:rPr sz="1900" b="0" i="0">
+                <a:spcPts val="945"/>
+              </a:spcAft>
+            </a:pPr>
+            <a:r>
+              <a:rPr sz="2100" b="1" i="0">
                 <a:solidFill>
                   <a:srgbClr val="1C1B19"/>
                 </a:solidFill>
                 <a:latin typeface="Source Serif 4"/>
               </a:rPr>
-              <a:t>Call 911</a:t>
-            </a:r>
-          </a:p>
-          <a:p>
-            <a:pPr algn="l">
-              <a:spcAft>
-                <a:spcPts val="855"/>
-              </a:spcAft>
-            </a:pPr>
-            <a:r>
-              <a:rPr sz="1900" b="0" i="0">
+              <a:t>An older friend or sibling buys it.</a:t>
+            </a:r>
+          </a:p>
+          <a:p>
+            <a:pPr algn="l">
+              <a:spcAft>
+                <a:spcPts val="945"/>
+              </a:spcAft>
+            </a:pPr>
+            <a:r>
+              <a:rPr sz="1600" b="0" i="0">
+                <a:solidFill>
+                  <a:srgbClr val="5D5A54"/>
+                </a:solidFill>
+                <a:latin typeface="Source Serif 4"/>
+              </a:rPr>
+              <a:t>Or someone has a fake ID.</a:t>
+            </a:r>
+          </a:p>
+        </p:txBody>
+      </p:sp>
+      <p:sp>
+        <p:nvSpPr>
+          <p:cNvPr id="10" name="TextBox 9"/>
+          <p:cNvSpPr txBox="1"/>
+          <p:nvPr/>
+        </p:nvSpPr>
+        <p:spPr>
+          <a:xfrm>
+            <a:off x="822960" y="4206240"/>
+            <a:ext cx="548640" cy="1005840"/>
+          </a:xfrm>
+          <a:prstGeom prst="rect">
+            <a:avLst/>
+          </a:prstGeom>
+          <a:noFill/>
+        </p:spPr>
+        <p:txBody>
+          <a:bodyPr wrap="square" anchor="t" lIns="0" rIns="0" tIns="0" bIns="0">
+            <a:spAutoFit/>
+          </a:bodyPr>
+          <a:lstStyle/>
+          <a:p>
+            <a:pPr algn="l">
+              <a:spcAft>
+                <a:spcPts val="1170"/>
+              </a:spcAft>
+            </a:pPr>
+            <a:r>
+              <a:rPr sz="2600" b="1" i="0">
+                <a:solidFill>
+                  <a:srgbClr val="F47B20"/>
+                </a:solidFill>
+                <a:latin typeface="Source Serif 4"/>
+              </a:rPr>
+              <a:t>3</a:t>
+            </a:r>
+          </a:p>
+        </p:txBody>
+      </p:sp>
+      <p:sp>
+        <p:nvSpPr>
+          <p:cNvPr id="11" name="TextBox 10"/>
+          <p:cNvSpPr txBox="1"/>
+          <p:nvPr/>
+        </p:nvSpPr>
+        <p:spPr>
+          <a:xfrm>
+            <a:off x="1463040" y="4242816"/>
+            <a:ext cx="9875520" cy="1005840"/>
+          </a:xfrm>
+          <a:prstGeom prst="rect">
+            <a:avLst/>
+          </a:prstGeom>
+          <a:noFill/>
+        </p:spPr>
+        <p:txBody>
+          <a:bodyPr wrap="square" anchor="t" lIns="0" rIns="0" tIns="0" bIns="0">
+            <a:spAutoFit/>
+          </a:bodyPr>
+          <a:lstStyle/>
+          <a:p>
+            <a:pPr algn="l">
+              <a:spcAft>
+                <a:spcPts val="945"/>
+              </a:spcAft>
+            </a:pPr>
+            <a:r>
+              <a:rPr sz="2100" b="1" i="0">
                 <a:solidFill>
                   <a:srgbClr val="1C1B19"/>
                 </a:solidFill>
                 <a:latin typeface="Source Serif 4"/>
               </a:rPr>
-              <a:t>Roll them on their side, top knee bent</a:t>
-            </a:r>
-          </a:p>
-          <a:p>
-            <a:pPr algn="l">
-              <a:spcAft>
-                <a:spcPts val="855"/>
-              </a:spcAft>
-            </a:pPr>
-            <a:r>
-              <a:rPr sz="1900" b="0" i="0">
+              <a:t>A party, a sleepover, a trip.</a:t>
+            </a:r>
+          </a:p>
+          <a:p>
+            <a:pPr algn="l">
+              <a:spcAft>
+                <a:spcPts val="945"/>
+              </a:spcAft>
+            </a:pPr>
+            <a:r>
+              <a:rPr sz="1600" b="0" i="0">
+                <a:solidFill>
+                  <a:srgbClr val="5D5A54"/>
+                </a:solidFill>
+                <a:latin typeface="Source Serif 4"/>
+              </a:rPr>
+              <a:t>Whoever brought it, it ends up in a cup.</a:t>
+            </a:r>
+          </a:p>
+        </p:txBody>
+      </p:sp>
+      <p:sp>
+        <p:nvSpPr>
+          <p:cNvPr id="12" name="TextBox 11"/>
+          <p:cNvSpPr txBox="1"/>
+          <p:nvPr/>
+        </p:nvSpPr>
+        <p:spPr>
+          <a:xfrm>
+            <a:off x="822960" y="5212080"/>
+            <a:ext cx="548640" cy="1005840"/>
+          </a:xfrm>
+          <a:prstGeom prst="rect">
+            <a:avLst/>
+          </a:prstGeom>
+          <a:noFill/>
+        </p:spPr>
+        <p:txBody>
+          <a:bodyPr wrap="square" anchor="t" lIns="0" rIns="0" tIns="0" bIns="0">
+            <a:spAutoFit/>
+          </a:bodyPr>
+          <a:lstStyle/>
+          <a:p>
+            <a:pPr algn="l">
+              <a:spcAft>
+                <a:spcPts val="1170"/>
+              </a:spcAft>
+            </a:pPr>
+            <a:r>
+              <a:rPr sz="2600" b="1" i="0">
+                <a:solidFill>
+                  <a:srgbClr val="F47B20"/>
+                </a:solidFill>
+                <a:latin typeface="Source Serif 4"/>
+              </a:rPr>
+              <a:t>4</a:t>
+            </a:r>
+          </a:p>
+        </p:txBody>
+      </p:sp>
+      <p:sp>
+        <p:nvSpPr>
+          <p:cNvPr id="13" name="TextBox 12"/>
+          <p:cNvSpPr txBox="1"/>
+          <p:nvPr/>
+        </p:nvSpPr>
+        <p:spPr>
+          <a:xfrm>
+            <a:off x="1463040" y="5248656"/>
+            <a:ext cx="9875520" cy="1005840"/>
+          </a:xfrm>
+          <a:prstGeom prst="rect">
+            <a:avLst/>
+          </a:prstGeom>
+          <a:noFill/>
+        </p:spPr>
+        <p:txBody>
+          <a:bodyPr wrap="square" anchor="t" lIns="0" rIns="0" tIns="0" bIns="0">
+            <a:spAutoFit/>
+          </a:bodyPr>
+          <a:lstStyle/>
+          <a:p>
+            <a:pPr algn="l">
+              <a:spcAft>
+                <a:spcPts val="945"/>
+              </a:spcAft>
+            </a:pPr>
+            <a:r>
+              <a:rPr sz="2100" b="1" i="0">
                 <a:solidFill>
                   <a:srgbClr val="1C1B19"/>
                 </a:solidFill>
                 <a:latin typeface="Source Serif 4"/>
               </a:rPr>
-              <a:t>Stay with them</a:t>
-            </a:r>
-          </a:p>
-          <a:p>
-            <a:pPr algn="l">
-              <a:spcAft>
-                <a:spcPts val="855"/>
-              </a:spcAft>
-            </a:pPr>
-            <a:r>
-              <a:rPr sz="1900" b="0" i="0">
-                <a:solidFill>
-                  <a:srgbClr val="1C1B19"/>
-                </a:solidFill>
-                <a:latin typeface="Source Serif 4"/>
-              </a:rPr>
-              <a:t>Poison Control: 1-800-222-1222</a:t>
+              <a:t>An adult who says "better here than out there."</a:t>
+            </a:r>
+          </a:p>
+          <a:p>
+            <a:pPr algn="l">
+              <a:spcAft>
+                <a:spcPts val="945"/>
+              </a:spcAft>
+            </a:pPr>
+            <a:r>
+              <a:rPr sz="1600" b="0" i="0">
+                <a:solidFill>
+                  <a:srgbClr val="5D5A54"/>
+                </a:solidFill>
+                <a:latin typeface="Source Serif 4"/>
+              </a:rPr>
+              <a:t>It's illegal for an adult to let other people's kids drink at their place. They can be charged, and sued if someone gets hurt.</a:t>
             </a:r>
           </a:p>
         </p:txBody>
@@ -9600,7 +10031,7 @@
                 </a:solidFill>
                 <a:latin typeface="Inter Tight"/>
               </a:rPr>
-              <a:t>THREE MOMENTS</a:t>
+              <a:t>THEO'S FRIDAY</a:t>
             </a:r>
           </a:p>
         </p:txBody>
@@ -9653,7 +10084,7 @@
         <p:spPr>
           <a:xfrm>
             <a:off x="822960" y="1005840"/>
-            <a:ext cx="10515600" cy="914400"/>
+            <a:ext cx="10515600" cy="1097280"/>
           </a:xfrm>
           <a:prstGeom prst="rect">
             <a:avLst/>
@@ -9668,77 +10099,31 @@
           <a:p>
             <a:pPr algn="l">
               <a:spcAft>
-                <a:spcPts val="1530"/>
-              </a:spcAft>
-            </a:pPr>
-            <a:r>
-              <a:rPr sz="3400" b="1" i="0">
+                <a:spcPts val="1620"/>
+              </a:spcAft>
+            </a:pPr>
+            <a:r>
+              <a:rPr sz="3600" b="1" i="0">
                 <a:solidFill>
                   <a:srgbClr val="1C1B19"/>
                 </a:solidFill>
                 <a:latin typeface="Source Serif 4"/>
               </a:rPr>
-              <a:t>What would you do?</a:t>
-            </a:r>
-          </a:p>
-        </p:txBody>
-      </p:sp>
-      <p:sp>
-        <p:nvSpPr>
-          <p:cNvPr id="6" name="Rectangle 5"/>
-          <p:cNvSpPr/>
-          <p:nvPr/>
-        </p:nvSpPr>
-        <p:spPr>
-          <a:xfrm>
-            <a:off x="822960" y="2103120"/>
-            <a:ext cx="3322320" cy="3840480"/>
-          </a:xfrm>
-          <a:prstGeom prst="rect">
-            <a:avLst/>
-          </a:prstGeom>
-          <a:solidFill>
-            <a:srgbClr val="FFFFFF"/>
-          </a:solidFill>
-          <a:ln w="15875">
-            <a:solidFill>
-              <a:srgbClr val="D8D2C6"/>
-            </a:solidFill>
-          </a:ln>
-          <a:effectLst/>
-        </p:spPr>
-        <p:style>
-          <a:lnRef idx="1">
-            <a:schemeClr val="accent1"/>
-          </a:lnRef>
-          <a:fillRef idx="3">
-            <a:schemeClr val="accent1"/>
-          </a:fillRef>
-          <a:effectRef idx="2">
-            <a:schemeClr val="accent1"/>
-          </a:effectRef>
-          <a:fontRef idx="minor">
-            <a:schemeClr val="lt1"/>
-          </a:fontRef>
-        </p:style>
-        <p:txBody>
-          <a:bodyPr rtlCol="0" anchor="ctr"/>
-          <a:lstStyle/>
-          <a:p>
-            <a:pPr algn="ctr"/>
-          </a:p>
-        </p:txBody>
-      </p:sp>
-      <p:sp>
-        <p:nvSpPr>
-          <p:cNvPr id="7" name="TextBox 6"/>
+              <a:t>Vote 1, 2 or 3 with your fingers.</a:t>
+            </a:r>
+          </a:p>
+        </p:txBody>
+      </p:sp>
+      <p:sp>
+        <p:nvSpPr>
+          <p:cNvPr id="6" name="TextBox 5"/>
           <p:cNvSpPr txBox="1"/>
           <p:nvPr/>
         </p:nvSpPr>
         <p:spPr>
           <a:xfrm>
-            <a:off x="1051560" y="2286000"/>
-            <a:ext cx="2865120" cy="365760"/>
+            <a:off x="822960" y="2194560"/>
+            <a:ext cx="548640" cy="1005840"/>
           </a:xfrm>
           <a:prstGeom prst="rect">
             <a:avLst/>
@@ -9753,31 +10138,31 @@
           <a:p>
             <a:pPr algn="l">
               <a:spcAft>
-                <a:spcPts val="585"/>
-              </a:spcAft>
-            </a:pPr>
-            <a:r>
-              <a:rPr sz="1300" b="1" i="0">
-                <a:solidFill>
-                  <a:srgbClr val="0B2D5B"/>
-                </a:solidFill>
-                <a:latin typeface="Inter Tight"/>
-              </a:rPr>
-              <a:t>JAE</a:t>
-            </a:r>
-          </a:p>
-        </p:txBody>
-      </p:sp>
-      <p:sp>
-        <p:nvSpPr>
-          <p:cNvPr id="8" name="TextBox 7"/>
+                <a:spcPts val="1170"/>
+              </a:spcAft>
+            </a:pPr>
+            <a:r>
+              <a:rPr sz="2600" b="1" i="0">
+                <a:solidFill>
+                  <a:srgbClr val="F47B20"/>
+                </a:solidFill>
+                <a:latin typeface="Source Serif 4"/>
+              </a:rPr>
+              <a:t>1</a:t>
+            </a:r>
+          </a:p>
+        </p:txBody>
+      </p:sp>
+      <p:sp>
+        <p:nvSpPr>
+          <p:cNvPr id="7" name="TextBox 6"/>
           <p:cNvSpPr txBox="1"/>
           <p:nvPr/>
         </p:nvSpPr>
         <p:spPr>
           <a:xfrm>
-            <a:off x="1051560" y="2743200"/>
-            <a:ext cx="2865120" cy="3017520"/>
+            <a:off x="1463040" y="2231136"/>
+            <a:ext cx="9875520" cy="1005840"/>
           </a:xfrm>
           <a:prstGeom prst="rect">
             <a:avLst/>
@@ -9792,77 +10177,47 @@
           <a:p>
             <a:pPr algn="l">
               <a:spcAft>
-                <a:spcPts val="810"/>
-              </a:spcAft>
-            </a:pPr>
-            <a:r>
-              <a:rPr sz="1800" b="0" i="0">
+                <a:spcPts val="945"/>
+              </a:spcAft>
+            </a:pPr>
+            <a:r>
+              <a:rPr sz="2100" b="1" i="0">
                 <a:solidFill>
                   <a:srgbClr val="1C1B19"/>
                 </a:solidFill>
                 <a:latin typeface="Source Serif 4"/>
               </a:rPr>
-              <a:t>Your ride home had two beers three hours ago. He's 18, says he feels fine, and everyone else has left.</a:t>
-            </a:r>
-          </a:p>
-        </p:txBody>
-      </p:sp>
-      <p:sp>
-        <p:nvSpPr>
-          <p:cNvPr id="9" name="Rectangle 8"/>
-          <p:cNvSpPr/>
-          <p:nvPr/>
-        </p:nvSpPr>
-        <p:spPr>
-          <a:xfrm>
-            <a:off x="4419600" y="2103120"/>
-            <a:ext cx="3322320" cy="3840480"/>
-          </a:xfrm>
-          <a:prstGeom prst="rect">
-            <a:avLst/>
-          </a:prstGeom>
-          <a:solidFill>
-            <a:srgbClr val="FFFFFF"/>
-          </a:solidFill>
-          <a:ln w="15875">
-            <a:solidFill>
-              <a:srgbClr val="D8D2C6"/>
-            </a:solidFill>
-          </a:ln>
-          <a:effectLst/>
-        </p:spPr>
-        <p:style>
-          <a:lnRef idx="1">
-            <a:schemeClr val="accent1"/>
-          </a:lnRef>
-          <a:fillRef idx="3">
-            <a:schemeClr val="accent1"/>
-          </a:fillRef>
-          <a:effectRef idx="2">
-            <a:schemeClr val="accent1"/>
-          </a:effectRef>
-          <a:fontRef idx="minor">
-            <a:schemeClr val="lt1"/>
-          </a:fontRef>
-        </p:style>
-        <p:txBody>
-          <a:bodyPr rtlCol="0" anchor="ctr"/>
-          <a:lstStyle/>
-          <a:p>
-            <a:pPr algn="ctr"/>
-          </a:p>
-        </p:txBody>
-      </p:sp>
-      <p:sp>
-        <p:nvSpPr>
-          <p:cNvPr id="10" name="TextBox 9"/>
+              <a:t>9:00. Five friends hanging out at Maya's.</a:t>
+            </a:r>
+          </a:p>
+          <a:p>
+            <a:pPr algn="l">
+              <a:spcAft>
+                <a:spcPts val="945"/>
+              </a:spcAft>
+            </a:pPr>
+            <a:r>
+              <a:rPr sz="1600" b="0" i="0">
+                <a:solidFill>
+                  <a:srgbClr val="5D5A54"/>
+                </a:solidFill>
+                <a:latin typeface="Source Serif 4"/>
+              </a:rPr>
+              <a:t>Someone pulls out a bottle of vodka and passes it around.</a:t>
+            </a:r>
+          </a:p>
+        </p:txBody>
+      </p:sp>
+      <p:sp>
+        <p:nvSpPr>
+          <p:cNvPr id="8" name="TextBox 7"/>
           <p:cNvSpPr txBox="1"/>
           <p:nvPr/>
         </p:nvSpPr>
         <p:spPr>
           <a:xfrm>
-            <a:off x="4648200" y="2286000"/>
-            <a:ext cx="2865120" cy="365760"/>
+            <a:off x="822960" y="3200400"/>
+            <a:ext cx="548640" cy="1005840"/>
           </a:xfrm>
           <a:prstGeom prst="rect">
             <a:avLst/>
@@ -9877,31 +10232,31 @@
           <a:p>
             <a:pPr algn="l">
               <a:spcAft>
-                <a:spcPts val="585"/>
-              </a:spcAft>
-            </a:pPr>
-            <a:r>
-              <a:rPr sz="1300" b="1" i="0">
-                <a:solidFill>
-                  <a:srgbClr val="0B2D5B"/>
-                </a:solidFill>
-                <a:latin typeface="Inter Tight"/>
-              </a:rPr>
-              <a:t>AMARA</a:t>
-            </a:r>
-          </a:p>
-        </p:txBody>
-      </p:sp>
-      <p:sp>
-        <p:nvSpPr>
-          <p:cNvPr id="11" name="TextBox 10"/>
+                <a:spcPts val="1170"/>
+              </a:spcAft>
+            </a:pPr>
+            <a:r>
+              <a:rPr sz="2600" b="1" i="0">
+                <a:solidFill>
+                  <a:srgbClr val="F47B20"/>
+                </a:solidFill>
+                <a:latin typeface="Source Serif 4"/>
+              </a:rPr>
+              <a:t>2</a:t>
+            </a:r>
+          </a:p>
+        </p:txBody>
+      </p:sp>
+      <p:sp>
+        <p:nvSpPr>
+          <p:cNvPr id="9" name="TextBox 8"/>
           <p:cNvSpPr txBox="1"/>
           <p:nvPr/>
         </p:nvSpPr>
         <p:spPr>
           <a:xfrm>
-            <a:off x="4648200" y="2743200"/>
-            <a:ext cx="2865120" cy="3017520"/>
+            <a:off x="1463040" y="3236976"/>
+            <a:ext cx="9875520" cy="1005840"/>
           </a:xfrm>
           <a:prstGeom prst="rect">
             <a:avLst/>
@@ -9916,77 +10271,47 @@
           <a:p>
             <a:pPr algn="l">
               <a:spcAft>
-                <a:spcPts val="810"/>
-              </a:spcAft>
-            </a:pPr>
-            <a:r>
-              <a:rPr sz="1800" b="0" i="0">
+                <a:spcPts val="945"/>
+              </a:spcAft>
+            </a:pPr>
+            <a:r>
+              <a:rPr sz="2100" b="1" i="0">
                 <a:solidFill>
                   <a:srgbClr val="1C1B19"/>
                 </a:solidFill>
                 <a:latin typeface="Source Serif 4"/>
               </a:rPr>
-              <a:t>Your friend laughs about blacking out last weekend. It's the third time this semester.</a:t>
-            </a:r>
-          </a:p>
-        </p:txBody>
-      </p:sp>
-      <p:sp>
-        <p:nvSpPr>
-          <p:cNvPr id="12" name="Rectangle 11"/>
-          <p:cNvSpPr/>
-          <p:nvPr/>
-        </p:nvSpPr>
-        <p:spPr>
-          <a:xfrm>
-            <a:off x="8016239" y="2103120"/>
-            <a:ext cx="3322320" cy="3840480"/>
-          </a:xfrm>
-          <a:prstGeom prst="rect">
-            <a:avLst/>
-          </a:prstGeom>
-          <a:solidFill>
-            <a:srgbClr val="FFFFFF"/>
-          </a:solidFill>
-          <a:ln w="15875">
-            <a:solidFill>
-              <a:srgbClr val="D8D2C6"/>
-            </a:solidFill>
-          </a:ln>
-          <a:effectLst/>
-        </p:spPr>
-        <p:style>
-          <a:lnRef idx="1">
-            <a:schemeClr val="accent1"/>
-          </a:lnRef>
-          <a:fillRef idx="3">
-            <a:schemeClr val="accent1"/>
-          </a:fillRef>
-          <a:effectRef idx="2">
-            <a:schemeClr val="accent1"/>
-          </a:effectRef>
-          <a:fontRef idx="minor">
-            <a:schemeClr val="lt1"/>
-          </a:fontRef>
-        </p:style>
-        <p:txBody>
-          <a:bodyPr rtlCol="0" anchor="ctr"/>
-          <a:lstStyle/>
-          <a:p>
-            <a:pPr algn="ctr"/>
-          </a:p>
-        </p:txBody>
-      </p:sp>
-      <p:sp>
-        <p:nvSpPr>
-          <p:cNvPr id="13" name="TextBox 12"/>
+              <a:t>10:00. Someone starts a drinking game.</a:t>
+            </a:r>
+          </a:p>
+          <a:p>
+            <a:pPr algn="l">
+              <a:spcAft>
+                <a:spcPts val="945"/>
+              </a:spcAft>
+            </a:pPr>
+            <a:r>
+              <a:rPr sz="1600" b="0" i="0">
+                <a:solidFill>
+                  <a:srgbClr val="5D5A54"/>
+                </a:solidFill>
+                <a:latin typeface="Source Serif 4"/>
+              </a:rPr>
+              <a:t>Theo loses four rounds in twenty minutes. "I feel nothing."</a:t>
+            </a:r>
+          </a:p>
+        </p:txBody>
+      </p:sp>
+      <p:sp>
+        <p:nvSpPr>
+          <p:cNvPr id="10" name="TextBox 9"/>
           <p:cNvSpPr txBox="1"/>
           <p:nvPr/>
         </p:nvSpPr>
         <p:spPr>
           <a:xfrm>
-            <a:off x="8244839" y="2286000"/>
-            <a:ext cx="2865120" cy="365760"/>
+            <a:off x="822960" y="4206240"/>
+            <a:ext cx="548640" cy="1005840"/>
           </a:xfrm>
           <a:prstGeom prst="rect">
             <a:avLst/>
@@ -10001,31 +10326,31 @@
           <a:p>
             <a:pPr algn="l">
               <a:spcAft>
-                <a:spcPts val="585"/>
-              </a:spcAft>
-            </a:pPr>
-            <a:r>
-              <a:rPr sz="1300" b="1" i="0">
-                <a:solidFill>
-                  <a:srgbClr val="0B2D5B"/>
-                </a:solidFill>
-                <a:latin typeface="Inter Tight"/>
-              </a:rPr>
-              <a:t>A FAMILY DINNER</a:t>
-            </a:r>
-          </a:p>
-        </p:txBody>
-      </p:sp>
-      <p:sp>
-        <p:nvSpPr>
-          <p:cNvPr id="14" name="TextBox 13"/>
+                <a:spcPts val="1170"/>
+              </a:spcAft>
+            </a:pPr>
+            <a:r>
+              <a:rPr sz="2600" b="1" i="0">
+                <a:solidFill>
+                  <a:srgbClr val="F47B20"/>
+                </a:solidFill>
+                <a:latin typeface="Source Serif 4"/>
+              </a:rPr>
+              <a:t>3</a:t>
+            </a:r>
+          </a:p>
+        </p:txBody>
+      </p:sp>
+      <p:sp>
+        <p:nvSpPr>
+          <p:cNvPr id="11" name="TextBox 10"/>
           <p:cNvSpPr txBox="1"/>
           <p:nvPr/>
         </p:nvSpPr>
         <p:spPr>
           <a:xfrm>
-            <a:off x="8244839" y="2743200"/>
-            <a:ext cx="2865120" cy="3017520"/>
+            <a:off x="1463040" y="4242816"/>
+            <a:ext cx="9875520" cy="1005840"/>
           </a:xfrm>
           <a:prstGeom prst="rect">
             <a:avLst/>
@@ -10040,17 +10365,127 @@
           <a:p>
             <a:pPr algn="l">
               <a:spcAft>
-                <a:spcPts val="810"/>
-              </a:spcAft>
-            </a:pPr>
-            <a:r>
-              <a:rPr sz="1800" b="0" i="0">
+                <a:spcPts val="945"/>
+              </a:spcAft>
+            </a:pPr>
+            <a:r>
+              <a:rPr sz="2100" b="1" i="0">
                 <a:solidFill>
                   <a:srgbClr val="1C1B19"/>
                 </a:solidFill>
                 <a:latin typeface="Source Serif 4"/>
               </a:rPr>
-              <a:t>An uncle pours you a small glass of wine. Your parents are fine with it.</a:t>
+              <a:t>11:00. Theo is slurring and has thrown up.</a:t>
+            </a:r>
+          </a:p>
+          <a:p>
+            <a:pPr algn="l">
+              <a:spcAft>
+                <a:spcPts val="945"/>
+              </a:spcAft>
+            </a:pPr>
+            <a:r>
+              <a:rPr sz="1600" b="0" i="0">
+                <a:solidFill>
+                  <a:srgbClr val="5D5A54"/>
+                </a:solidFill>
+                <a:latin typeface="Source Serif 4"/>
+              </a:rPr>
+              <a:t>He wants to lie down alone on the couch in the corner.</a:t>
+            </a:r>
+          </a:p>
+        </p:txBody>
+      </p:sp>
+      <p:sp>
+        <p:nvSpPr>
+          <p:cNvPr id="12" name="TextBox 11"/>
+          <p:cNvSpPr txBox="1"/>
+          <p:nvPr/>
+        </p:nvSpPr>
+        <p:spPr>
+          <a:xfrm>
+            <a:off x="822960" y="5212080"/>
+            <a:ext cx="548640" cy="1005840"/>
+          </a:xfrm>
+          <a:prstGeom prst="rect">
+            <a:avLst/>
+          </a:prstGeom>
+          <a:noFill/>
+        </p:spPr>
+        <p:txBody>
+          <a:bodyPr wrap="square" anchor="t" lIns="0" rIns="0" tIns="0" bIns="0">
+            <a:spAutoFit/>
+          </a:bodyPr>
+          <a:lstStyle/>
+          <a:p>
+            <a:pPr algn="l">
+              <a:spcAft>
+                <a:spcPts val="1170"/>
+              </a:spcAft>
+            </a:pPr>
+            <a:r>
+              <a:rPr sz="2600" b="1" i="0">
+                <a:solidFill>
+                  <a:srgbClr val="F47B20"/>
+                </a:solidFill>
+                <a:latin typeface="Source Serif 4"/>
+              </a:rPr>
+              <a:t>4</a:t>
+            </a:r>
+          </a:p>
+        </p:txBody>
+      </p:sp>
+      <p:sp>
+        <p:nvSpPr>
+          <p:cNvPr id="13" name="TextBox 12"/>
+          <p:cNvSpPr txBox="1"/>
+          <p:nvPr/>
+        </p:nvSpPr>
+        <p:spPr>
+          <a:xfrm>
+            <a:off x="1463040" y="5248656"/>
+            <a:ext cx="9875520" cy="1005840"/>
+          </a:xfrm>
+          <a:prstGeom prst="rect">
+            <a:avLst/>
+          </a:prstGeom>
+          <a:noFill/>
+        </p:spPr>
+        <p:txBody>
+          <a:bodyPr wrap="square" anchor="t" lIns="0" rIns="0" tIns="0" bIns="0">
+            <a:spAutoFit/>
+          </a:bodyPr>
+          <a:lstStyle/>
+          <a:p>
+            <a:pPr algn="l">
+              <a:spcAft>
+                <a:spcPts val="945"/>
+              </a:spcAft>
+            </a:pPr>
+            <a:r>
+              <a:rPr sz="2100" b="1" i="0">
+                <a:solidFill>
+                  <a:srgbClr val="1C1B19"/>
+                </a:solidFill>
+                <a:latin typeface="Source Serif 4"/>
+              </a:rPr>
+              <a:t>11:20. Theo won't wake up.</a:t>
+            </a:r>
+          </a:p>
+          <a:p>
+            <a:pPr algn="l">
+              <a:spcAft>
+                <a:spcPts val="945"/>
+              </a:spcAft>
+            </a:pPr>
+            <a:r>
+              <a:rPr sz="1600" b="0" i="0">
+                <a:solidFill>
+                  <a:srgbClr val="5D5A54"/>
+                </a:solidFill>
+                <a:latin typeface="Source Serif 4"/>
+              </a:rPr>
+              <a:t>Long pauses in his breathing. "Don't call. We'll all get in trouble."</a:t>
             </a:r>
           </a:p>
         </p:txBody>
@@ -10159,7 +10594,7 @@
                 </a:solidFill>
                 <a:latin typeface="Inter Tight"/>
               </a:rPr>
-              <a:t>YOUR PLAN</a:t>
+              <a:t>WHEN TO CALL</a:t>
             </a:r>
           </a:p>
         </p:txBody>
@@ -10212,7 +10647,7 @@
         <p:spPr>
           <a:xfrm>
             <a:off x="822960" y="1005840"/>
-            <a:ext cx="10515600" cy="1097280"/>
+            <a:ext cx="10515600" cy="914400"/>
           </a:xfrm>
           <a:prstGeom prst="rect">
             <a:avLst/>
@@ -10227,31 +10662,77 @@
           <a:p>
             <a:pPr algn="l">
               <a:spcAft>
-                <a:spcPts val="1620"/>
-              </a:spcAft>
-            </a:pPr>
-            <a:r>
-              <a:rPr sz="3600" b="1" i="0">
+                <a:spcPts val="1530"/>
+              </a:spcAft>
+            </a:pPr>
+            <a:r>
+              <a:rPr sz="3400" b="1" i="0">
                 <a:solidFill>
                   <a:srgbClr val="1C1B19"/>
                 </a:solidFill>
                 <a:latin typeface="Source Serif 4"/>
               </a:rPr>
-              <a:t>Set it up before you go</a:t>
-            </a:r>
-          </a:p>
-        </p:txBody>
-      </p:sp>
-      <p:sp>
-        <p:nvSpPr>
-          <p:cNvPr id="6" name="TextBox 5"/>
+              <a:t>Any one of these: call 911</a:t>
+            </a:r>
+          </a:p>
+        </p:txBody>
+      </p:sp>
+      <p:sp>
+        <p:nvSpPr>
+          <p:cNvPr id="6" name="Rectangle 5"/>
+          <p:cNvSpPr/>
+          <p:nvPr/>
+        </p:nvSpPr>
+        <p:spPr>
+          <a:xfrm>
+            <a:off x="822960" y="2103120"/>
+            <a:ext cx="5120640" cy="3931920"/>
+          </a:xfrm>
+          <a:prstGeom prst="rect">
+            <a:avLst/>
+          </a:prstGeom>
+          <a:solidFill>
+            <a:srgbClr val="FFFFFF"/>
+          </a:solidFill>
+          <a:ln w="15875">
+            <a:solidFill>
+              <a:srgbClr val="D8D2C6"/>
+            </a:solidFill>
+          </a:ln>
+          <a:effectLst/>
+        </p:spPr>
+        <p:style>
+          <a:lnRef idx="1">
+            <a:schemeClr val="accent1"/>
+          </a:lnRef>
+          <a:fillRef idx="3">
+            <a:schemeClr val="accent1"/>
+          </a:fillRef>
+          <a:effectRef idx="2">
+            <a:schemeClr val="accent1"/>
+          </a:effectRef>
+          <a:fontRef idx="minor">
+            <a:schemeClr val="lt1"/>
+          </a:fontRef>
+        </p:style>
+        <p:txBody>
+          <a:bodyPr rtlCol="0" anchor="ctr"/>
+          <a:lstStyle/>
+          <a:p>
+            <a:pPr algn="ctr"/>
+          </a:p>
+        </p:txBody>
+      </p:sp>
+      <p:sp>
+        <p:nvSpPr>
+          <p:cNvPr id="7" name="TextBox 6"/>
           <p:cNvSpPr txBox="1"/>
           <p:nvPr/>
         </p:nvSpPr>
         <p:spPr>
           <a:xfrm>
-            <a:off x="822960" y="2194560"/>
-            <a:ext cx="548640" cy="1005840"/>
+            <a:off x="1097280" y="2286000"/>
+            <a:ext cx="4572000" cy="457200"/>
           </a:xfrm>
           <a:prstGeom prst="rect">
             <a:avLst/>
@@ -10266,31 +10747,31 @@
           <a:p>
             <a:pPr algn="l">
               <a:spcAft>
-                <a:spcPts val="1170"/>
-              </a:spcAft>
-            </a:pPr>
-            <a:r>
-              <a:rPr sz="2600" b="1" i="0">
-                <a:solidFill>
-                  <a:srgbClr val="F47B20"/>
-                </a:solidFill>
-                <a:latin typeface="Source Serif 4"/>
-              </a:rPr>
-              <a:t>1</a:t>
-            </a:r>
-          </a:p>
-        </p:txBody>
-      </p:sp>
-      <p:sp>
-        <p:nvSpPr>
-          <p:cNvPr id="7" name="TextBox 6"/>
+                <a:spcPts val="585"/>
+              </a:spcAft>
+            </a:pPr>
+            <a:r>
+              <a:rPr sz="1300" b="1" i="0">
+                <a:solidFill>
+                  <a:srgbClr val="0B2D5B"/>
+                </a:solidFill>
+                <a:latin typeface="Inter Tight"/>
+              </a:rPr>
+              <a:t>THE SIGNS</a:t>
+            </a:r>
+          </a:p>
+        </p:txBody>
+      </p:sp>
+      <p:sp>
+        <p:nvSpPr>
+          <p:cNvPr id="8" name="TextBox 7"/>
           <p:cNvSpPr txBox="1"/>
           <p:nvPr/>
         </p:nvSpPr>
         <p:spPr>
           <a:xfrm>
-            <a:off x="1463040" y="2231136"/>
-            <a:ext cx="9875520" cy="1005840"/>
+            <a:off x="1097280" y="2788920"/>
+            <a:ext cx="4572000" cy="3108960"/>
           </a:xfrm>
           <a:prstGeom prst="rect">
             <a:avLst/>
@@ -10305,47 +10786,125 @@
           <a:p>
             <a:pPr algn="l">
               <a:spcAft>
-                <a:spcPts val="945"/>
-              </a:spcAft>
-            </a:pPr>
-            <a:r>
-              <a:rPr sz="2100" b="1" i="0">
+                <a:spcPts val="855"/>
+              </a:spcAft>
+            </a:pPr>
+            <a:r>
+              <a:rPr sz="1900" b="0" i="0">
                 <a:solidFill>
                   <a:srgbClr val="1C1B19"/>
                 </a:solidFill>
                 <a:latin typeface="Source Serif 4"/>
               </a:rPr>
-              <a:t>Pick your exit-plan person.</a:t>
-            </a:r>
-          </a:p>
-          <a:p>
-            <a:pPr algn="l">
-              <a:spcAft>
-                <a:spcPts val="945"/>
-              </a:spcAft>
-            </a:pPr>
-            <a:r>
-              <a:rPr sz="1600" b="0" i="0">
-                <a:solidFill>
-                  <a:srgbClr val="5D5A54"/>
-                </a:solidFill>
-                <a:latin typeface="Source Serif 4"/>
-              </a:rPr>
-              <a:t>Someone you can text a code word to, no questions.</a:t>
-            </a:r>
-          </a:p>
-        </p:txBody>
-      </p:sp>
-      <p:sp>
-        <p:nvSpPr>
-          <p:cNvPr id="8" name="TextBox 7"/>
+              <a:t>Can't be woken up</a:t>
+            </a:r>
+          </a:p>
+          <a:p>
+            <a:pPr algn="l">
+              <a:spcAft>
+                <a:spcPts val="855"/>
+              </a:spcAft>
+            </a:pPr>
+            <a:r>
+              <a:rPr sz="1900" b="0" i="0">
+                <a:solidFill>
+                  <a:srgbClr val="1C1B19"/>
+                </a:solidFill>
+                <a:latin typeface="Source Serif 4"/>
+              </a:rPr>
+              <a:t>Vomiting while passed out</a:t>
+            </a:r>
+          </a:p>
+          <a:p>
+            <a:pPr algn="l">
+              <a:spcAft>
+                <a:spcPts val="855"/>
+              </a:spcAft>
+            </a:pPr>
+            <a:r>
+              <a:rPr sz="1900" b="0" i="0">
+                <a:solidFill>
+                  <a:srgbClr val="1C1B19"/>
+                </a:solidFill>
+                <a:latin typeface="Source Serif 4"/>
+              </a:rPr>
+              <a:t>Slow or gappy breathing</a:t>
+            </a:r>
+          </a:p>
+          <a:p>
+            <a:pPr algn="l">
+              <a:spcAft>
+                <a:spcPts val="855"/>
+              </a:spcAft>
+            </a:pPr>
+            <a:r>
+              <a:rPr sz="1900" b="0" i="0">
+                <a:solidFill>
+                  <a:srgbClr val="1C1B19"/>
+                </a:solidFill>
+                <a:latin typeface="Source Serif 4"/>
+              </a:rPr>
+              <a:t>Cold, pale or bluish skin, or a seizure</a:t>
+            </a:r>
+          </a:p>
+        </p:txBody>
+      </p:sp>
+      <p:sp>
+        <p:nvSpPr>
+          <p:cNvPr id="9" name="Rectangle 8"/>
+          <p:cNvSpPr/>
+          <p:nvPr/>
+        </p:nvSpPr>
+        <p:spPr>
+          <a:xfrm>
+            <a:off x="6309360" y="2103120"/>
+            <a:ext cx="5120640" cy="3931920"/>
+          </a:xfrm>
+          <a:prstGeom prst="rect">
+            <a:avLst/>
+          </a:prstGeom>
+          <a:solidFill>
+            <a:srgbClr val="FFFFFF"/>
+          </a:solidFill>
+          <a:ln w="15875">
+            <a:solidFill>
+              <a:srgbClr val="D8D2C6"/>
+            </a:solidFill>
+          </a:ln>
+          <a:effectLst/>
+        </p:spPr>
+        <p:style>
+          <a:lnRef idx="1">
+            <a:schemeClr val="accent1"/>
+          </a:lnRef>
+          <a:fillRef idx="3">
+            <a:schemeClr val="accent1"/>
+          </a:fillRef>
+          <a:effectRef idx="2">
+            <a:schemeClr val="accent1"/>
+          </a:effectRef>
+          <a:fontRef idx="minor">
+            <a:schemeClr val="lt1"/>
+          </a:fontRef>
+        </p:style>
+        <p:txBody>
+          <a:bodyPr rtlCol="0" anchor="ctr"/>
+          <a:lstStyle/>
+          <a:p>
+            <a:pPr algn="ctr"/>
+          </a:p>
+        </p:txBody>
+      </p:sp>
+      <p:sp>
+        <p:nvSpPr>
+          <p:cNvPr id="10" name="TextBox 9"/>
           <p:cNvSpPr txBox="1"/>
           <p:nvPr/>
         </p:nvSpPr>
         <p:spPr>
           <a:xfrm>
-            <a:off x="822960" y="3200400"/>
-            <a:ext cx="548640" cy="1005840"/>
+            <a:off x="6583680" y="2286000"/>
+            <a:ext cx="4572000" cy="457200"/>
           </a:xfrm>
           <a:prstGeom prst="rect">
             <a:avLst/>
@@ -10360,31 +10919,31 @@
           <a:p>
             <a:pPr algn="l">
               <a:spcAft>
-                <a:spcPts val="1170"/>
-              </a:spcAft>
-            </a:pPr>
-            <a:r>
-              <a:rPr sz="2600" b="1" i="0">
-                <a:solidFill>
-                  <a:srgbClr val="F47B20"/>
-                </a:solidFill>
-                <a:latin typeface="Source Serif 4"/>
-              </a:rPr>
-              <a:t>2</a:t>
-            </a:r>
-          </a:p>
-        </p:txBody>
-      </p:sp>
-      <p:sp>
-        <p:nvSpPr>
-          <p:cNvPr id="9" name="TextBox 8"/>
+                <a:spcPts val="585"/>
+              </a:spcAft>
+            </a:pPr>
+            <a:r>
+              <a:rPr sz="1300" b="1" i="0">
+                <a:solidFill>
+                  <a:srgbClr val="0B2D5B"/>
+                </a:solidFill>
+                <a:latin typeface="Inter Tight"/>
+              </a:rPr>
+              <a:t>WHAT YOU DO</a:t>
+            </a:r>
+          </a:p>
+        </p:txBody>
+      </p:sp>
+      <p:sp>
+        <p:nvSpPr>
+          <p:cNvPr id="11" name="TextBox 10"/>
           <p:cNvSpPr txBox="1"/>
           <p:nvPr/>
         </p:nvSpPr>
         <p:spPr>
           <a:xfrm>
-            <a:off x="1463040" y="3236976"/>
-            <a:ext cx="9875520" cy="1005840"/>
+            <a:off x="6583680" y="2788920"/>
+            <a:ext cx="4572000" cy="3108960"/>
           </a:xfrm>
           <a:prstGeom prst="rect">
             <a:avLst/>
@@ -10399,221 +10958,65 @@
           <a:p>
             <a:pPr algn="l">
               <a:spcAft>
-                <a:spcPts val="945"/>
-              </a:spcAft>
-            </a:pPr>
-            <a:r>
-              <a:rPr sz="2100" b="1" i="0">
+                <a:spcPts val="855"/>
+              </a:spcAft>
+            </a:pPr>
+            <a:r>
+              <a:rPr sz="1900" b="0" i="0">
                 <a:solidFill>
                   <a:srgbClr val="1C1B19"/>
                 </a:solidFill>
                 <a:latin typeface="Source Serif 4"/>
               </a:rPr>
-              <a:t>Not drinking is normal.</a:t>
-            </a:r>
-          </a:p>
-          <a:p>
-            <a:pPr algn="l">
-              <a:spcAft>
-                <a:spcPts val="945"/>
-              </a:spcAft>
-            </a:pPr>
-            <a:r>
-              <a:rPr sz="1600" b="0" i="0">
-                <a:solidFill>
-                  <a:srgbClr val="5D5A54"/>
-                </a:solidFill>
-                <a:latin typeface="Source Serif 4"/>
-              </a:rPr>
-              <a:t>Most of your grade made that choice.</a:t>
-            </a:r>
-          </a:p>
-        </p:txBody>
-      </p:sp>
-      <p:sp>
-        <p:nvSpPr>
-          <p:cNvPr id="10" name="TextBox 9"/>
-          <p:cNvSpPr txBox="1"/>
-          <p:nvPr/>
-        </p:nvSpPr>
-        <p:spPr>
-          <a:xfrm>
-            <a:off x="822960" y="4206240"/>
-            <a:ext cx="548640" cy="1005840"/>
-          </a:xfrm>
-          <a:prstGeom prst="rect">
-            <a:avLst/>
-          </a:prstGeom>
-          <a:noFill/>
-        </p:spPr>
-        <p:txBody>
-          <a:bodyPr wrap="square" anchor="t" lIns="0" rIns="0" tIns="0" bIns="0">
-            <a:spAutoFit/>
-          </a:bodyPr>
-          <a:lstStyle/>
-          <a:p>
-            <a:pPr algn="l">
-              <a:spcAft>
-                <a:spcPts val="1170"/>
-              </a:spcAft>
-            </a:pPr>
-            <a:r>
-              <a:rPr sz="2600" b="1" i="0">
-                <a:solidFill>
-                  <a:srgbClr val="F47B20"/>
-                </a:solidFill>
-                <a:latin typeface="Source Serif 4"/>
-              </a:rPr>
-              <a:t>3</a:t>
-            </a:r>
-          </a:p>
-        </p:txBody>
-      </p:sp>
-      <p:sp>
-        <p:nvSpPr>
-          <p:cNvPr id="11" name="TextBox 10"/>
-          <p:cNvSpPr txBox="1"/>
-          <p:nvPr/>
-        </p:nvSpPr>
-        <p:spPr>
-          <a:xfrm>
-            <a:off x="1463040" y="4242816"/>
-            <a:ext cx="9875520" cy="1005840"/>
-          </a:xfrm>
-          <a:prstGeom prst="rect">
-            <a:avLst/>
-          </a:prstGeom>
-          <a:noFill/>
-        </p:spPr>
-        <p:txBody>
-          <a:bodyPr wrap="square" anchor="t" lIns="0" rIns="0" tIns="0" bIns="0">
-            <a:spAutoFit/>
-          </a:bodyPr>
-          <a:lstStyle/>
-          <a:p>
-            <a:pPr algn="l">
-              <a:spcAft>
-                <a:spcPts val="945"/>
-              </a:spcAft>
-            </a:pPr>
-            <a:r>
-              <a:rPr sz="2100" b="1" i="0">
+              <a:t>Call 911</a:t>
+            </a:r>
+          </a:p>
+          <a:p>
+            <a:pPr algn="l">
+              <a:spcAft>
+                <a:spcPts val="855"/>
+              </a:spcAft>
+            </a:pPr>
+            <a:r>
+              <a:rPr sz="1900" b="0" i="0">
                 <a:solidFill>
                   <a:srgbClr val="1C1B19"/>
                 </a:solidFill>
                 <a:latin typeface="Source Serif 4"/>
               </a:rPr>
-              <a:t>If alcohol is there, protect the basics.</a:t>
-            </a:r>
-          </a:p>
-          <a:p>
-            <a:pPr algn="l">
-              <a:spcAft>
-                <a:spcPts val="945"/>
-              </a:spcAft>
-            </a:pPr>
-            <a:r>
-              <a:rPr sz="1600" b="0" i="0">
-                <a:solidFill>
-                  <a:srgbClr val="5D5A54"/>
-                </a:solidFill>
-                <a:latin typeface="Source Serif 4"/>
-              </a:rPr>
-              <a:t>Eat first, go slow, own cup, never mix.</a:t>
-            </a:r>
-          </a:p>
-        </p:txBody>
-      </p:sp>
-      <p:sp>
-        <p:nvSpPr>
-          <p:cNvPr id="12" name="TextBox 11"/>
-          <p:cNvSpPr txBox="1"/>
-          <p:nvPr/>
-        </p:nvSpPr>
-        <p:spPr>
-          <a:xfrm>
-            <a:off x="822960" y="5212080"/>
-            <a:ext cx="548640" cy="1005840"/>
-          </a:xfrm>
-          <a:prstGeom prst="rect">
-            <a:avLst/>
-          </a:prstGeom>
-          <a:noFill/>
-        </p:spPr>
-        <p:txBody>
-          <a:bodyPr wrap="square" anchor="t" lIns="0" rIns="0" tIns="0" bIns="0">
-            <a:spAutoFit/>
-          </a:bodyPr>
-          <a:lstStyle/>
-          <a:p>
-            <a:pPr algn="l">
-              <a:spcAft>
-                <a:spcPts val="1170"/>
-              </a:spcAft>
-            </a:pPr>
-            <a:r>
-              <a:rPr sz="2600" b="1" i="0">
-                <a:solidFill>
-                  <a:srgbClr val="F47B20"/>
-                </a:solidFill>
-                <a:latin typeface="Source Serif 4"/>
-              </a:rPr>
-              <a:t>4</a:t>
-            </a:r>
-          </a:p>
-        </p:txBody>
-      </p:sp>
-      <p:sp>
-        <p:nvSpPr>
-          <p:cNvPr id="13" name="TextBox 12"/>
-          <p:cNvSpPr txBox="1"/>
-          <p:nvPr/>
-        </p:nvSpPr>
-        <p:spPr>
-          <a:xfrm>
-            <a:off x="1463040" y="5248656"/>
-            <a:ext cx="9875520" cy="1005840"/>
-          </a:xfrm>
-          <a:prstGeom prst="rect">
-            <a:avLst/>
-          </a:prstGeom>
-          <a:noFill/>
-        </p:spPr>
-        <p:txBody>
-          <a:bodyPr wrap="square" anchor="t" lIns="0" rIns="0" tIns="0" bIns="0">
-            <a:spAutoFit/>
-          </a:bodyPr>
-          <a:lstStyle/>
-          <a:p>
-            <a:pPr algn="l">
-              <a:spcAft>
-                <a:spcPts val="945"/>
-              </a:spcAft>
-            </a:pPr>
-            <a:r>
-              <a:rPr sz="2100" b="1" i="0">
+              <a:t>Roll them on their side, top knee bent</a:t>
+            </a:r>
+          </a:p>
+          <a:p>
+            <a:pPr algn="l">
+              <a:spcAft>
+                <a:spcPts val="855"/>
+              </a:spcAft>
+            </a:pPr>
+            <a:r>
+              <a:rPr sz="1900" b="0" i="0">
                 <a:solidFill>
                   <a:srgbClr val="1C1B19"/>
                 </a:solidFill>
                 <a:latin typeface="Source Serif 4"/>
               </a:rPr>
-              <a:t>Never ride with a driver who drank.</a:t>
-            </a:r>
-          </a:p>
-          <a:p>
-            <a:pPr algn="l">
-              <a:spcAft>
-                <a:spcPts val="945"/>
-              </a:spcAft>
-            </a:pPr>
-            <a:r>
-              <a:rPr sz="1600" b="0" i="0">
-                <a:solidFill>
-                  <a:srgbClr val="5D5A54"/>
-                </a:solidFill>
-                <a:latin typeface="Source Serif 4"/>
-              </a:rPr>
-              <a:t>Call your person instead.</a:t>
+              <a:t>Stay with them</a:t>
+            </a:r>
+          </a:p>
+          <a:p>
+            <a:pPr algn="l">
+              <a:spcAft>
+                <a:spcPts val="855"/>
+              </a:spcAft>
+            </a:pPr>
+            <a:r>
+              <a:rPr sz="1900" b="0" i="0">
+                <a:solidFill>
+                  <a:srgbClr val="1C1B19"/>
+                </a:solidFill>
+                <a:latin typeface="Source Serif 4"/>
+              </a:rPr>
+              <a:t>Poison Control: 1-800-222-1222</a:t>
             </a:r>
           </a:p>
         </p:txBody>
